--- a/docs/Final presentation slides - summarized.pptx
+++ b/docs/Final presentation slides - summarized.pptx
@@ -1,6 +1,6 @@
 
 <file path=ppt/presentation.xml><?xml version="1.0" encoding="utf-8"?>
-<p:presentation xmlns:a="http://schemas.openxmlformats.org/drawingml/2006/main" xmlns:r="http://schemas.openxmlformats.org/officeDocument/2006/relationships" xmlns:p="http://schemas.openxmlformats.org/presentationml/2006/main" saveSubsetFonts="1">
+<p:presentation xmlns:a="http://schemas.openxmlformats.org/drawingml/2006/main" xmlns:r="http://schemas.openxmlformats.org/officeDocument/2006/relationships" xmlns:p="http://schemas.openxmlformats.org/presentationml/2006/main" saveSubsetFonts="1" autoCompressPictures="0">
   <p:sldMasterIdLst>
     <p:sldMasterId id="2147483648" r:id="rId1"/>
   </p:sldMasterIdLst>
@@ -10,19 +10,31 @@
     <p:sldId id="258" r:id="rId4"/>
     <p:sldId id="259" r:id="rId5"/>
     <p:sldId id="260" r:id="rId6"/>
-    <p:sldId id="262" r:id="rId7"/>
-    <p:sldId id="264" r:id="rId8"/>
-    <p:sldId id="266" r:id="rId9"/>
+    <p:sldId id="261" r:id="rId7"/>
+    <p:sldId id="262" r:id="rId8"/>
+    <p:sldId id="277" r:id="rId9"/>
     <p:sldId id="263" r:id="rId10"/>
-    <p:sldId id="265" r:id="rId11"/>
+    <p:sldId id="264" r:id="rId11"/>
+    <p:sldId id="265" r:id="rId12"/>
+    <p:sldId id="266" r:id="rId13"/>
+    <p:sldId id="267" r:id="rId14"/>
+    <p:sldId id="268" r:id="rId15"/>
+    <p:sldId id="269" r:id="rId16"/>
+    <p:sldId id="270" r:id="rId17"/>
+    <p:sldId id="276" r:id="rId18"/>
+    <p:sldId id="271" r:id="rId19"/>
+    <p:sldId id="272" r:id="rId20"/>
+    <p:sldId id="273" r:id="rId21"/>
+    <p:sldId id="274" r:id="rId22"/>
+    <p:sldId id="275" r:id="rId23"/>
   </p:sldIdLst>
-  <p:sldSz cx="12192000" cy="6858000"/>
+  <p:sldSz cx="9144000" cy="6858000" type="screen4x3"/>
   <p:notesSz cx="6858000" cy="9144000"/>
   <p:defaultTextStyle>
     <a:defPPr>
       <a:defRPr lang="en-US"/>
     </a:defPPr>
-    <a:lvl1pPr marL="0" algn="l" defTabSz="914400" rtl="0" eaLnBrk="1" latinLnBrk="0" hangingPunct="1">
+    <a:lvl1pPr marL="0" algn="l" defTabSz="457200" rtl="0" eaLnBrk="1" latinLnBrk="0" hangingPunct="1">
       <a:defRPr sz="1800" kern="1200">
         <a:solidFill>
           <a:schemeClr val="tx1"/>
@@ -32,7 +44,7 @@
         <a:cs typeface="+mn-cs"/>
       </a:defRPr>
     </a:lvl1pPr>
-    <a:lvl2pPr marL="457200" algn="l" defTabSz="914400" rtl="0" eaLnBrk="1" latinLnBrk="0" hangingPunct="1">
+    <a:lvl2pPr marL="457200" algn="l" defTabSz="457200" rtl="0" eaLnBrk="1" latinLnBrk="0" hangingPunct="1">
       <a:defRPr sz="1800" kern="1200">
         <a:solidFill>
           <a:schemeClr val="tx1"/>
@@ -42,7 +54,7 @@
         <a:cs typeface="+mn-cs"/>
       </a:defRPr>
     </a:lvl2pPr>
-    <a:lvl3pPr marL="914400" algn="l" defTabSz="914400" rtl="0" eaLnBrk="1" latinLnBrk="0" hangingPunct="1">
+    <a:lvl3pPr marL="914400" algn="l" defTabSz="457200" rtl="0" eaLnBrk="1" latinLnBrk="0" hangingPunct="1">
       <a:defRPr sz="1800" kern="1200">
         <a:solidFill>
           <a:schemeClr val="tx1"/>
@@ -52,7 +64,7 @@
         <a:cs typeface="+mn-cs"/>
       </a:defRPr>
     </a:lvl3pPr>
-    <a:lvl4pPr marL="1371600" algn="l" defTabSz="914400" rtl="0" eaLnBrk="1" latinLnBrk="0" hangingPunct="1">
+    <a:lvl4pPr marL="1371600" algn="l" defTabSz="457200" rtl="0" eaLnBrk="1" latinLnBrk="0" hangingPunct="1">
       <a:defRPr sz="1800" kern="1200">
         <a:solidFill>
           <a:schemeClr val="tx1"/>
@@ -62,7 +74,7 @@
         <a:cs typeface="+mn-cs"/>
       </a:defRPr>
     </a:lvl4pPr>
-    <a:lvl5pPr marL="1828800" algn="l" defTabSz="914400" rtl="0" eaLnBrk="1" latinLnBrk="0" hangingPunct="1">
+    <a:lvl5pPr marL="1828800" algn="l" defTabSz="457200" rtl="0" eaLnBrk="1" latinLnBrk="0" hangingPunct="1">
       <a:defRPr sz="1800" kern="1200">
         <a:solidFill>
           <a:schemeClr val="tx1"/>
@@ -72,7 +84,7 @@
         <a:cs typeface="+mn-cs"/>
       </a:defRPr>
     </a:lvl5pPr>
-    <a:lvl6pPr marL="2286000" algn="l" defTabSz="914400" rtl="0" eaLnBrk="1" latinLnBrk="0" hangingPunct="1">
+    <a:lvl6pPr marL="2286000" algn="l" defTabSz="457200" rtl="0" eaLnBrk="1" latinLnBrk="0" hangingPunct="1">
       <a:defRPr sz="1800" kern="1200">
         <a:solidFill>
           <a:schemeClr val="tx1"/>
@@ -82,7 +94,7 @@
         <a:cs typeface="+mn-cs"/>
       </a:defRPr>
     </a:lvl6pPr>
-    <a:lvl7pPr marL="2743200" algn="l" defTabSz="914400" rtl="0" eaLnBrk="1" latinLnBrk="0" hangingPunct="1">
+    <a:lvl7pPr marL="2743200" algn="l" defTabSz="457200" rtl="0" eaLnBrk="1" latinLnBrk="0" hangingPunct="1">
       <a:defRPr sz="1800" kern="1200">
         <a:solidFill>
           <a:schemeClr val="tx1"/>
@@ -92,7 +104,7 @@
         <a:cs typeface="+mn-cs"/>
       </a:defRPr>
     </a:lvl7pPr>
-    <a:lvl8pPr marL="3200400" algn="l" defTabSz="914400" rtl="0" eaLnBrk="1" latinLnBrk="0" hangingPunct="1">
+    <a:lvl8pPr marL="3200400" algn="l" defTabSz="457200" rtl="0" eaLnBrk="1" latinLnBrk="0" hangingPunct="1">
       <a:defRPr sz="1800" kern="1200">
         <a:solidFill>
           <a:schemeClr val="tx1"/>
@@ -102,7 +114,7 @@
         <a:cs typeface="+mn-cs"/>
       </a:defRPr>
     </a:lvl8pPr>
-    <a:lvl9pPr marL="3657600" algn="l" defTabSz="914400" rtl="0" eaLnBrk="1" latinLnBrk="0" hangingPunct="1">
+    <a:lvl9pPr marL="3657600" algn="l" defTabSz="457200" rtl="0" eaLnBrk="1" latinLnBrk="0" hangingPunct="1">
       <a:defRPr sz="1800" kern="1200">
         <a:solidFill>
           <a:schemeClr val="tx1"/>
@@ -113,6 +125,22 @@
       </a:defRPr>
     </a:lvl9pPr>
   </p:defaultTextStyle>
+  <p:extLst>
+    <p:ext uri="{EFAFB233-063F-42B5-8137-9DF3F51BA10A}">
+      <p15:sldGuideLst xmlns:p15="http://schemas.microsoft.com/office/powerpoint/2012/main">
+        <p15:guide id="1" orient="horz" pos="2160">
+          <p15:clr>
+            <a:srgbClr val="A4A3A4"/>
+          </p15:clr>
+        </p15:guide>
+        <p15:guide id="2" pos="2880">
+          <p15:clr>
+            <a:srgbClr val="A4A3A4"/>
+          </p15:clr>
+        </p15:guide>
+      </p15:sldGuideLst>
+    </p:ext>
+  </p:extLst>
 </p:presentation>
 </file>
 
@@ -135,13 +163,7 @@
       </p:grpSpPr>
       <p:sp>
         <p:nvSpPr>
-          <p:cNvPr id="2" name="Title 1">
-            <a:extLst>
-              <a:ext uri="{FF2B5EF4-FFF2-40B4-BE49-F238E27FC236}">
-                <a16:creationId xmlns:a16="http://schemas.microsoft.com/office/drawing/2014/main" id="{DF5A5F3F-E55F-4F33-A3B0-4D8FE8A93207}"/>
-              </a:ext>
-            </a:extLst>
-          </p:cNvPr>
+          <p:cNvPr id="2" name="Title 1"/>
           <p:cNvSpPr>
             <a:spLocks noGrp="1"/>
           </p:cNvSpPr>
@@ -151,35 +173,24 @@
         </p:nvSpPr>
         <p:spPr>
           <a:xfrm>
-            <a:off x="1524000" y="1122363"/>
-            <a:ext cx="9144000" cy="2387600"/>
+            <a:off x="685800" y="2130425"/>
+            <a:ext cx="7772400" cy="1470025"/>
           </a:xfrm>
         </p:spPr>
         <p:txBody>
-          <a:bodyPr anchor="b"/>
-          <a:lstStyle>
-            <a:lvl1pPr algn="ctr">
-              <a:defRPr sz="6000"/>
-            </a:lvl1pPr>
-          </a:lstStyle>
+          <a:bodyPr/>
+          <a:lstStyle/>
           <a:p>
             <a:r>
               <a:rPr lang="en-US"/>
               <a:t>Click to edit Master title style</a:t>
             </a:r>
-            <a:endParaRPr lang="en-GB"/>
           </a:p>
         </p:txBody>
       </p:sp>
       <p:sp>
         <p:nvSpPr>
-          <p:cNvPr id="3" name="Subtitle 2">
-            <a:extLst>
-              <a:ext uri="{FF2B5EF4-FFF2-40B4-BE49-F238E27FC236}">
-                <a16:creationId xmlns:a16="http://schemas.microsoft.com/office/drawing/2014/main" id="{659B1318-FD3B-4427-80FF-F37FE0306CCF}"/>
-              </a:ext>
-            </a:extLst>
-          </p:cNvPr>
+          <p:cNvPr id="3" name="Subtitle 2"/>
           <p:cNvSpPr>
             <a:spLocks noGrp="1"/>
           </p:cNvSpPr>
@@ -189,8 +200,8 @@
         </p:nvSpPr>
         <p:spPr>
           <a:xfrm>
-            <a:off x="1524000" y="3602038"/>
-            <a:ext cx="9144000" cy="1655762"/>
+            <a:off x="1371600" y="3886200"/>
+            <a:ext cx="6400800" cy="1752600"/>
           </a:xfrm>
         </p:spPr>
         <p:txBody>
@@ -198,39 +209,93 @@
           <a:lstStyle>
             <a:lvl1pPr marL="0" indent="0" algn="ctr">
               <a:buNone/>
-              <a:defRPr sz="2400"/>
+              <a:defRPr>
+                <a:solidFill>
+                  <a:schemeClr val="tx1">
+                    <a:tint val="75000"/>
+                  </a:schemeClr>
+                </a:solidFill>
+              </a:defRPr>
             </a:lvl1pPr>
             <a:lvl2pPr marL="457200" indent="0" algn="ctr">
               <a:buNone/>
-              <a:defRPr sz="2000"/>
+              <a:defRPr>
+                <a:solidFill>
+                  <a:schemeClr val="tx1">
+                    <a:tint val="75000"/>
+                  </a:schemeClr>
+                </a:solidFill>
+              </a:defRPr>
             </a:lvl2pPr>
             <a:lvl3pPr marL="914400" indent="0" algn="ctr">
               <a:buNone/>
-              <a:defRPr sz="1800"/>
+              <a:defRPr>
+                <a:solidFill>
+                  <a:schemeClr val="tx1">
+                    <a:tint val="75000"/>
+                  </a:schemeClr>
+                </a:solidFill>
+              </a:defRPr>
             </a:lvl3pPr>
             <a:lvl4pPr marL="1371600" indent="0" algn="ctr">
               <a:buNone/>
-              <a:defRPr sz="1600"/>
+              <a:defRPr>
+                <a:solidFill>
+                  <a:schemeClr val="tx1">
+                    <a:tint val="75000"/>
+                  </a:schemeClr>
+                </a:solidFill>
+              </a:defRPr>
             </a:lvl4pPr>
             <a:lvl5pPr marL="1828800" indent="0" algn="ctr">
               <a:buNone/>
-              <a:defRPr sz="1600"/>
+              <a:defRPr>
+                <a:solidFill>
+                  <a:schemeClr val="tx1">
+                    <a:tint val="75000"/>
+                  </a:schemeClr>
+                </a:solidFill>
+              </a:defRPr>
             </a:lvl5pPr>
             <a:lvl6pPr marL="2286000" indent="0" algn="ctr">
               <a:buNone/>
-              <a:defRPr sz="1600"/>
+              <a:defRPr>
+                <a:solidFill>
+                  <a:schemeClr val="tx1">
+                    <a:tint val="75000"/>
+                  </a:schemeClr>
+                </a:solidFill>
+              </a:defRPr>
             </a:lvl6pPr>
             <a:lvl7pPr marL="2743200" indent="0" algn="ctr">
               <a:buNone/>
-              <a:defRPr sz="1600"/>
+              <a:defRPr>
+                <a:solidFill>
+                  <a:schemeClr val="tx1">
+                    <a:tint val="75000"/>
+                  </a:schemeClr>
+                </a:solidFill>
+              </a:defRPr>
             </a:lvl7pPr>
             <a:lvl8pPr marL="3200400" indent="0" algn="ctr">
               <a:buNone/>
-              <a:defRPr sz="1600"/>
+              <a:defRPr>
+                <a:solidFill>
+                  <a:schemeClr val="tx1">
+                    <a:tint val="75000"/>
+                  </a:schemeClr>
+                </a:solidFill>
+              </a:defRPr>
             </a:lvl8pPr>
             <a:lvl9pPr marL="3657600" indent="0" algn="ctr">
               <a:buNone/>
-              <a:defRPr sz="1600"/>
+              <a:defRPr>
+                <a:solidFill>
+                  <a:schemeClr val="tx1">
+                    <a:tint val="75000"/>
+                  </a:schemeClr>
+                </a:solidFill>
+              </a:defRPr>
             </a:lvl9pPr>
           </a:lstStyle>
           <a:p>
@@ -238,19 +303,12 @@
               <a:rPr lang="en-US"/>
               <a:t>Click to edit Master subtitle style</a:t>
             </a:r>
-            <a:endParaRPr lang="en-GB"/>
           </a:p>
         </p:txBody>
       </p:sp>
       <p:sp>
         <p:nvSpPr>
-          <p:cNvPr id="4" name="Date Placeholder 3">
-            <a:extLst>
-              <a:ext uri="{FF2B5EF4-FFF2-40B4-BE49-F238E27FC236}">
-                <a16:creationId xmlns:a16="http://schemas.microsoft.com/office/drawing/2014/main" id="{B2C8ACA4-5707-42C2-85D5-2F9EB72E6A92}"/>
-              </a:ext>
-            </a:extLst>
-          </p:cNvPr>
+          <p:cNvPr id="4" name="Date Placeholder 3"/>
           <p:cNvSpPr>
             <a:spLocks noGrp="1"/>
           </p:cNvSpPr>
@@ -263,23 +321,17 @@
           <a:bodyPr/>
           <a:lstStyle/>
           <a:p>
-            <a:fld id="{B64837CF-C760-4D0F-BC79-5F1EF04D70DB}" type="datetimeFigureOut">
-              <a:rPr lang="en-GB" smtClean="0"/>
-              <a:t>31/07/2026</a:t>
+            <a:fld id="{5BCAD085-E8A6-8845-BD4E-CB4CCA059FC4}" type="datetimeFigureOut">
+              <a:rPr lang="en-US" smtClean="0"/>
+              <a:t>7/31/2026</a:t>
             </a:fld>
-            <a:endParaRPr lang="en-GB"/>
+            <a:endParaRPr lang="en-US"/>
           </a:p>
         </p:txBody>
       </p:sp>
       <p:sp>
         <p:nvSpPr>
-          <p:cNvPr id="5" name="Footer Placeholder 4">
-            <a:extLst>
-              <a:ext uri="{FF2B5EF4-FFF2-40B4-BE49-F238E27FC236}">
-                <a16:creationId xmlns:a16="http://schemas.microsoft.com/office/drawing/2014/main" id="{B9C6228C-4931-402F-ACED-B19C39716E35}"/>
-              </a:ext>
-            </a:extLst>
-          </p:cNvPr>
+          <p:cNvPr id="5" name="Footer Placeholder 4"/>
           <p:cNvSpPr>
             <a:spLocks noGrp="1"/>
           </p:cNvSpPr>
@@ -292,19 +344,13 @@
           <a:bodyPr/>
           <a:lstStyle/>
           <a:p>
-            <a:endParaRPr lang="en-GB"/>
+            <a:endParaRPr lang="en-US"/>
           </a:p>
         </p:txBody>
       </p:sp>
       <p:sp>
         <p:nvSpPr>
-          <p:cNvPr id="6" name="Slide Number Placeholder 5">
-            <a:extLst>
-              <a:ext uri="{FF2B5EF4-FFF2-40B4-BE49-F238E27FC236}">
-                <a16:creationId xmlns:a16="http://schemas.microsoft.com/office/drawing/2014/main" id="{5DADAD39-0469-487C-B9D2-0E9FBFB3BFB6}"/>
-              </a:ext>
-            </a:extLst>
-          </p:cNvPr>
+          <p:cNvPr id="6" name="Slide Number Placeholder 5"/>
           <p:cNvSpPr>
             <a:spLocks noGrp="1"/>
           </p:cNvSpPr>
@@ -317,18 +363,18 @@
           <a:bodyPr/>
           <a:lstStyle/>
           <a:p>
-            <a:fld id="{DA1FBE03-D3C6-461A-AEF8-A4007295546D}" type="slidenum">
-              <a:rPr lang="en-GB" smtClean="0"/>
+            <a:fld id="{C1FF6DA9-008F-8B48-92A6-B652298478BF}" type="slidenum">
+              <a:rPr lang="en-US" smtClean="0"/>
               <a:t>‹#›</a:t>
             </a:fld>
-            <a:endParaRPr lang="en-GB"/>
+            <a:endParaRPr lang="en-US"/>
           </a:p>
         </p:txBody>
       </p:sp>
     </p:spTree>
     <p:extLst>
       <p:ext uri="{BB962C8B-B14F-4D97-AF65-F5344CB8AC3E}">
-        <p14:creationId xmlns:p14="http://schemas.microsoft.com/office/powerpoint/2010/main" val="4238793597"/>
+        <p14:creationId xmlns:p14="http://schemas.microsoft.com/office/powerpoint/2010/main" val="3168075583"/>
       </p:ext>
     </p:extLst>
   </p:cSld>
@@ -357,13 +403,7 @@
       </p:grpSpPr>
       <p:sp>
         <p:nvSpPr>
-          <p:cNvPr id="2" name="Title 1">
-            <a:extLst>
-              <a:ext uri="{FF2B5EF4-FFF2-40B4-BE49-F238E27FC236}">
-                <a16:creationId xmlns:a16="http://schemas.microsoft.com/office/drawing/2014/main" id="{5D0B0083-B3C6-4BD2-851F-09ED12FE453F}"/>
-              </a:ext>
-            </a:extLst>
-          </p:cNvPr>
+          <p:cNvPr id="2" name="Title 1"/>
           <p:cNvSpPr>
             <a:spLocks noGrp="1"/>
           </p:cNvSpPr>
@@ -380,19 +420,12 @@
               <a:rPr lang="en-US"/>
               <a:t>Click to edit Master title style</a:t>
             </a:r>
-            <a:endParaRPr lang="en-GB"/>
           </a:p>
         </p:txBody>
       </p:sp>
       <p:sp>
         <p:nvSpPr>
-          <p:cNvPr id="3" name="Vertical Text Placeholder 2">
-            <a:extLst>
-              <a:ext uri="{FF2B5EF4-FFF2-40B4-BE49-F238E27FC236}">
-                <a16:creationId xmlns:a16="http://schemas.microsoft.com/office/drawing/2014/main" id="{83BD6757-6242-49E6-BBF9-3C4CC2A4B487}"/>
-              </a:ext>
-            </a:extLst>
-          </p:cNvPr>
+          <p:cNvPr id="3" name="Vertical Text Placeholder 2"/>
           <p:cNvSpPr>
             <a:spLocks noGrp="1"/>
           </p:cNvSpPr>
@@ -438,19 +471,12 @@
               <a:rPr lang="en-US"/>
               <a:t>Fifth level</a:t>
             </a:r>
-            <a:endParaRPr lang="en-GB"/>
           </a:p>
         </p:txBody>
       </p:sp>
       <p:sp>
         <p:nvSpPr>
-          <p:cNvPr id="4" name="Date Placeholder 3">
-            <a:extLst>
-              <a:ext uri="{FF2B5EF4-FFF2-40B4-BE49-F238E27FC236}">
-                <a16:creationId xmlns:a16="http://schemas.microsoft.com/office/drawing/2014/main" id="{F03945F3-E73D-4E0B-B4E2-DFC33A6DFA0A}"/>
-              </a:ext>
-            </a:extLst>
-          </p:cNvPr>
+          <p:cNvPr id="4" name="Date Placeholder 3"/>
           <p:cNvSpPr>
             <a:spLocks noGrp="1"/>
           </p:cNvSpPr>
@@ -463,23 +489,17 @@
           <a:bodyPr/>
           <a:lstStyle/>
           <a:p>
-            <a:fld id="{B64837CF-C760-4D0F-BC79-5F1EF04D70DB}" type="datetimeFigureOut">
-              <a:rPr lang="en-GB" smtClean="0"/>
-              <a:t>31/07/2026</a:t>
+            <a:fld id="{5BCAD085-E8A6-8845-BD4E-CB4CCA059FC4}" type="datetimeFigureOut">
+              <a:rPr lang="en-US" smtClean="0"/>
+              <a:t>7/31/2026</a:t>
             </a:fld>
-            <a:endParaRPr lang="en-GB"/>
+            <a:endParaRPr lang="en-US"/>
           </a:p>
         </p:txBody>
       </p:sp>
       <p:sp>
         <p:nvSpPr>
-          <p:cNvPr id="5" name="Footer Placeholder 4">
-            <a:extLst>
-              <a:ext uri="{FF2B5EF4-FFF2-40B4-BE49-F238E27FC236}">
-                <a16:creationId xmlns:a16="http://schemas.microsoft.com/office/drawing/2014/main" id="{E56CA145-C2E3-4CAA-8C07-D5A995A15C99}"/>
-              </a:ext>
-            </a:extLst>
-          </p:cNvPr>
+          <p:cNvPr id="5" name="Footer Placeholder 4"/>
           <p:cNvSpPr>
             <a:spLocks noGrp="1"/>
           </p:cNvSpPr>
@@ -492,19 +512,13 @@
           <a:bodyPr/>
           <a:lstStyle/>
           <a:p>
-            <a:endParaRPr lang="en-GB"/>
+            <a:endParaRPr lang="en-US"/>
           </a:p>
         </p:txBody>
       </p:sp>
       <p:sp>
         <p:nvSpPr>
-          <p:cNvPr id="6" name="Slide Number Placeholder 5">
-            <a:extLst>
-              <a:ext uri="{FF2B5EF4-FFF2-40B4-BE49-F238E27FC236}">
-                <a16:creationId xmlns:a16="http://schemas.microsoft.com/office/drawing/2014/main" id="{01949DD9-F88E-44AC-8BE7-5664A5A1FC9B}"/>
-              </a:ext>
-            </a:extLst>
-          </p:cNvPr>
+          <p:cNvPr id="6" name="Slide Number Placeholder 5"/>
           <p:cNvSpPr>
             <a:spLocks noGrp="1"/>
           </p:cNvSpPr>
@@ -517,18 +531,18 @@
           <a:bodyPr/>
           <a:lstStyle/>
           <a:p>
-            <a:fld id="{DA1FBE03-D3C6-461A-AEF8-A4007295546D}" type="slidenum">
-              <a:rPr lang="en-GB" smtClean="0"/>
+            <a:fld id="{C1FF6DA9-008F-8B48-92A6-B652298478BF}" type="slidenum">
+              <a:rPr lang="en-US" smtClean="0"/>
               <a:t>‹#›</a:t>
             </a:fld>
-            <a:endParaRPr lang="en-GB"/>
+            <a:endParaRPr lang="en-US"/>
           </a:p>
         </p:txBody>
       </p:sp>
     </p:spTree>
     <p:extLst>
       <p:ext uri="{BB962C8B-B14F-4D97-AF65-F5344CB8AC3E}">
-        <p14:creationId xmlns:p14="http://schemas.microsoft.com/office/powerpoint/2010/main" val="1318793415"/>
+        <p14:creationId xmlns:p14="http://schemas.microsoft.com/office/powerpoint/2010/main" val="2910927964"/>
       </p:ext>
     </p:extLst>
   </p:cSld>
@@ -557,13 +571,7 @@
       </p:grpSpPr>
       <p:sp>
         <p:nvSpPr>
-          <p:cNvPr id="2" name="Vertical Title 1">
-            <a:extLst>
-              <a:ext uri="{FF2B5EF4-FFF2-40B4-BE49-F238E27FC236}">
-                <a16:creationId xmlns:a16="http://schemas.microsoft.com/office/drawing/2014/main" id="{D0AFC20E-2083-4B39-AE07-7599156B81FE}"/>
-              </a:ext>
-            </a:extLst>
-          </p:cNvPr>
+          <p:cNvPr id="2" name="Vertical Title 1"/>
           <p:cNvSpPr>
             <a:spLocks noGrp="1"/>
           </p:cNvSpPr>
@@ -573,8 +581,8 @@
         </p:nvSpPr>
         <p:spPr>
           <a:xfrm>
-            <a:off x="8724900" y="365125"/>
-            <a:ext cx="2628900" cy="5811838"/>
+            <a:off x="6629400" y="274638"/>
+            <a:ext cx="2057400" cy="5851525"/>
           </a:xfrm>
         </p:spPr>
         <p:txBody>
@@ -585,19 +593,12 @@
               <a:rPr lang="en-US"/>
               <a:t>Click to edit Master title style</a:t>
             </a:r>
-            <a:endParaRPr lang="en-GB"/>
           </a:p>
         </p:txBody>
       </p:sp>
       <p:sp>
         <p:nvSpPr>
-          <p:cNvPr id="3" name="Vertical Text Placeholder 2">
-            <a:extLst>
-              <a:ext uri="{FF2B5EF4-FFF2-40B4-BE49-F238E27FC236}">
-                <a16:creationId xmlns:a16="http://schemas.microsoft.com/office/drawing/2014/main" id="{CC916F1E-4A5C-432E-B626-226ED5661E79}"/>
-              </a:ext>
-            </a:extLst>
-          </p:cNvPr>
+          <p:cNvPr id="3" name="Vertical Text Placeholder 2"/>
           <p:cNvSpPr>
             <a:spLocks noGrp="1"/>
           </p:cNvSpPr>
@@ -607,8 +608,8 @@
         </p:nvSpPr>
         <p:spPr>
           <a:xfrm>
-            <a:off x="838200" y="365125"/>
-            <a:ext cx="7734300" cy="5811838"/>
+            <a:off x="457200" y="274638"/>
+            <a:ext cx="6019800" cy="5851525"/>
           </a:xfrm>
         </p:spPr>
         <p:txBody>
@@ -648,19 +649,12 @@
               <a:rPr lang="en-US"/>
               <a:t>Fifth level</a:t>
             </a:r>
-            <a:endParaRPr lang="en-GB"/>
           </a:p>
         </p:txBody>
       </p:sp>
       <p:sp>
         <p:nvSpPr>
-          <p:cNvPr id="4" name="Date Placeholder 3">
-            <a:extLst>
-              <a:ext uri="{FF2B5EF4-FFF2-40B4-BE49-F238E27FC236}">
-                <a16:creationId xmlns:a16="http://schemas.microsoft.com/office/drawing/2014/main" id="{11B5A950-9C02-4F7E-BCFC-47A96F564932}"/>
-              </a:ext>
-            </a:extLst>
-          </p:cNvPr>
+          <p:cNvPr id="4" name="Date Placeholder 3"/>
           <p:cNvSpPr>
             <a:spLocks noGrp="1"/>
           </p:cNvSpPr>
@@ -673,23 +667,17 @@
           <a:bodyPr/>
           <a:lstStyle/>
           <a:p>
-            <a:fld id="{B64837CF-C760-4D0F-BC79-5F1EF04D70DB}" type="datetimeFigureOut">
-              <a:rPr lang="en-GB" smtClean="0"/>
-              <a:t>31/07/2026</a:t>
+            <a:fld id="{5BCAD085-E8A6-8845-BD4E-CB4CCA059FC4}" type="datetimeFigureOut">
+              <a:rPr lang="en-US" smtClean="0"/>
+              <a:t>7/31/2026</a:t>
             </a:fld>
-            <a:endParaRPr lang="en-GB"/>
+            <a:endParaRPr lang="en-US"/>
           </a:p>
         </p:txBody>
       </p:sp>
       <p:sp>
         <p:nvSpPr>
-          <p:cNvPr id="5" name="Footer Placeholder 4">
-            <a:extLst>
-              <a:ext uri="{FF2B5EF4-FFF2-40B4-BE49-F238E27FC236}">
-                <a16:creationId xmlns:a16="http://schemas.microsoft.com/office/drawing/2014/main" id="{B6BC3398-C71F-43A2-8D21-625B9AB0ED94}"/>
-              </a:ext>
-            </a:extLst>
-          </p:cNvPr>
+          <p:cNvPr id="5" name="Footer Placeholder 4"/>
           <p:cNvSpPr>
             <a:spLocks noGrp="1"/>
           </p:cNvSpPr>
@@ -702,19 +690,13 @@
           <a:bodyPr/>
           <a:lstStyle/>
           <a:p>
-            <a:endParaRPr lang="en-GB"/>
+            <a:endParaRPr lang="en-US"/>
           </a:p>
         </p:txBody>
       </p:sp>
       <p:sp>
         <p:nvSpPr>
-          <p:cNvPr id="6" name="Slide Number Placeholder 5">
-            <a:extLst>
-              <a:ext uri="{FF2B5EF4-FFF2-40B4-BE49-F238E27FC236}">
-                <a16:creationId xmlns:a16="http://schemas.microsoft.com/office/drawing/2014/main" id="{963E6443-934B-46D3-82C5-35CCB027A08E}"/>
-              </a:ext>
-            </a:extLst>
-          </p:cNvPr>
+          <p:cNvPr id="6" name="Slide Number Placeholder 5"/>
           <p:cNvSpPr>
             <a:spLocks noGrp="1"/>
           </p:cNvSpPr>
@@ -727,18 +709,18 @@
           <a:bodyPr/>
           <a:lstStyle/>
           <a:p>
-            <a:fld id="{DA1FBE03-D3C6-461A-AEF8-A4007295546D}" type="slidenum">
-              <a:rPr lang="en-GB" smtClean="0"/>
+            <a:fld id="{C1FF6DA9-008F-8B48-92A6-B652298478BF}" type="slidenum">
+              <a:rPr lang="en-US" smtClean="0"/>
               <a:t>‹#›</a:t>
             </a:fld>
-            <a:endParaRPr lang="en-GB"/>
+            <a:endParaRPr lang="en-US"/>
           </a:p>
         </p:txBody>
       </p:sp>
     </p:spTree>
     <p:extLst>
       <p:ext uri="{BB962C8B-B14F-4D97-AF65-F5344CB8AC3E}">
-        <p14:creationId xmlns:p14="http://schemas.microsoft.com/office/powerpoint/2010/main" val="1588670066"/>
+        <p14:creationId xmlns:p14="http://schemas.microsoft.com/office/powerpoint/2010/main" val="3612223792"/>
       </p:ext>
     </p:extLst>
   </p:cSld>
@@ -767,13 +749,7 @@
       </p:grpSpPr>
       <p:sp>
         <p:nvSpPr>
-          <p:cNvPr id="2" name="Title 1">
-            <a:extLst>
-              <a:ext uri="{FF2B5EF4-FFF2-40B4-BE49-F238E27FC236}">
-                <a16:creationId xmlns:a16="http://schemas.microsoft.com/office/drawing/2014/main" id="{5FDA4CDF-4ECB-4CFF-9964-B72804A9D2F3}"/>
-              </a:ext>
-            </a:extLst>
-          </p:cNvPr>
+          <p:cNvPr id="2" name="Title 1"/>
           <p:cNvSpPr>
             <a:spLocks noGrp="1"/>
           </p:cNvSpPr>
@@ -790,19 +766,12 @@
               <a:rPr lang="en-US"/>
               <a:t>Click to edit Master title style</a:t>
             </a:r>
-            <a:endParaRPr lang="en-GB"/>
           </a:p>
         </p:txBody>
       </p:sp>
       <p:sp>
         <p:nvSpPr>
-          <p:cNvPr id="3" name="Content Placeholder 2">
-            <a:extLst>
-              <a:ext uri="{FF2B5EF4-FFF2-40B4-BE49-F238E27FC236}">
-                <a16:creationId xmlns:a16="http://schemas.microsoft.com/office/drawing/2014/main" id="{31F7197D-97C6-4C4D-8CE9-62222A6BBCFE}"/>
-              </a:ext>
-            </a:extLst>
-          </p:cNvPr>
+          <p:cNvPr id="3" name="Content Placeholder 2"/>
           <p:cNvSpPr>
             <a:spLocks noGrp="1"/>
           </p:cNvSpPr>
@@ -848,19 +817,12 @@
               <a:rPr lang="en-US"/>
               <a:t>Fifth level</a:t>
             </a:r>
-            <a:endParaRPr lang="en-GB"/>
           </a:p>
         </p:txBody>
       </p:sp>
       <p:sp>
         <p:nvSpPr>
-          <p:cNvPr id="4" name="Date Placeholder 3">
-            <a:extLst>
-              <a:ext uri="{FF2B5EF4-FFF2-40B4-BE49-F238E27FC236}">
-                <a16:creationId xmlns:a16="http://schemas.microsoft.com/office/drawing/2014/main" id="{54EBA41C-619D-45AE-92F2-366988EB1820}"/>
-              </a:ext>
-            </a:extLst>
-          </p:cNvPr>
+          <p:cNvPr id="4" name="Date Placeholder 3"/>
           <p:cNvSpPr>
             <a:spLocks noGrp="1"/>
           </p:cNvSpPr>
@@ -873,23 +835,17 @@
           <a:bodyPr/>
           <a:lstStyle/>
           <a:p>
-            <a:fld id="{B64837CF-C760-4D0F-BC79-5F1EF04D70DB}" type="datetimeFigureOut">
-              <a:rPr lang="en-GB" smtClean="0"/>
-              <a:t>31/07/2026</a:t>
+            <a:fld id="{5BCAD085-E8A6-8845-BD4E-CB4CCA059FC4}" type="datetimeFigureOut">
+              <a:rPr lang="en-US" smtClean="0"/>
+              <a:t>7/31/2026</a:t>
             </a:fld>
-            <a:endParaRPr lang="en-GB"/>
+            <a:endParaRPr lang="en-US"/>
           </a:p>
         </p:txBody>
       </p:sp>
       <p:sp>
         <p:nvSpPr>
-          <p:cNvPr id="5" name="Footer Placeholder 4">
-            <a:extLst>
-              <a:ext uri="{FF2B5EF4-FFF2-40B4-BE49-F238E27FC236}">
-                <a16:creationId xmlns:a16="http://schemas.microsoft.com/office/drawing/2014/main" id="{6F843CA0-30F5-432C-AB00-E251CFE49C07}"/>
-              </a:ext>
-            </a:extLst>
-          </p:cNvPr>
+          <p:cNvPr id="5" name="Footer Placeholder 4"/>
           <p:cNvSpPr>
             <a:spLocks noGrp="1"/>
           </p:cNvSpPr>
@@ -902,19 +858,13 @@
           <a:bodyPr/>
           <a:lstStyle/>
           <a:p>
-            <a:endParaRPr lang="en-GB"/>
+            <a:endParaRPr lang="en-US"/>
           </a:p>
         </p:txBody>
       </p:sp>
       <p:sp>
         <p:nvSpPr>
-          <p:cNvPr id="6" name="Slide Number Placeholder 5">
-            <a:extLst>
-              <a:ext uri="{FF2B5EF4-FFF2-40B4-BE49-F238E27FC236}">
-                <a16:creationId xmlns:a16="http://schemas.microsoft.com/office/drawing/2014/main" id="{8BB502E7-0CDF-4936-832D-C4CDC2356AE8}"/>
-              </a:ext>
-            </a:extLst>
-          </p:cNvPr>
+          <p:cNvPr id="6" name="Slide Number Placeholder 5"/>
           <p:cNvSpPr>
             <a:spLocks noGrp="1"/>
           </p:cNvSpPr>
@@ -927,18 +877,18 @@
           <a:bodyPr/>
           <a:lstStyle/>
           <a:p>
-            <a:fld id="{DA1FBE03-D3C6-461A-AEF8-A4007295546D}" type="slidenum">
-              <a:rPr lang="en-GB" smtClean="0"/>
+            <a:fld id="{C1FF6DA9-008F-8B48-92A6-B652298478BF}" type="slidenum">
+              <a:rPr lang="en-US" smtClean="0"/>
               <a:t>‹#›</a:t>
             </a:fld>
-            <a:endParaRPr lang="en-GB"/>
+            <a:endParaRPr lang="en-US"/>
           </a:p>
         </p:txBody>
       </p:sp>
     </p:spTree>
     <p:extLst>
       <p:ext uri="{BB962C8B-B14F-4D97-AF65-F5344CB8AC3E}">
-        <p14:creationId xmlns:p14="http://schemas.microsoft.com/office/powerpoint/2010/main" val="3079499004"/>
+        <p14:creationId xmlns:p14="http://schemas.microsoft.com/office/powerpoint/2010/main" val="2614314258"/>
       </p:ext>
     </p:extLst>
   </p:cSld>
@@ -967,13 +917,7 @@
       </p:grpSpPr>
       <p:sp>
         <p:nvSpPr>
-          <p:cNvPr id="2" name="Title 1">
-            <a:extLst>
-              <a:ext uri="{FF2B5EF4-FFF2-40B4-BE49-F238E27FC236}">
-                <a16:creationId xmlns:a16="http://schemas.microsoft.com/office/drawing/2014/main" id="{EC1DFF78-E855-4B5D-8733-F5D4C39E71E4}"/>
-              </a:ext>
-            </a:extLst>
-          </p:cNvPr>
+          <p:cNvPr id="2" name="Title 1"/>
           <p:cNvSpPr>
             <a:spLocks noGrp="1"/>
           </p:cNvSpPr>
@@ -983,15 +927,15 @@
         </p:nvSpPr>
         <p:spPr>
           <a:xfrm>
-            <a:off x="831850" y="1709738"/>
-            <a:ext cx="10515600" cy="2852737"/>
+            <a:off x="722313" y="4406900"/>
+            <a:ext cx="7772400" cy="1362075"/>
           </a:xfrm>
         </p:spPr>
         <p:txBody>
-          <a:bodyPr anchor="b"/>
+          <a:bodyPr anchor="t"/>
           <a:lstStyle>
-            <a:lvl1pPr>
-              <a:defRPr sz="6000"/>
+            <a:lvl1pPr algn="l">
+              <a:defRPr sz="4000" b="1" cap="all"/>
             </a:lvl1pPr>
           </a:lstStyle>
           <a:p>
@@ -999,19 +943,12 @@
               <a:rPr lang="en-US"/>
               <a:t>Click to edit Master title style</a:t>
             </a:r>
-            <a:endParaRPr lang="en-GB"/>
           </a:p>
         </p:txBody>
       </p:sp>
       <p:sp>
         <p:nvSpPr>
-          <p:cNvPr id="3" name="Text Placeholder 2">
-            <a:extLst>
-              <a:ext uri="{FF2B5EF4-FFF2-40B4-BE49-F238E27FC236}">
-                <a16:creationId xmlns:a16="http://schemas.microsoft.com/office/drawing/2014/main" id="{76D1208C-35C3-4DE3-9912-2ABC8A009FDD}"/>
-              </a:ext>
-            </a:extLst>
-          </p:cNvPr>
+          <p:cNvPr id="3" name="Text Placeholder 2"/>
           <p:cNvSpPr>
             <a:spLocks noGrp="1"/>
           </p:cNvSpPr>
@@ -1021,16 +958,16 @@
         </p:nvSpPr>
         <p:spPr>
           <a:xfrm>
-            <a:off x="831850" y="4589463"/>
-            <a:ext cx="10515600" cy="1500187"/>
+            <a:off x="722313" y="2906713"/>
+            <a:ext cx="7772400" cy="1500187"/>
           </a:xfrm>
         </p:spPr>
         <p:txBody>
-          <a:bodyPr/>
+          <a:bodyPr anchor="b"/>
           <a:lstStyle>
             <a:lvl1pPr marL="0" indent="0">
               <a:buNone/>
-              <a:defRPr sz="2400">
+              <a:defRPr sz="2000">
                 <a:solidFill>
                   <a:schemeClr val="tx1">
                     <a:tint val="75000"/>
@@ -1040,7 +977,7 @@
             </a:lvl1pPr>
             <a:lvl2pPr marL="457200" indent="0">
               <a:buNone/>
-              <a:defRPr sz="2000">
+              <a:defRPr sz="1800">
                 <a:solidFill>
                   <a:schemeClr val="tx1">
                     <a:tint val="75000"/>
@@ -1050,7 +987,7 @@
             </a:lvl2pPr>
             <a:lvl3pPr marL="914400" indent="0">
               <a:buNone/>
-              <a:defRPr sz="1800">
+              <a:defRPr sz="1600">
                 <a:solidFill>
                   <a:schemeClr val="tx1">
                     <a:tint val="75000"/>
@@ -1060,7 +997,7 @@
             </a:lvl3pPr>
             <a:lvl4pPr marL="1371600" indent="0">
               <a:buNone/>
-              <a:defRPr sz="1600">
+              <a:defRPr sz="1400">
                 <a:solidFill>
                   <a:schemeClr val="tx1">
                     <a:tint val="75000"/>
@@ -1070,7 +1007,7 @@
             </a:lvl4pPr>
             <a:lvl5pPr marL="1828800" indent="0">
               <a:buNone/>
-              <a:defRPr sz="1600">
+              <a:defRPr sz="1400">
                 <a:solidFill>
                   <a:schemeClr val="tx1">
                     <a:tint val="75000"/>
@@ -1080,7 +1017,7 @@
             </a:lvl5pPr>
             <a:lvl6pPr marL="2286000" indent="0">
               <a:buNone/>
-              <a:defRPr sz="1600">
+              <a:defRPr sz="1400">
                 <a:solidFill>
                   <a:schemeClr val="tx1">
                     <a:tint val="75000"/>
@@ -1090,7 +1027,7 @@
             </a:lvl6pPr>
             <a:lvl7pPr marL="2743200" indent="0">
               <a:buNone/>
-              <a:defRPr sz="1600">
+              <a:defRPr sz="1400">
                 <a:solidFill>
                   <a:schemeClr val="tx1">
                     <a:tint val="75000"/>
@@ -1100,7 +1037,7 @@
             </a:lvl7pPr>
             <a:lvl8pPr marL="3200400" indent="0">
               <a:buNone/>
-              <a:defRPr sz="1600">
+              <a:defRPr sz="1400">
                 <a:solidFill>
                   <a:schemeClr val="tx1">
                     <a:tint val="75000"/>
@@ -1110,7 +1047,7 @@
             </a:lvl8pPr>
             <a:lvl9pPr marL="3657600" indent="0">
               <a:buNone/>
-              <a:defRPr sz="1600">
+              <a:defRPr sz="1400">
                 <a:solidFill>
                   <a:schemeClr val="tx1">
                     <a:tint val="75000"/>
@@ -1130,13 +1067,7 @@
       </p:sp>
       <p:sp>
         <p:nvSpPr>
-          <p:cNvPr id="4" name="Date Placeholder 3">
-            <a:extLst>
-              <a:ext uri="{FF2B5EF4-FFF2-40B4-BE49-F238E27FC236}">
-                <a16:creationId xmlns:a16="http://schemas.microsoft.com/office/drawing/2014/main" id="{38E26D1B-96C4-4405-B2FE-D8BFAF9D1874}"/>
-              </a:ext>
-            </a:extLst>
-          </p:cNvPr>
+          <p:cNvPr id="4" name="Date Placeholder 3"/>
           <p:cNvSpPr>
             <a:spLocks noGrp="1"/>
           </p:cNvSpPr>
@@ -1149,23 +1080,17 @@
           <a:bodyPr/>
           <a:lstStyle/>
           <a:p>
-            <a:fld id="{B64837CF-C760-4D0F-BC79-5F1EF04D70DB}" type="datetimeFigureOut">
-              <a:rPr lang="en-GB" smtClean="0"/>
-              <a:t>31/07/2026</a:t>
+            <a:fld id="{5BCAD085-E8A6-8845-BD4E-CB4CCA059FC4}" type="datetimeFigureOut">
+              <a:rPr lang="en-US" smtClean="0"/>
+              <a:t>7/31/2026</a:t>
             </a:fld>
-            <a:endParaRPr lang="en-GB"/>
+            <a:endParaRPr lang="en-US"/>
           </a:p>
         </p:txBody>
       </p:sp>
       <p:sp>
         <p:nvSpPr>
-          <p:cNvPr id="5" name="Footer Placeholder 4">
-            <a:extLst>
-              <a:ext uri="{FF2B5EF4-FFF2-40B4-BE49-F238E27FC236}">
-                <a16:creationId xmlns:a16="http://schemas.microsoft.com/office/drawing/2014/main" id="{85710488-BB24-4190-9302-E1DCCEA9AF3F}"/>
-              </a:ext>
-            </a:extLst>
-          </p:cNvPr>
+          <p:cNvPr id="5" name="Footer Placeholder 4"/>
           <p:cNvSpPr>
             <a:spLocks noGrp="1"/>
           </p:cNvSpPr>
@@ -1178,19 +1103,13 @@
           <a:bodyPr/>
           <a:lstStyle/>
           <a:p>
-            <a:endParaRPr lang="en-GB"/>
+            <a:endParaRPr lang="en-US"/>
           </a:p>
         </p:txBody>
       </p:sp>
       <p:sp>
         <p:nvSpPr>
-          <p:cNvPr id="6" name="Slide Number Placeholder 5">
-            <a:extLst>
-              <a:ext uri="{FF2B5EF4-FFF2-40B4-BE49-F238E27FC236}">
-                <a16:creationId xmlns:a16="http://schemas.microsoft.com/office/drawing/2014/main" id="{24EE45A5-30D2-4F5A-846A-6ADB20C32B9D}"/>
-              </a:ext>
-            </a:extLst>
-          </p:cNvPr>
+          <p:cNvPr id="6" name="Slide Number Placeholder 5"/>
           <p:cNvSpPr>
             <a:spLocks noGrp="1"/>
           </p:cNvSpPr>
@@ -1203,18 +1122,18 @@
           <a:bodyPr/>
           <a:lstStyle/>
           <a:p>
-            <a:fld id="{DA1FBE03-D3C6-461A-AEF8-A4007295546D}" type="slidenum">
-              <a:rPr lang="en-GB" smtClean="0"/>
+            <a:fld id="{C1FF6DA9-008F-8B48-92A6-B652298478BF}" type="slidenum">
+              <a:rPr lang="en-US" smtClean="0"/>
               <a:t>‹#›</a:t>
             </a:fld>
-            <a:endParaRPr lang="en-GB"/>
+            <a:endParaRPr lang="en-US"/>
           </a:p>
         </p:txBody>
       </p:sp>
     </p:spTree>
     <p:extLst>
       <p:ext uri="{BB962C8B-B14F-4D97-AF65-F5344CB8AC3E}">
-        <p14:creationId xmlns:p14="http://schemas.microsoft.com/office/powerpoint/2010/main" val="4236748768"/>
+        <p14:creationId xmlns:p14="http://schemas.microsoft.com/office/powerpoint/2010/main" val="960648375"/>
       </p:ext>
     </p:extLst>
   </p:cSld>
@@ -1243,13 +1162,7 @@
       </p:grpSpPr>
       <p:sp>
         <p:nvSpPr>
-          <p:cNvPr id="2" name="Title 1">
-            <a:extLst>
-              <a:ext uri="{FF2B5EF4-FFF2-40B4-BE49-F238E27FC236}">
-                <a16:creationId xmlns:a16="http://schemas.microsoft.com/office/drawing/2014/main" id="{33446EF2-3A8D-4C44-A163-797A1AAFB526}"/>
-              </a:ext>
-            </a:extLst>
-          </p:cNvPr>
+          <p:cNvPr id="2" name="Title 1"/>
           <p:cNvSpPr>
             <a:spLocks noGrp="1"/>
           </p:cNvSpPr>
@@ -1266,19 +1179,12 @@
               <a:rPr lang="en-US"/>
               <a:t>Click to edit Master title style</a:t>
             </a:r>
-            <a:endParaRPr lang="en-GB"/>
           </a:p>
         </p:txBody>
       </p:sp>
       <p:sp>
         <p:nvSpPr>
-          <p:cNvPr id="3" name="Content Placeholder 2">
-            <a:extLst>
-              <a:ext uri="{FF2B5EF4-FFF2-40B4-BE49-F238E27FC236}">
-                <a16:creationId xmlns:a16="http://schemas.microsoft.com/office/drawing/2014/main" id="{F451263C-2FDD-4BC1-AF21-418AD6E9B2A0}"/>
-              </a:ext>
-            </a:extLst>
-          </p:cNvPr>
+          <p:cNvPr id="3" name="Content Placeholder 2"/>
           <p:cNvSpPr>
             <a:spLocks noGrp="1"/>
           </p:cNvSpPr>
@@ -1288,13 +1194,41 @@
         </p:nvSpPr>
         <p:spPr>
           <a:xfrm>
-            <a:off x="838200" y="1825625"/>
-            <a:ext cx="5181600" cy="4351338"/>
+            <a:off x="457200" y="1600200"/>
+            <a:ext cx="4038600" cy="4525963"/>
           </a:xfrm>
         </p:spPr>
         <p:txBody>
           <a:bodyPr/>
-          <a:lstStyle/>
+          <a:lstStyle>
+            <a:lvl1pPr>
+              <a:defRPr sz="2800"/>
+            </a:lvl1pPr>
+            <a:lvl2pPr>
+              <a:defRPr sz="2400"/>
+            </a:lvl2pPr>
+            <a:lvl3pPr>
+              <a:defRPr sz="2000"/>
+            </a:lvl3pPr>
+            <a:lvl4pPr>
+              <a:defRPr sz="1800"/>
+            </a:lvl4pPr>
+            <a:lvl5pPr>
+              <a:defRPr sz="1800"/>
+            </a:lvl5pPr>
+            <a:lvl6pPr>
+              <a:defRPr sz="1800"/>
+            </a:lvl6pPr>
+            <a:lvl7pPr>
+              <a:defRPr sz="1800"/>
+            </a:lvl7pPr>
+            <a:lvl8pPr>
+              <a:defRPr sz="1800"/>
+            </a:lvl8pPr>
+            <a:lvl9pPr>
+              <a:defRPr sz="1800"/>
+            </a:lvl9pPr>
+          </a:lstStyle>
           <a:p>
             <a:pPr lvl="0"/>
             <a:r>
@@ -1329,19 +1263,12 @@
               <a:rPr lang="en-US"/>
               <a:t>Fifth level</a:t>
             </a:r>
-            <a:endParaRPr lang="en-GB"/>
           </a:p>
         </p:txBody>
       </p:sp>
       <p:sp>
         <p:nvSpPr>
-          <p:cNvPr id="4" name="Content Placeholder 3">
-            <a:extLst>
-              <a:ext uri="{FF2B5EF4-FFF2-40B4-BE49-F238E27FC236}">
-                <a16:creationId xmlns:a16="http://schemas.microsoft.com/office/drawing/2014/main" id="{AE1A4301-9068-479B-9B14-C55AC0A9379C}"/>
-              </a:ext>
-            </a:extLst>
-          </p:cNvPr>
+          <p:cNvPr id="4" name="Content Placeholder 3"/>
           <p:cNvSpPr>
             <a:spLocks noGrp="1"/>
           </p:cNvSpPr>
@@ -1351,13 +1278,41 @@
         </p:nvSpPr>
         <p:spPr>
           <a:xfrm>
-            <a:off x="6172200" y="1825625"/>
-            <a:ext cx="5181600" cy="4351338"/>
+            <a:off x="4648200" y="1600200"/>
+            <a:ext cx="4038600" cy="4525963"/>
           </a:xfrm>
         </p:spPr>
         <p:txBody>
           <a:bodyPr/>
-          <a:lstStyle/>
+          <a:lstStyle>
+            <a:lvl1pPr>
+              <a:defRPr sz="2800"/>
+            </a:lvl1pPr>
+            <a:lvl2pPr>
+              <a:defRPr sz="2400"/>
+            </a:lvl2pPr>
+            <a:lvl3pPr>
+              <a:defRPr sz="2000"/>
+            </a:lvl3pPr>
+            <a:lvl4pPr>
+              <a:defRPr sz="1800"/>
+            </a:lvl4pPr>
+            <a:lvl5pPr>
+              <a:defRPr sz="1800"/>
+            </a:lvl5pPr>
+            <a:lvl6pPr>
+              <a:defRPr sz="1800"/>
+            </a:lvl6pPr>
+            <a:lvl7pPr>
+              <a:defRPr sz="1800"/>
+            </a:lvl7pPr>
+            <a:lvl8pPr>
+              <a:defRPr sz="1800"/>
+            </a:lvl8pPr>
+            <a:lvl9pPr>
+              <a:defRPr sz="1800"/>
+            </a:lvl9pPr>
+          </a:lstStyle>
           <a:p>
             <a:pPr lvl="0"/>
             <a:r>
@@ -1392,19 +1347,12 @@
               <a:rPr lang="en-US"/>
               <a:t>Fifth level</a:t>
             </a:r>
-            <a:endParaRPr lang="en-GB"/>
           </a:p>
         </p:txBody>
       </p:sp>
       <p:sp>
         <p:nvSpPr>
-          <p:cNvPr id="5" name="Date Placeholder 4">
-            <a:extLst>
-              <a:ext uri="{FF2B5EF4-FFF2-40B4-BE49-F238E27FC236}">
-                <a16:creationId xmlns:a16="http://schemas.microsoft.com/office/drawing/2014/main" id="{88F17E6A-0FC9-4FFE-8D53-DAD7CE3BD65B}"/>
-              </a:ext>
-            </a:extLst>
-          </p:cNvPr>
+          <p:cNvPr id="5" name="Date Placeholder 4"/>
           <p:cNvSpPr>
             <a:spLocks noGrp="1"/>
           </p:cNvSpPr>
@@ -1417,23 +1365,17 @@
           <a:bodyPr/>
           <a:lstStyle/>
           <a:p>
-            <a:fld id="{B64837CF-C760-4D0F-BC79-5F1EF04D70DB}" type="datetimeFigureOut">
-              <a:rPr lang="en-GB" smtClean="0"/>
-              <a:t>31/07/2026</a:t>
+            <a:fld id="{5BCAD085-E8A6-8845-BD4E-CB4CCA059FC4}" type="datetimeFigureOut">
+              <a:rPr lang="en-US" smtClean="0"/>
+              <a:t>7/31/2026</a:t>
             </a:fld>
-            <a:endParaRPr lang="en-GB"/>
+            <a:endParaRPr lang="en-US"/>
           </a:p>
         </p:txBody>
       </p:sp>
       <p:sp>
         <p:nvSpPr>
-          <p:cNvPr id="6" name="Footer Placeholder 5">
-            <a:extLst>
-              <a:ext uri="{FF2B5EF4-FFF2-40B4-BE49-F238E27FC236}">
-                <a16:creationId xmlns:a16="http://schemas.microsoft.com/office/drawing/2014/main" id="{AF7A1D0D-0246-44F8-B511-1BF602457CC1}"/>
-              </a:ext>
-            </a:extLst>
-          </p:cNvPr>
+          <p:cNvPr id="6" name="Footer Placeholder 5"/>
           <p:cNvSpPr>
             <a:spLocks noGrp="1"/>
           </p:cNvSpPr>
@@ -1446,19 +1388,13 @@
           <a:bodyPr/>
           <a:lstStyle/>
           <a:p>
-            <a:endParaRPr lang="en-GB"/>
+            <a:endParaRPr lang="en-US"/>
           </a:p>
         </p:txBody>
       </p:sp>
       <p:sp>
         <p:nvSpPr>
-          <p:cNvPr id="7" name="Slide Number Placeholder 6">
-            <a:extLst>
-              <a:ext uri="{FF2B5EF4-FFF2-40B4-BE49-F238E27FC236}">
-                <a16:creationId xmlns:a16="http://schemas.microsoft.com/office/drawing/2014/main" id="{80F7790C-8F02-4888-8429-B12C524870E6}"/>
-              </a:ext>
-            </a:extLst>
-          </p:cNvPr>
+          <p:cNvPr id="7" name="Slide Number Placeholder 6"/>
           <p:cNvSpPr>
             <a:spLocks noGrp="1"/>
           </p:cNvSpPr>
@@ -1471,18 +1407,18 @@
           <a:bodyPr/>
           <a:lstStyle/>
           <a:p>
-            <a:fld id="{DA1FBE03-D3C6-461A-AEF8-A4007295546D}" type="slidenum">
-              <a:rPr lang="en-GB" smtClean="0"/>
+            <a:fld id="{C1FF6DA9-008F-8B48-92A6-B652298478BF}" type="slidenum">
+              <a:rPr lang="en-US" smtClean="0"/>
               <a:t>‹#›</a:t>
             </a:fld>
-            <a:endParaRPr lang="en-GB"/>
+            <a:endParaRPr lang="en-US"/>
           </a:p>
         </p:txBody>
       </p:sp>
     </p:spTree>
     <p:extLst>
       <p:ext uri="{BB962C8B-B14F-4D97-AF65-F5344CB8AC3E}">
-        <p14:creationId xmlns:p14="http://schemas.microsoft.com/office/powerpoint/2010/main" val="3075199745"/>
+        <p14:creationId xmlns:p14="http://schemas.microsoft.com/office/powerpoint/2010/main" val="2782244947"/>
       </p:ext>
     </p:extLst>
   </p:cSld>
@@ -1511,13 +1447,7 @@
       </p:grpSpPr>
       <p:sp>
         <p:nvSpPr>
-          <p:cNvPr id="2" name="Title 1">
-            <a:extLst>
-              <a:ext uri="{FF2B5EF4-FFF2-40B4-BE49-F238E27FC236}">
-                <a16:creationId xmlns:a16="http://schemas.microsoft.com/office/drawing/2014/main" id="{68846EBE-A6CA-4CCA-A63F-207FD9712050}"/>
-              </a:ext>
-            </a:extLst>
-          </p:cNvPr>
+          <p:cNvPr id="2" name="Title 1"/>
           <p:cNvSpPr>
             <a:spLocks noGrp="1"/>
           </p:cNvSpPr>
@@ -1525,33 +1455,25 @@
             <p:ph type="title"/>
           </p:nvPr>
         </p:nvSpPr>
-        <p:spPr>
-          <a:xfrm>
-            <a:off x="839788" y="365125"/>
-            <a:ext cx="10515600" cy="1325563"/>
-          </a:xfrm>
-        </p:spPr>
+        <p:spPr/>
         <p:txBody>
           <a:bodyPr/>
-          <a:lstStyle/>
+          <a:lstStyle>
+            <a:lvl1pPr>
+              <a:defRPr/>
+            </a:lvl1pPr>
+          </a:lstStyle>
           <a:p>
             <a:r>
               <a:rPr lang="en-US"/>
               <a:t>Click to edit Master title style</a:t>
             </a:r>
-            <a:endParaRPr lang="en-GB"/>
           </a:p>
         </p:txBody>
       </p:sp>
       <p:sp>
         <p:nvSpPr>
-          <p:cNvPr id="3" name="Text Placeholder 2">
-            <a:extLst>
-              <a:ext uri="{FF2B5EF4-FFF2-40B4-BE49-F238E27FC236}">
-                <a16:creationId xmlns:a16="http://schemas.microsoft.com/office/drawing/2014/main" id="{F3D57EA2-714F-4A81-A9DC-AF937DE9655D}"/>
-              </a:ext>
-            </a:extLst>
-          </p:cNvPr>
+          <p:cNvPr id="3" name="Text Placeholder 2"/>
           <p:cNvSpPr>
             <a:spLocks noGrp="1"/>
           </p:cNvSpPr>
@@ -1561,8 +1483,8 @@
         </p:nvSpPr>
         <p:spPr>
           <a:xfrm>
-            <a:off x="839788" y="1681163"/>
-            <a:ext cx="5157787" cy="823912"/>
+            <a:off x="457200" y="1535113"/>
+            <a:ext cx="4040188" cy="639762"/>
           </a:xfrm>
         </p:spPr>
         <p:txBody>
@@ -1616,13 +1538,7 @@
       </p:sp>
       <p:sp>
         <p:nvSpPr>
-          <p:cNvPr id="4" name="Content Placeholder 3">
-            <a:extLst>
-              <a:ext uri="{FF2B5EF4-FFF2-40B4-BE49-F238E27FC236}">
-                <a16:creationId xmlns:a16="http://schemas.microsoft.com/office/drawing/2014/main" id="{C242B88A-F7AE-4DF2-B6C6-7731C2C58471}"/>
-              </a:ext>
-            </a:extLst>
-          </p:cNvPr>
+          <p:cNvPr id="4" name="Content Placeholder 3"/>
           <p:cNvSpPr>
             <a:spLocks noGrp="1"/>
           </p:cNvSpPr>
@@ -1632,13 +1548,41 @@
         </p:nvSpPr>
         <p:spPr>
           <a:xfrm>
-            <a:off x="839788" y="2505075"/>
-            <a:ext cx="5157787" cy="3684588"/>
+            <a:off x="457200" y="2174875"/>
+            <a:ext cx="4040188" cy="3951288"/>
           </a:xfrm>
         </p:spPr>
         <p:txBody>
           <a:bodyPr/>
-          <a:lstStyle/>
+          <a:lstStyle>
+            <a:lvl1pPr>
+              <a:defRPr sz="2400"/>
+            </a:lvl1pPr>
+            <a:lvl2pPr>
+              <a:defRPr sz="2000"/>
+            </a:lvl2pPr>
+            <a:lvl3pPr>
+              <a:defRPr sz="1800"/>
+            </a:lvl3pPr>
+            <a:lvl4pPr>
+              <a:defRPr sz="1600"/>
+            </a:lvl4pPr>
+            <a:lvl5pPr>
+              <a:defRPr sz="1600"/>
+            </a:lvl5pPr>
+            <a:lvl6pPr>
+              <a:defRPr sz="1600"/>
+            </a:lvl6pPr>
+            <a:lvl7pPr>
+              <a:defRPr sz="1600"/>
+            </a:lvl7pPr>
+            <a:lvl8pPr>
+              <a:defRPr sz="1600"/>
+            </a:lvl8pPr>
+            <a:lvl9pPr>
+              <a:defRPr sz="1600"/>
+            </a:lvl9pPr>
+          </a:lstStyle>
           <a:p>
             <a:pPr lvl="0"/>
             <a:r>
@@ -1673,19 +1617,12 @@
               <a:rPr lang="en-US"/>
               <a:t>Fifth level</a:t>
             </a:r>
-            <a:endParaRPr lang="en-GB"/>
           </a:p>
         </p:txBody>
       </p:sp>
       <p:sp>
         <p:nvSpPr>
-          <p:cNvPr id="5" name="Text Placeholder 4">
-            <a:extLst>
-              <a:ext uri="{FF2B5EF4-FFF2-40B4-BE49-F238E27FC236}">
-                <a16:creationId xmlns:a16="http://schemas.microsoft.com/office/drawing/2014/main" id="{182C0C34-8A3C-4DD4-8EC3-DB1EA8FDCE66}"/>
-              </a:ext>
-            </a:extLst>
-          </p:cNvPr>
+          <p:cNvPr id="5" name="Text Placeholder 4"/>
           <p:cNvSpPr>
             <a:spLocks noGrp="1"/>
           </p:cNvSpPr>
@@ -1695,8 +1632,8 @@
         </p:nvSpPr>
         <p:spPr>
           <a:xfrm>
-            <a:off x="6172200" y="1681163"/>
-            <a:ext cx="5183188" cy="823912"/>
+            <a:off x="4645025" y="1535113"/>
+            <a:ext cx="4041775" cy="639762"/>
           </a:xfrm>
         </p:spPr>
         <p:txBody>
@@ -1750,13 +1687,7 @@
       </p:sp>
       <p:sp>
         <p:nvSpPr>
-          <p:cNvPr id="6" name="Content Placeholder 5">
-            <a:extLst>
-              <a:ext uri="{FF2B5EF4-FFF2-40B4-BE49-F238E27FC236}">
-                <a16:creationId xmlns:a16="http://schemas.microsoft.com/office/drawing/2014/main" id="{82EAC8F4-1B6C-4660-B9D6-8B01D1A1C8A2}"/>
-              </a:ext>
-            </a:extLst>
-          </p:cNvPr>
+          <p:cNvPr id="6" name="Content Placeholder 5"/>
           <p:cNvSpPr>
             <a:spLocks noGrp="1"/>
           </p:cNvSpPr>
@@ -1766,13 +1697,41 @@
         </p:nvSpPr>
         <p:spPr>
           <a:xfrm>
-            <a:off x="6172200" y="2505075"/>
-            <a:ext cx="5183188" cy="3684588"/>
+            <a:off x="4645025" y="2174875"/>
+            <a:ext cx="4041775" cy="3951288"/>
           </a:xfrm>
         </p:spPr>
         <p:txBody>
           <a:bodyPr/>
-          <a:lstStyle/>
+          <a:lstStyle>
+            <a:lvl1pPr>
+              <a:defRPr sz="2400"/>
+            </a:lvl1pPr>
+            <a:lvl2pPr>
+              <a:defRPr sz="2000"/>
+            </a:lvl2pPr>
+            <a:lvl3pPr>
+              <a:defRPr sz="1800"/>
+            </a:lvl3pPr>
+            <a:lvl4pPr>
+              <a:defRPr sz="1600"/>
+            </a:lvl4pPr>
+            <a:lvl5pPr>
+              <a:defRPr sz="1600"/>
+            </a:lvl5pPr>
+            <a:lvl6pPr>
+              <a:defRPr sz="1600"/>
+            </a:lvl6pPr>
+            <a:lvl7pPr>
+              <a:defRPr sz="1600"/>
+            </a:lvl7pPr>
+            <a:lvl8pPr>
+              <a:defRPr sz="1600"/>
+            </a:lvl8pPr>
+            <a:lvl9pPr>
+              <a:defRPr sz="1600"/>
+            </a:lvl9pPr>
+          </a:lstStyle>
           <a:p>
             <a:pPr lvl="0"/>
             <a:r>
@@ -1807,19 +1766,12 @@
               <a:rPr lang="en-US"/>
               <a:t>Fifth level</a:t>
             </a:r>
-            <a:endParaRPr lang="en-GB"/>
           </a:p>
         </p:txBody>
       </p:sp>
       <p:sp>
         <p:nvSpPr>
-          <p:cNvPr id="7" name="Date Placeholder 6">
-            <a:extLst>
-              <a:ext uri="{FF2B5EF4-FFF2-40B4-BE49-F238E27FC236}">
-                <a16:creationId xmlns:a16="http://schemas.microsoft.com/office/drawing/2014/main" id="{A7A9B1F2-33B7-4C0A-A006-6D044EA17606}"/>
-              </a:ext>
-            </a:extLst>
-          </p:cNvPr>
+          <p:cNvPr id="7" name="Date Placeholder 6"/>
           <p:cNvSpPr>
             <a:spLocks noGrp="1"/>
           </p:cNvSpPr>
@@ -1832,23 +1784,17 @@
           <a:bodyPr/>
           <a:lstStyle/>
           <a:p>
-            <a:fld id="{B64837CF-C760-4D0F-BC79-5F1EF04D70DB}" type="datetimeFigureOut">
-              <a:rPr lang="en-GB" smtClean="0"/>
-              <a:t>31/07/2026</a:t>
+            <a:fld id="{5BCAD085-E8A6-8845-BD4E-CB4CCA059FC4}" type="datetimeFigureOut">
+              <a:rPr lang="en-US" smtClean="0"/>
+              <a:t>7/31/2026</a:t>
             </a:fld>
-            <a:endParaRPr lang="en-GB"/>
+            <a:endParaRPr lang="en-US"/>
           </a:p>
         </p:txBody>
       </p:sp>
       <p:sp>
         <p:nvSpPr>
-          <p:cNvPr id="8" name="Footer Placeholder 7">
-            <a:extLst>
-              <a:ext uri="{FF2B5EF4-FFF2-40B4-BE49-F238E27FC236}">
-                <a16:creationId xmlns:a16="http://schemas.microsoft.com/office/drawing/2014/main" id="{4E8446EB-CAB4-4893-A1E7-88E3B33B434A}"/>
-              </a:ext>
-            </a:extLst>
-          </p:cNvPr>
+          <p:cNvPr id="8" name="Footer Placeholder 7"/>
           <p:cNvSpPr>
             <a:spLocks noGrp="1"/>
           </p:cNvSpPr>
@@ -1861,19 +1807,13 @@
           <a:bodyPr/>
           <a:lstStyle/>
           <a:p>
-            <a:endParaRPr lang="en-GB"/>
+            <a:endParaRPr lang="en-US"/>
           </a:p>
         </p:txBody>
       </p:sp>
       <p:sp>
         <p:nvSpPr>
-          <p:cNvPr id="9" name="Slide Number Placeholder 8">
-            <a:extLst>
-              <a:ext uri="{FF2B5EF4-FFF2-40B4-BE49-F238E27FC236}">
-                <a16:creationId xmlns:a16="http://schemas.microsoft.com/office/drawing/2014/main" id="{F59225BE-9126-467C-87CC-E9FEDADA07F3}"/>
-              </a:ext>
-            </a:extLst>
-          </p:cNvPr>
+          <p:cNvPr id="9" name="Slide Number Placeholder 8"/>
           <p:cNvSpPr>
             <a:spLocks noGrp="1"/>
           </p:cNvSpPr>
@@ -1886,18 +1826,18 @@
           <a:bodyPr/>
           <a:lstStyle/>
           <a:p>
-            <a:fld id="{DA1FBE03-D3C6-461A-AEF8-A4007295546D}" type="slidenum">
-              <a:rPr lang="en-GB" smtClean="0"/>
+            <a:fld id="{C1FF6DA9-008F-8B48-92A6-B652298478BF}" type="slidenum">
+              <a:rPr lang="en-US" smtClean="0"/>
               <a:t>‹#›</a:t>
             </a:fld>
-            <a:endParaRPr lang="en-GB"/>
+            <a:endParaRPr lang="en-US"/>
           </a:p>
         </p:txBody>
       </p:sp>
     </p:spTree>
     <p:extLst>
       <p:ext uri="{BB962C8B-B14F-4D97-AF65-F5344CB8AC3E}">
-        <p14:creationId xmlns:p14="http://schemas.microsoft.com/office/powerpoint/2010/main" val="2095508801"/>
+        <p14:creationId xmlns:p14="http://schemas.microsoft.com/office/powerpoint/2010/main" val="990158736"/>
       </p:ext>
     </p:extLst>
   </p:cSld>
@@ -1926,13 +1866,7 @@
       </p:grpSpPr>
       <p:sp>
         <p:nvSpPr>
-          <p:cNvPr id="2" name="Title 1">
-            <a:extLst>
-              <a:ext uri="{FF2B5EF4-FFF2-40B4-BE49-F238E27FC236}">
-                <a16:creationId xmlns:a16="http://schemas.microsoft.com/office/drawing/2014/main" id="{167CBAB6-B908-4F7D-A9DA-8BBD0A25AC6A}"/>
-              </a:ext>
-            </a:extLst>
-          </p:cNvPr>
+          <p:cNvPr id="2" name="Title 1"/>
           <p:cNvSpPr>
             <a:spLocks noGrp="1"/>
           </p:cNvSpPr>
@@ -1949,19 +1883,12 @@
               <a:rPr lang="en-US"/>
               <a:t>Click to edit Master title style</a:t>
             </a:r>
-            <a:endParaRPr lang="en-GB"/>
           </a:p>
         </p:txBody>
       </p:sp>
       <p:sp>
         <p:nvSpPr>
-          <p:cNvPr id="3" name="Date Placeholder 2">
-            <a:extLst>
-              <a:ext uri="{FF2B5EF4-FFF2-40B4-BE49-F238E27FC236}">
-                <a16:creationId xmlns:a16="http://schemas.microsoft.com/office/drawing/2014/main" id="{4FFD3E2E-42C6-4B9A-9BF0-E309101BAAD4}"/>
-              </a:ext>
-            </a:extLst>
-          </p:cNvPr>
+          <p:cNvPr id="3" name="Date Placeholder 2"/>
           <p:cNvSpPr>
             <a:spLocks noGrp="1"/>
           </p:cNvSpPr>
@@ -1974,23 +1901,17 @@
           <a:bodyPr/>
           <a:lstStyle/>
           <a:p>
-            <a:fld id="{B64837CF-C760-4D0F-BC79-5F1EF04D70DB}" type="datetimeFigureOut">
-              <a:rPr lang="en-GB" smtClean="0"/>
-              <a:t>31/07/2026</a:t>
+            <a:fld id="{5BCAD085-E8A6-8845-BD4E-CB4CCA059FC4}" type="datetimeFigureOut">
+              <a:rPr lang="en-US" smtClean="0"/>
+              <a:t>7/31/2026</a:t>
             </a:fld>
-            <a:endParaRPr lang="en-GB"/>
+            <a:endParaRPr lang="en-US"/>
           </a:p>
         </p:txBody>
       </p:sp>
       <p:sp>
         <p:nvSpPr>
-          <p:cNvPr id="4" name="Footer Placeholder 3">
-            <a:extLst>
-              <a:ext uri="{FF2B5EF4-FFF2-40B4-BE49-F238E27FC236}">
-                <a16:creationId xmlns:a16="http://schemas.microsoft.com/office/drawing/2014/main" id="{8EF6ED90-3153-4116-86ED-5E46EE16A378}"/>
-              </a:ext>
-            </a:extLst>
-          </p:cNvPr>
+          <p:cNvPr id="4" name="Footer Placeholder 3"/>
           <p:cNvSpPr>
             <a:spLocks noGrp="1"/>
           </p:cNvSpPr>
@@ -2003,19 +1924,13 @@
           <a:bodyPr/>
           <a:lstStyle/>
           <a:p>
-            <a:endParaRPr lang="en-GB"/>
+            <a:endParaRPr lang="en-US"/>
           </a:p>
         </p:txBody>
       </p:sp>
       <p:sp>
         <p:nvSpPr>
-          <p:cNvPr id="5" name="Slide Number Placeholder 4">
-            <a:extLst>
-              <a:ext uri="{FF2B5EF4-FFF2-40B4-BE49-F238E27FC236}">
-                <a16:creationId xmlns:a16="http://schemas.microsoft.com/office/drawing/2014/main" id="{151C8A07-B1D3-4789-A93E-23CFCD44F3C1}"/>
-              </a:ext>
-            </a:extLst>
-          </p:cNvPr>
+          <p:cNvPr id="5" name="Slide Number Placeholder 4"/>
           <p:cNvSpPr>
             <a:spLocks noGrp="1"/>
           </p:cNvSpPr>
@@ -2028,18 +1943,18 @@
           <a:bodyPr/>
           <a:lstStyle/>
           <a:p>
-            <a:fld id="{DA1FBE03-D3C6-461A-AEF8-A4007295546D}" type="slidenum">
-              <a:rPr lang="en-GB" smtClean="0"/>
+            <a:fld id="{C1FF6DA9-008F-8B48-92A6-B652298478BF}" type="slidenum">
+              <a:rPr lang="en-US" smtClean="0"/>
               <a:t>‹#›</a:t>
             </a:fld>
-            <a:endParaRPr lang="en-GB"/>
+            <a:endParaRPr lang="en-US"/>
           </a:p>
         </p:txBody>
       </p:sp>
     </p:spTree>
     <p:extLst>
       <p:ext uri="{BB962C8B-B14F-4D97-AF65-F5344CB8AC3E}">
-        <p14:creationId xmlns:p14="http://schemas.microsoft.com/office/powerpoint/2010/main" val="1810392979"/>
+        <p14:creationId xmlns:p14="http://schemas.microsoft.com/office/powerpoint/2010/main" val="727027711"/>
       </p:ext>
     </p:extLst>
   </p:cSld>
@@ -2068,13 +1983,7 @@
       </p:grpSpPr>
       <p:sp>
         <p:nvSpPr>
-          <p:cNvPr id="2" name="Date Placeholder 1">
-            <a:extLst>
-              <a:ext uri="{FF2B5EF4-FFF2-40B4-BE49-F238E27FC236}">
-                <a16:creationId xmlns:a16="http://schemas.microsoft.com/office/drawing/2014/main" id="{28A7C518-D6C0-4D19-AB91-2EB186E4C57E}"/>
-              </a:ext>
-            </a:extLst>
-          </p:cNvPr>
+          <p:cNvPr id="2" name="Date Placeholder 1"/>
           <p:cNvSpPr>
             <a:spLocks noGrp="1"/>
           </p:cNvSpPr>
@@ -2087,23 +1996,17 @@
           <a:bodyPr/>
           <a:lstStyle/>
           <a:p>
-            <a:fld id="{B64837CF-C760-4D0F-BC79-5F1EF04D70DB}" type="datetimeFigureOut">
-              <a:rPr lang="en-GB" smtClean="0"/>
-              <a:t>31/07/2026</a:t>
+            <a:fld id="{5BCAD085-E8A6-8845-BD4E-CB4CCA059FC4}" type="datetimeFigureOut">
+              <a:rPr lang="en-US" smtClean="0"/>
+              <a:t>7/31/2026</a:t>
             </a:fld>
-            <a:endParaRPr lang="en-GB"/>
+            <a:endParaRPr lang="en-US"/>
           </a:p>
         </p:txBody>
       </p:sp>
       <p:sp>
         <p:nvSpPr>
-          <p:cNvPr id="3" name="Footer Placeholder 2">
-            <a:extLst>
-              <a:ext uri="{FF2B5EF4-FFF2-40B4-BE49-F238E27FC236}">
-                <a16:creationId xmlns:a16="http://schemas.microsoft.com/office/drawing/2014/main" id="{5FA2C451-73A5-4CBF-A1FA-5F7C4BD48145}"/>
-              </a:ext>
-            </a:extLst>
-          </p:cNvPr>
+          <p:cNvPr id="3" name="Footer Placeholder 2"/>
           <p:cNvSpPr>
             <a:spLocks noGrp="1"/>
           </p:cNvSpPr>
@@ -2116,19 +2019,13 @@
           <a:bodyPr/>
           <a:lstStyle/>
           <a:p>
-            <a:endParaRPr lang="en-GB"/>
+            <a:endParaRPr lang="en-US"/>
           </a:p>
         </p:txBody>
       </p:sp>
       <p:sp>
         <p:nvSpPr>
-          <p:cNvPr id="4" name="Slide Number Placeholder 3">
-            <a:extLst>
-              <a:ext uri="{FF2B5EF4-FFF2-40B4-BE49-F238E27FC236}">
-                <a16:creationId xmlns:a16="http://schemas.microsoft.com/office/drawing/2014/main" id="{62D92AFC-4639-46DF-ABEE-BE6E829E54E6}"/>
-              </a:ext>
-            </a:extLst>
-          </p:cNvPr>
+          <p:cNvPr id="4" name="Slide Number Placeholder 3"/>
           <p:cNvSpPr>
             <a:spLocks noGrp="1"/>
           </p:cNvSpPr>
@@ -2141,18 +2038,18 @@
           <a:bodyPr/>
           <a:lstStyle/>
           <a:p>
-            <a:fld id="{DA1FBE03-D3C6-461A-AEF8-A4007295546D}" type="slidenum">
-              <a:rPr lang="en-GB" smtClean="0"/>
+            <a:fld id="{C1FF6DA9-008F-8B48-92A6-B652298478BF}" type="slidenum">
+              <a:rPr lang="en-US" smtClean="0"/>
               <a:t>‹#›</a:t>
             </a:fld>
-            <a:endParaRPr lang="en-GB"/>
+            <a:endParaRPr lang="en-US"/>
           </a:p>
         </p:txBody>
       </p:sp>
     </p:spTree>
     <p:extLst>
       <p:ext uri="{BB962C8B-B14F-4D97-AF65-F5344CB8AC3E}">
-        <p14:creationId xmlns:p14="http://schemas.microsoft.com/office/powerpoint/2010/main" val="3179130358"/>
+        <p14:creationId xmlns:p14="http://schemas.microsoft.com/office/powerpoint/2010/main" val="1212999818"/>
       </p:ext>
     </p:extLst>
   </p:cSld>
@@ -2181,13 +2078,7 @@
       </p:grpSpPr>
       <p:sp>
         <p:nvSpPr>
-          <p:cNvPr id="2" name="Title 1">
-            <a:extLst>
-              <a:ext uri="{FF2B5EF4-FFF2-40B4-BE49-F238E27FC236}">
-                <a16:creationId xmlns:a16="http://schemas.microsoft.com/office/drawing/2014/main" id="{0C218C98-100A-455C-AE31-4E81E30D6BDF}"/>
-              </a:ext>
-            </a:extLst>
-          </p:cNvPr>
+          <p:cNvPr id="2" name="Title 1"/>
           <p:cNvSpPr>
             <a:spLocks noGrp="1"/>
           </p:cNvSpPr>
@@ -2197,15 +2088,15 @@
         </p:nvSpPr>
         <p:spPr>
           <a:xfrm>
-            <a:off x="839788" y="457200"/>
-            <a:ext cx="3932237" cy="1600200"/>
+            <a:off x="457200" y="273050"/>
+            <a:ext cx="3008313" cy="1162050"/>
           </a:xfrm>
         </p:spPr>
         <p:txBody>
           <a:bodyPr anchor="b"/>
           <a:lstStyle>
-            <a:lvl1pPr>
-              <a:defRPr sz="3200"/>
+            <a:lvl1pPr algn="l">
+              <a:defRPr sz="2000" b="1"/>
             </a:lvl1pPr>
           </a:lstStyle>
           <a:p>
@@ -2213,19 +2104,12 @@
               <a:rPr lang="en-US"/>
               <a:t>Click to edit Master title style</a:t>
             </a:r>
-            <a:endParaRPr lang="en-GB"/>
           </a:p>
         </p:txBody>
       </p:sp>
       <p:sp>
         <p:nvSpPr>
-          <p:cNvPr id="3" name="Content Placeholder 2">
-            <a:extLst>
-              <a:ext uri="{FF2B5EF4-FFF2-40B4-BE49-F238E27FC236}">
-                <a16:creationId xmlns:a16="http://schemas.microsoft.com/office/drawing/2014/main" id="{3D081626-A171-4F0F-B1C8-34461220BAF6}"/>
-              </a:ext>
-            </a:extLst>
-          </p:cNvPr>
+          <p:cNvPr id="3" name="Content Placeholder 2"/>
           <p:cNvSpPr>
             <a:spLocks noGrp="1"/>
           </p:cNvSpPr>
@@ -2235,8 +2119,8 @@
         </p:nvSpPr>
         <p:spPr>
           <a:xfrm>
-            <a:off x="5183188" y="987425"/>
-            <a:ext cx="6172200" cy="4873625"/>
+            <a:off x="3575050" y="273050"/>
+            <a:ext cx="5111750" cy="5853113"/>
           </a:xfrm>
         </p:spPr>
         <p:txBody>
@@ -2304,19 +2188,12 @@
               <a:rPr lang="en-US"/>
               <a:t>Fifth level</a:t>
             </a:r>
-            <a:endParaRPr lang="en-GB"/>
           </a:p>
         </p:txBody>
       </p:sp>
       <p:sp>
         <p:nvSpPr>
-          <p:cNvPr id="4" name="Text Placeholder 3">
-            <a:extLst>
-              <a:ext uri="{FF2B5EF4-FFF2-40B4-BE49-F238E27FC236}">
-                <a16:creationId xmlns:a16="http://schemas.microsoft.com/office/drawing/2014/main" id="{E099AA34-48BC-4731-B4E8-0BF90C59AB66}"/>
-              </a:ext>
-            </a:extLst>
-          </p:cNvPr>
+          <p:cNvPr id="4" name="Text Placeholder 3"/>
           <p:cNvSpPr>
             <a:spLocks noGrp="1"/>
           </p:cNvSpPr>
@@ -2326,8 +2203,8 @@
         </p:nvSpPr>
         <p:spPr>
           <a:xfrm>
-            <a:off x="839788" y="2057400"/>
-            <a:ext cx="3932237" cy="3811588"/>
+            <a:off x="457200" y="1435100"/>
+            <a:ext cx="3008313" cy="4691063"/>
           </a:xfrm>
         </p:spPr>
         <p:txBody>
@@ -2335,39 +2212,39 @@
           <a:lstStyle>
             <a:lvl1pPr marL="0" indent="0">
               <a:buNone/>
-              <a:defRPr sz="1600"/>
+              <a:defRPr sz="1400"/>
             </a:lvl1pPr>
             <a:lvl2pPr marL="457200" indent="0">
               <a:buNone/>
-              <a:defRPr sz="1400"/>
+              <a:defRPr sz="1200"/>
             </a:lvl2pPr>
             <a:lvl3pPr marL="914400" indent="0">
               <a:buNone/>
-              <a:defRPr sz="1200"/>
+              <a:defRPr sz="1000"/>
             </a:lvl3pPr>
             <a:lvl4pPr marL="1371600" indent="0">
               <a:buNone/>
-              <a:defRPr sz="1000"/>
+              <a:defRPr sz="900"/>
             </a:lvl4pPr>
             <a:lvl5pPr marL="1828800" indent="0">
               <a:buNone/>
-              <a:defRPr sz="1000"/>
+              <a:defRPr sz="900"/>
             </a:lvl5pPr>
             <a:lvl6pPr marL="2286000" indent="0">
               <a:buNone/>
-              <a:defRPr sz="1000"/>
+              <a:defRPr sz="900"/>
             </a:lvl6pPr>
             <a:lvl7pPr marL="2743200" indent="0">
               <a:buNone/>
-              <a:defRPr sz="1000"/>
+              <a:defRPr sz="900"/>
             </a:lvl7pPr>
             <a:lvl8pPr marL="3200400" indent="0">
               <a:buNone/>
-              <a:defRPr sz="1000"/>
+              <a:defRPr sz="900"/>
             </a:lvl8pPr>
             <a:lvl9pPr marL="3657600" indent="0">
               <a:buNone/>
-              <a:defRPr sz="1000"/>
+              <a:defRPr sz="900"/>
             </a:lvl9pPr>
           </a:lstStyle>
           <a:p>
@@ -2381,13 +2258,7 @@
       </p:sp>
       <p:sp>
         <p:nvSpPr>
-          <p:cNvPr id="5" name="Date Placeholder 4">
-            <a:extLst>
-              <a:ext uri="{FF2B5EF4-FFF2-40B4-BE49-F238E27FC236}">
-                <a16:creationId xmlns:a16="http://schemas.microsoft.com/office/drawing/2014/main" id="{84A9ACCE-C06E-4A08-B1A9-731C4FA2286F}"/>
-              </a:ext>
-            </a:extLst>
-          </p:cNvPr>
+          <p:cNvPr id="5" name="Date Placeholder 4"/>
           <p:cNvSpPr>
             <a:spLocks noGrp="1"/>
           </p:cNvSpPr>
@@ -2400,23 +2271,17 @@
           <a:bodyPr/>
           <a:lstStyle/>
           <a:p>
-            <a:fld id="{B64837CF-C760-4D0F-BC79-5F1EF04D70DB}" type="datetimeFigureOut">
-              <a:rPr lang="en-GB" smtClean="0"/>
-              <a:t>31/07/2026</a:t>
+            <a:fld id="{5BCAD085-E8A6-8845-BD4E-CB4CCA059FC4}" type="datetimeFigureOut">
+              <a:rPr lang="en-US" smtClean="0"/>
+              <a:t>7/31/2026</a:t>
             </a:fld>
-            <a:endParaRPr lang="en-GB"/>
+            <a:endParaRPr lang="en-US"/>
           </a:p>
         </p:txBody>
       </p:sp>
       <p:sp>
         <p:nvSpPr>
-          <p:cNvPr id="6" name="Footer Placeholder 5">
-            <a:extLst>
-              <a:ext uri="{FF2B5EF4-FFF2-40B4-BE49-F238E27FC236}">
-                <a16:creationId xmlns:a16="http://schemas.microsoft.com/office/drawing/2014/main" id="{2B84DA5C-D26B-434B-930F-6B9E17B74901}"/>
-              </a:ext>
-            </a:extLst>
-          </p:cNvPr>
+          <p:cNvPr id="6" name="Footer Placeholder 5"/>
           <p:cNvSpPr>
             <a:spLocks noGrp="1"/>
           </p:cNvSpPr>
@@ -2429,19 +2294,13 @@
           <a:bodyPr/>
           <a:lstStyle/>
           <a:p>
-            <a:endParaRPr lang="en-GB"/>
+            <a:endParaRPr lang="en-US"/>
           </a:p>
         </p:txBody>
       </p:sp>
       <p:sp>
         <p:nvSpPr>
-          <p:cNvPr id="7" name="Slide Number Placeholder 6">
-            <a:extLst>
-              <a:ext uri="{FF2B5EF4-FFF2-40B4-BE49-F238E27FC236}">
-                <a16:creationId xmlns:a16="http://schemas.microsoft.com/office/drawing/2014/main" id="{C7934A49-D6EA-41AC-92F9-D775B8B684BE}"/>
-              </a:ext>
-            </a:extLst>
-          </p:cNvPr>
+          <p:cNvPr id="7" name="Slide Number Placeholder 6"/>
           <p:cNvSpPr>
             <a:spLocks noGrp="1"/>
           </p:cNvSpPr>
@@ -2454,18 +2313,18 @@
           <a:bodyPr/>
           <a:lstStyle/>
           <a:p>
-            <a:fld id="{DA1FBE03-D3C6-461A-AEF8-A4007295546D}" type="slidenum">
-              <a:rPr lang="en-GB" smtClean="0"/>
+            <a:fld id="{C1FF6DA9-008F-8B48-92A6-B652298478BF}" type="slidenum">
+              <a:rPr lang="en-US" smtClean="0"/>
               <a:t>‹#›</a:t>
             </a:fld>
-            <a:endParaRPr lang="en-GB"/>
+            <a:endParaRPr lang="en-US"/>
           </a:p>
         </p:txBody>
       </p:sp>
     </p:spTree>
     <p:extLst>
       <p:ext uri="{BB962C8B-B14F-4D97-AF65-F5344CB8AC3E}">
-        <p14:creationId xmlns:p14="http://schemas.microsoft.com/office/powerpoint/2010/main" val="581345260"/>
+        <p14:creationId xmlns:p14="http://schemas.microsoft.com/office/powerpoint/2010/main" val="1840726560"/>
       </p:ext>
     </p:extLst>
   </p:cSld>
@@ -2494,13 +2353,7 @@
       </p:grpSpPr>
       <p:sp>
         <p:nvSpPr>
-          <p:cNvPr id="2" name="Title 1">
-            <a:extLst>
-              <a:ext uri="{FF2B5EF4-FFF2-40B4-BE49-F238E27FC236}">
-                <a16:creationId xmlns:a16="http://schemas.microsoft.com/office/drawing/2014/main" id="{CB580845-93EC-47A4-8B2F-8DA314E25170}"/>
-              </a:ext>
-            </a:extLst>
-          </p:cNvPr>
+          <p:cNvPr id="2" name="Title 1"/>
           <p:cNvSpPr>
             <a:spLocks noGrp="1"/>
           </p:cNvSpPr>
@@ -2510,15 +2363,15 @@
         </p:nvSpPr>
         <p:spPr>
           <a:xfrm>
-            <a:off x="839788" y="457200"/>
-            <a:ext cx="3932237" cy="1600200"/>
+            <a:off x="1792288" y="4800600"/>
+            <a:ext cx="5486400" cy="566738"/>
           </a:xfrm>
         </p:spPr>
         <p:txBody>
           <a:bodyPr anchor="b"/>
           <a:lstStyle>
-            <a:lvl1pPr>
-              <a:defRPr sz="3200"/>
+            <a:lvl1pPr algn="l">
+              <a:defRPr sz="2000" b="1"/>
             </a:lvl1pPr>
           </a:lstStyle>
           <a:p>
@@ -2526,19 +2379,12 @@
               <a:rPr lang="en-US"/>
               <a:t>Click to edit Master title style</a:t>
             </a:r>
-            <a:endParaRPr lang="en-GB"/>
           </a:p>
         </p:txBody>
       </p:sp>
       <p:sp>
         <p:nvSpPr>
-          <p:cNvPr id="3" name="Picture Placeholder 2">
-            <a:extLst>
-              <a:ext uri="{FF2B5EF4-FFF2-40B4-BE49-F238E27FC236}">
-                <a16:creationId xmlns:a16="http://schemas.microsoft.com/office/drawing/2014/main" id="{80E72EBD-0CF9-4766-83E0-0AE2091445B1}"/>
-              </a:ext>
-            </a:extLst>
-          </p:cNvPr>
+          <p:cNvPr id="3" name="Picture Placeholder 2"/>
           <p:cNvSpPr>
             <a:spLocks noGrp="1"/>
           </p:cNvSpPr>
@@ -2548,8 +2394,8 @@
         </p:nvSpPr>
         <p:spPr>
           <a:xfrm>
-            <a:off x="5183188" y="987425"/>
-            <a:ext cx="6172200" cy="4873625"/>
+            <a:off x="1792288" y="612775"/>
+            <a:ext cx="5486400" cy="4114800"/>
           </a:xfrm>
         </p:spPr>
         <p:txBody>
@@ -2593,19 +2439,13 @@
             </a:lvl9pPr>
           </a:lstStyle>
           <a:p>
-            <a:endParaRPr lang="en-GB"/>
+            <a:endParaRPr lang="en-US"/>
           </a:p>
         </p:txBody>
       </p:sp>
       <p:sp>
         <p:nvSpPr>
-          <p:cNvPr id="4" name="Text Placeholder 3">
-            <a:extLst>
-              <a:ext uri="{FF2B5EF4-FFF2-40B4-BE49-F238E27FC236}">
-                <a16:creationId xmlns:a16="http://schemas.microsoft.com/office/drawing/2014/main" id="{DEBEBA00-BDAB-4D04-BB82-445F2635948C}"/>
-              </a:ext>
-            </a:extLst>
-          </p:cNvPr>
+          <p:cNvPr id="4" name="Text Placeholder 3"/>
           <p:cNvSpPr>
             <a:spLocks noGrp="1"/>
           </p:cNvSpPr>
@@ -2615,8 +2455,8 @@
         </p:nvSpPr>
         <p:spPr>
           <a:xfrm>
-            <a:off x="839788" y="2057400"/>
-            <a:ext cx="3932237" cy="3811588"/>
+            <a:off x="1792288" y="5367338"/>
+            <a:ext cx="5486400" cy="804862"/>
           </a:xfrm>
         </p:spPr>
         <p:txBody>
@@ -2624,39 +2464,39 @@
           <a:lstStyle>
             <a:lvl1pPr marL="0" indent="0">
               <a:buNone/>
-              <a:defRPr sz="1600"/>
+              <a:defRPr sz="1400"/>
             </a:lvl1pPr>
             <a:lvl2pPr marL="457200" indent="0">
               <a:buNone/>
-              <a:defRPr sz="1400"/>
+              <a:defRPr sz="1200"/>
             </a:lvl2pPr>
             <a:lvl3pPr marL="914400" indent="0">
               <a:buNone/>
-              <a:defRPr sz="1200"/>
+              <a:defRPr sz="1000"/>
             </a:lvl3pPr>
             <a:lvl4pPr marL="1371600" indent="0">
               <a:buNone/>
-              <a:defRPr sz="1000"/>
+              <a:defRPr sz="900"/>
             </a:lvl4pPr>
             <a:lvl5pPr marL="1828800" indent="0">
               <a:buNone/>
-              <a:defRPr sz="1000"/>
+              <a:defRPr sz="900"/>
             </a:lvl5pPr>
             <a:lvl6pPr marL="2286000" indent="0">
               <a:buNone/>
-              <a:defRPr sz="1000"/>
+              <a:defRPr sz="900"/>
             </a:lvl6pPr>
             <a:lvl7pPr marL="2743200" indent="0">
               <a:buNone/>
-              <a:defRPr sz="1000"/>
+              <a:defRPr sz="900"/>
             </a:lvl7pPr>
             <a:lvl8pPr marL="3200400" indent="0">
               <a:buNone/>
-              <a:defRPr sz="1000"/>
+              <a:defRPr sz="900"/>
             </a:lvl8pPr>
             <a:lvl9pPr marL="3657600" indent="0">
               <a:buNone/>
-              <a:defRPr sz="1000"/>
+              <a:defRPr sz="900"/>
             </a:lvl9pPr>
           </a:lstStyle>
           <a:p>
@@ -2670,13 +2510,7 @@
       </p:sp>
       <p:sp>
         <p:nvSpPr>
-          <p:cNvPr id="5" name="Date Placeholder 4">
-            <a:extLst>
-              <a:ext uri="{FF2B5EF4-FFF2-40B4-BE49-F238E27FC236}">
-                <a16:creationId xmlns:a16="http://schemas.microsoft.com/office/drawing/2014/main" id="{BA7C686C-FF5C-4C31-9B0A-C81FAC61B6E7}"/>
-              </a:ext>
-            </a:extLst>
-          </p:cNvPr>
+          <p:cNvPr id="5" name="Date Placeholder 4"/>
           <p:cNvSpPr>
             <a:spLocks noGrp="1"/>
           </p:cNvSpPr>
@@ -2689,23 +2523,17 @@
           <a:bodyPr/>
           <a:lstStyle/>
           <a:p>
-            <a:fld id="{B64837CF-C760-4D0F-BC79-5F1EF04D70DB}" type="datetimeFigureOut">
-              <a:rPr lang="en-GB" smtClean="0"/>
-              <a:t>31/07/2026</a:t>
+            <a:fld id="{5BCAD085-E8A6-8845-BD4E-CB4CCA059FC4}" type="datetimeFigureOut">
+              <a:rPr lang="en-US" smtClean="0"/>
+              <a:t>7/31/2026</a:t>
             </a:fld>
-            <a:endParaRPr lang="en-GB"/>
+            <a:endParaRPr lang="en-US"/>
           </a:p>
         </p:txBody>
       </p:sp>
       <p:sp>
         <p:nvSpPr>
-          <p:cNvPr id="6" name="Footer Placeholder 5">
-            <a:extLst>
-              <a:ext uri="{FF2B5EF4-FFF2-40B4-BE49-F238E27FC236}">
-                <a16:creationId xmlns:a16="http://schemas.microsoft.com/office/drawing/2014/main" id="{4B513B7C-F27A-4D44-A4E2-788184F71A90}"/>
-              </a:ext>
-            </a:extLst>
-          </p:cNvPr>
+          <p:cNvPr id="6" name="Footer Placeholder 5"/>
           <p:cNvSpPr>
             <a:spLocks noGrp="1"/>
           </p:cNvSpPr>
@@ -2718,19 +2546,13 @@
           <a:bodyPr/>
           <a:lstStyle/>
           <a:p>
-            <a:endParaRPr lang="en-GB"/>
+            <a:endParaRPr lang="en-US"/>
           </a:p>
         </p:txBody>
       </p:sp>
       <p:sp>
         <p:nvSpPr>
-          <p:cNvPr id="7" name="Slide Number Placeholder 6">
-            <a:extLst>
-              <a:ext uri="{FF2B5EF4-FFF2-40B4-BE49-F238E27FC236}">
-                <a16:creationId xmlns:a16="http://schemas.microsoft.com/office/drawing/2014/main" id="{9C50ABF8-99B8-46B7-9F36-58728D2C84FF}"/>
-              </a:ext>
-            </a:extLst>
-          </p:cNvPr>
+          <p:cNvPr id="7" name="Slide Number Placeholder 6"/>
           <p:cNvSpPr>
             <a:spLocks noGrp="1"/>
           </p:cNvSpPr>
@@ -2743,18 +2565,18 @@
           <a:bodyPr/>
           <a:lstStyle/>
           <a:p>
-            <a:fld id="{DA1FBE03-D3C6-461A-AEF8-A4007295546D}" type="slidenum">
-              <a:rPr lang="en-GB" smtClean="0"/>
+            <a:fld id="{C1FF6DA9-008F-8B48-92A6-B652298478BF}" type="slidenum">
+              <a:rPr lang="en-US" smtClean="0"/>
               <a:t>‹#›</a:t>
             </a:fld>
-            <a:endParaRPr lang="en-GB"/>
+            <a:endParaRPr lang="en-US"/>
           </a:p>
         </p:txBody>
       </p:sp>
     </p:spTree>
     <p:extLst>
       <p:ext uri="{BB962C8B-B14F-4D97-AF65-F5344CB8AC3E}">
-        <p14:creationId xmlns:p14="http://schemas.microsoft.com/office/powerpoint/2010/main" val="216886322"/>
+        <p14:creationId xmlns:p14="http://schemas.microsoft.com/office/powerpoint/2010/main" val="3889236939"/>
       </p:ext>
     </p:extLst>
   </p:cSld>
@@ -2788,13 +2610,7 @@
       </p:grpSpPr>
       <p:sp>
         <p:nvSpPr>
-          <p:cNvPr id="2" name="Title Placeholder 1">
-            <a:extLst>
-              <a:ext uri="{FF2B5EF4-FFF2-40B4-BE49-F238E27FC236}">
-                <a16:creationId xmlns:a16="http://schemas.microsoft.com/office/drawing/2014/main" id="{BA5F12A9-5981-44B3-A1F6-FFF09CD7A8E5}"/>
-              </a:ext>
-            </a:extLst>
-          </p:cNvPr>
+          <p:cNvPr id="2" name="Title Placeholder 1"/>
           <p:cNvSpPr>
             <a:spLocks noGrp="1"/>
           </p:cNvSpPr>
@@ -2804,8 +2620,8 @@
         </p:nvSpPr>
         <p:spPr>
           <a:xfrm>
-            <a:off x="838200" y="365125"/>
-            <a:ext cx="10515600" cy="1325563"/>
+            <a:off x="457200" y="274638"/>
+            <a:ext cx="8229600" cy="1143000"/>
           </a:xfrm>
           <a:prstGeom prst="rect">
             <a:avLst/>
@@ -2821,19 +2637,12 @@
               <a:rPr lang="en-US"/>
               <a:t>Click to edit Master title style</a:t>
             </a:r>
-            <a:endParaRPr lang="en-GB"/>
           </a:p>
         </p:txBody>
       </p:sp>
       <p:sp>
         <p:nvSpPr>
-          <p:cNvPr id="3" name="Text Placeholder 2">
-            <a:extLst>
-              <a:ext uri="{FF2B5EF4-FFF2-40B4-BE49-F238E27FC236}">
-                <a16:creationId xmlns:a16="http://schemas.microsoft.com/office/drawing/2014/main" id="{385511BB-2EEC-436F-AB15-00715947276C}"/>
-              </a:ext>
-            </a:extLst>
-          </p:cNvPr>
+          <p:cNvPr id="3" name="Text Placeholder 2"/>
           <p:cNvSpPr>
             <a:spLocks noGrp="1"/>
           </p:cNvSpPr>
@@ -2843,8 +2652,8 @@
         </p:nvSpPr>
         <p:spPr>
           <a:xfrm>
-            <a:off x="838200" y="1825625"/>
-            <a:ext cx="10515600" cy="4351338"/>
+            <a:off x="457200" y="1600200"/>
+            <a:ext cx="8229600" cy="4525963"/>
           </a:xfrm>
           <a:prstGeom prst="rect">
             <a:avLst/>
@@ -2889,19 +2698,12 @@
               <a:rPr lang="en-US"/>
               <a:t>Fifth level</a:t>
             </a:r>
-            <a:endParaRPr lang="en-GB"/>
           </a:p>
         </p:txBody>
       </p:sp>
       <p:sp>
         <p:nvSpPr>
-          <p:cNvPr id="4" name="Date Placeholder 3">
-            <a:extLst>
-              <a:ext uri="{FF2B5EF4-FFF2-40B4-BE49-F238E27FC236}">
-                <a16:creationId xmlns:a16="http://schemas.microsoft.com/office/drawing/2014/main" id="{5CA782AB-B529-464A-8282-D7C14ACD113D}"/>
-              </a:ext>
-            </a:extLst>
-          </p:cNvPr>
+          <p:cNvPr id="4" name="Date Placeholder 3"/>
           <p:cNvSpPr>
             <a:spLocks noGrp="1"/>
           </p:cNvSpPr>
@@ -2911,8 +2713,8 @@
         </p:nvSpPr>
         <p:spPr>
           <a:xfrm>
-            <a:off x="838200" y="6356350"/>
-            <a:ext cx="2743200" cy="365125"/>
+            <a:off x="457200" y="6356350"/>
+            <a:ext cx="2133600" cy="365125"/>
           </a:xfrm>
           <a:prstGeom prst="rect">
             <a:avLst/>
@@ -2932,23 +2734,17 @@
             </a:lvl1pPr>
           </a:lstStyle>
           <a:p>
-            <a:fld id="{B64837CF-C760-4D0F-BC79-5F1EF04D70DB}" type="datetimeFigureOut">
-              <a:rPr lang="en-GB" smtClean="0"/>
-              <a:t>31/07/2026</a:t>
+            <a:fld id="{5BCAD085-E8A6-8845-BD4E-CB4CCA059FC4}" type="datetimeFigureOut">
+              <a:rPr lang="en-US" smtClean="0"/>
+              <a:t>7/31/2026</a:t>
             </a:fld>
-            <a:endParaRPr lang="en-GB"/>
+            <a:endParaRPr lang="en-US"/>
           </a:p>
         </p:txBody>
       </p:sp>
       <p:sp>
         <p:nvSpPr>
-          <p:cNvPr id="5" name="Footer Placeholder 4">
-            <a:extLst>
-              <a:ext uri="{FF2B5EF4-FFF2-40B4-BE49-F238E27FC236}">
-                <a16:creationId xmlns:a16="http://schemas.microsoft.com/office/drawing/2014/main" id="{D3845F78-75EF-4D67-80B4-4A3CA645AAFA}"/>
-              </a:ext>
-            </a:extLst>
-          </p:cNvPr>
+          <p:cNvPr id="5" name="Footer Placeholder 4"/>
           <p:cNvSpPr>
             <a:spLocks noGrp="1"/>
           </p:cNvSpPr>
@@ -2958,8 +2754,8 @@
         </p:nvSpPr>
         <p:spPr>
           <a:xfrm>
-            <a:off x="4038600" y="6356350"/>
-            <a:ext cx="4114800" cy="365125"/>
+            <a:off x="3124200" y="6356350"/>
+            <a:ext cx="2895600" cy="365125"/>
           </a:xfrm>
           <a:prstGeom prst="rect">
             <a:avLst/>
@@ -2979,19 +2775,13 @@
             </a:lvl1pPr>
           </a:lstStyle>
           <a:p>
-            <a:endParaRPr lang="en-GB"/>
+            <a:endParaRPr lang="en-US"/>
           </a:p>
         </p:txBody>
       </p:sp>
       <p:sp>
         <p:nvSpPr>
-          <p:cNvPr id="6" name="Slide Number Placeholder 5">
-            <a:extLst>
-              <a:ext uri="{FF2B5EF4-FFF2-40B4-BE49-F238E27FC236}">
-                <a16:creationId xmlns:a16="http://schemas.microsoft.com/office/drawing/2014/main" id="{ACD83043-CDEF-4049-82D0-0CFD3BAAC1D8}"/>
-              </a:ext>
-            </a:extLst>
-          </p:cNvPr>
+          <p:cNvPr id="6" name="Slide Number Placeholder 5"/>
           <p:cNvSpPr>
             <a:spLocks noGrp="1"/>
           </p:cNvSpPr>
@@ -3001,8 +2791,8 @@
         </p:nvSpPr>
         <p:spPr>
           <a:xfrm>
-            <a:off x="8610600" y="6356350"/>
-            <a:ext cx="2743200" cy="365125"/>
+            <a:off x="6553200" y="6356350"/>
+            <a:ext cx="2133600" cy="365125"/>
           </a:xfrm>
           <a:prstGeom prst="rect">
             <a:avLst/>
@@ -3022,18 +2812,18 @@
             </a:lvl1pPr>
           </a:lstStyle>
           <a:p>
-            <a:fld id="{DA1FBE03-D3C6-461A-AEF8-A4007295546D}" type="slidenum">
-              <a:rPr lang="en-GB" smtClean="0"/>
+            <a:fld id="{C1FF6DA9-008F-8B48-92A6-B652298478BF}" type="slidenum">
+              <a:rPr lang="en-US" smtClean="0"/>
               <a:t>‹#›</a:t>
             </a:fld>
-            <a:endParaRPr lang="en-GB"/>
+            <a:endParaRPr lang="en-US"/>
           </a:p>
         </p:txBody>
       </p:sp>
     </p:spTree>
     <p:extLst>
       <p:ext uri="{BB962C8B-B14F-4D97-AF65-F5344CB8AC3E}">
-        <p14:creationId xmlns:p14="http://schemas.microsoft.com/office/powerpoint/2010/main" val="2122939155"/>
+        <p14:creationId xmlns:p14="http://schemas.microsoft.com/office/powerpoint/2010/main" val="2209977519"/>
       </p:ext>
     </p:extLst>
   </p:cSld>
@@ -3053,10 +2843,7 @@
   </p:sldLayoutIdLst>
   <p:txStyles>
     <p:titleStyle>
-      <a:lvl1pPr algn="l" defTabSz="914400" rtl="0" eaLnBrk="1" latinLnBrk="0" hangingPunct="1">
-        <a:lnSpc>
-          <a:spcPct val="90000"/>
-        </a:lnSpc>
+      <a:lvl1pPr algn="ctr" defTabSz="457200" rtl="0" eaLnBrk="1" latinLnBrk="0" hangingPunct="1">
         <a:spcBef>
           <a:spcPct val="0"/>
         </a:spcBef>
@@ -3072,15 +2859,27 @@
       </a:lvl1pPr>
     </p:titleStyle>
     <p:bodyStyle>
-      <a:lvl1pPr marL="228600" indent="-228600" algn="l" defTabSz="914400" rtl="0" eaLnBrk="1" latinLnBrk="0" hangingPunct="1">
-        <a:lnSpc>
-          <a:spcPct val="90000"/>
-        </a:lnSpc>
+      <a:lvl1pPr marL="342900" indent="-342900" algn="l" defTabSz="457200" rtl="0" eaLnBrk="1" latinLnBrk="0" hangingPunct="1">
         <a:spcBef>
-          <a:spcPts val="1000"/>
+          <a:spcPct val="20000"/>
         </a:spcBef>
-        <a:buFont typeface="Arial" panose="020B0604020202020204" pitchFamily="34" charset="0"/>
+        <a:buFont typeface="Arial"/>
         <a:buChar char="•"/>
+        <a:defRPr sz="3200" kern="1200">
+          <a:solidFill>
+            <a:schemeClr val="tx1"/>
+          </a:solidFill>
+          <a:latin typeface="+mn-lt"/>
+          <a:ea typeface="+mn-ea"/>
+          <a:cs typeface="+mn-cs"/>
+        </a:defRPr>
+      </a:lvl1pPr>
+      <a:lvl2pPr marL="742950" indent="-285750" algn="l" defTabSz="457200" rtl="0" eaLnBrk="1" latinLnBrk="0" hangingPunct="1">
+        <a:spcBef>
+          <a:spcPct val="20000"/>
+        </a:spcBef>
+        <a:buFont typeface="Arial"/>
+        <a:buChar char="–"/>
         <a:defRPr sz="2800" kern="1200">
           <a:solidFill>
             <a:schemeClr val="tx1"/>
@@ -3089,15 +2888,12 @@
           <a:ea typeface="+mn-ea"/>
           <a:cs typeface="+mn-cs"/>
         </a:defRPr>
-      </a:lvl1pPr>
-      <a:lvl2pPr marL="685800" indent="-228600" algn="l" defTabSz="914400" rtl="0" eaLnBrk="1" latinLnBrk="0" hangingPunct="1">
-        <a:lnSpc>
-          <a:spcPct val="90000"/>
-        </a:lnSpc>
+      </a:lvl2pPr>
+      <a:lvl3pPr marL="1143000" indent="-228600" algn="l" defTabSz="457200" rtl="0" eaLnBrk="1" latinLnBrk="0" hangingPunct="1">
         <a:spcBef>
-          <a:spcPts val="500"/>
+          <a:spcPct val="20000"/>
         </a:spcBef>
-        <a:buFont typeface="Arial" panose="020B0604020202020204" pitchFamily="34" charset="0"/>
+        <a:buFont typeface="Arial"/>
         <a:buChar char="•"/>
         <a:defRPr sz="2400" kern="1200">
           <a:solidFill>
@@ -3107,15 +2903,42 @@
           <a:ea typeface="+mn-ea"/>
           <a:cs typeface="+mn-cs"/>
         </a:defRPr>
-      </a:lvl2pPr>
-      <a:lvl3pPr marL="1143000" indent="-228600" algn="l" defTabSz="914400" rtl="0" eaLnBrk="1" latinLnBrk="0" hangingPunct="1">
-        <a:lnSpc>
-          <a:spcPct val="90000"/>
-        </a:lnSpc>
+      </a:lvl3pPr>
+      <a:lvl4pPr marL="1600200" indent="-228600" algn="l" defTabSz="457200" rtl="0" eaLnBrk="1" latinLnBrk="0" hangingPunct="1">
         <a:spcBef>
-          <a:spcPts val="500"/>
+          <a:spcPct val="20000"/>
         </a:spcBef>
-        <a:buFont typeface="Arial" panose="020B0604020202020204" pitchFamily="34" charset="0"/>
+        <a:buFont typeface="Arial"/>
+        <a:buChar char="–"/>
+        <a:defRPr sz="2000" kern="1200">
+          <a:solidFill>
+            <a:schemeClr val="tx1"/>
+          </a:solidFill>
+          <a:latin typeface="+mn-lt"/>
+          <a:ea typeface="+mn-ea"/>
+          <a:cs typeface="+mn-cs"/>
+        </a:defRPr>
+      </a:lvl4pPr>
+      <a:lvl5pPr marL="2057400" indent="-228600" algn="l" defTabSz="457200" rtl="0" eaLnBrk="1" latinLnBrk="0" hangingPunct="1">
+        <a:spcBef>
+          <a:spcPct val="20000"/>
+        </a:spcBef>
+        <a:buFont typeface="Arial"/>
+        <a:buChar char="»"/>
+        <a:defRPr sz="2000" kern="1200">
+          <a:solidFill>
+            <a:schemeClr val="tx1"/>
+          </a:solidFill>
+          <a:latin typeface="+mn-lt"/>
+          <a:ea typeface="+mn-ea"/>
+          <a:cs typeface="+mn-cs"/>
+        </a:defRPr>
+      </a:lvl5pPr>
+      <a:lvl6pPr marL="2514600" indent="-228600" algn="l" defTabSz="457200" rtl="0" eaLnBrk="1" latinLnBrk="0" hangingPunct="1">
+        <a:spcBef>
+          <a:spcPct val="20000"/>
+        </a:spcBef>
+        <a:buFont typeface="Arial"/>
         <a:buChar char="•"/>
         <a:defRPr sz="2000" kern="1200">
           <a:solidFill>
@@ -3125,71 +2948,14 @@
           <a:ea typeface="+mn-ea"/>
           <a:cs typeface="+mn-cs"/>
         </a:defRPr>
-      </a:lvl3pPr>
-      <a:lvl4pPr marL="1600200" indent="-228600" algn="l" defTabSz="914400" rtl="0" eaLnBrk="1" latinLnBrk="0" hangingPunct="1">
-        <a:lnSpc>
-          <a:spcPct val="90000"/>
-        </a:lnSpc>
+      </a:lvl6pPr>
+      <a:lvl7pPr marL="2971800" indent="-228600" algn="l" defTabSz="457200" rtl="0" eaLnBrk="1" latinLnBrk="0" hangingPunct="1">
         <a:spcBef>
-          <a:spcPts val="500"/>
+          <a:spcPct val="20000"/>
         </a:spcBef>
-        <a:buFont typeface="Arial" panose="020B0604020202020204" pitchFamily="34" charset="0"/>
+        <a:buFont typeface="Arial"/>
         <a:buChar char="•"/>
-        <a:defRPr sz="1800" kern="1200">
-          <a:solidFill>
-            <a:schemeClr val="tx1"/>
-          </a:solidFill>
-          <a:latin typeface="+mn-lt"/>
-          <a:ea typeface="+mn-ea"/>
-          <a:cs typeface="+mn-cs"/>
-        </a:defRPr>
-      </a:lvl4pPr>
-      <a:lvl5pPr marL="2057400" indent="-228600" algn="l" defTabSz="914400" rtl="0" eaLnBrk="1" latinLnBrk="0" hangingPunct="1">
-        <a:lnSpc>
-          <a:spcPct val="90000"/>
-        </a:lnSpc>
-        <a:spcBef>
-          <a:spcPts val="500"/>
-        </a:spcBef>
-        <a:buFont typeface="Arial" panose="020B0604020202020204" pitchFamily="34" charset="0"/>
-        <a:buChar char="•"/>
-        <a:defRPr sz="1800" kern="1200">
-          <a:solidFill>
-            <a:schemeClr val="tx1"/>
-          </a:solidFill>
-          <a:latin typeface="+mn-lt"/>
-          <a:ea typeface="+mn-ea"/>
-          <a:cs typeface="+mn-cs"/>
-        </a:defRPr>
-      </a:lvl5pPr>
-      <a:lvl6pPr marL="2514600" indent="-228600" algn="l" defTabSz="914400" rtl="0" eaLnBrk="1" latinLnBrk="0" hangingPunct="1">
-        <a:lnSpc>
-          <a:spcPct val="90000"/>
-        </a:lnSpc>
-        <a:spcBef>
-          <a:spcPts val="500"/>
-        </a:spcBef>
-        <a:buFont typeface="Arial" panose="020B0604020202020204" pitchFamily="34" charset="0"/>
-        <a:buChar char="•"/>
-        <a:defRPr sz="1800" kern="1200">
-          <a:solidFill>
-            <a:schemeClr val="tx1"/>
-          </a:solidFill>
-          <a:latin typeface="+mn-lt"/>
-          <a:ea typeface="+mn-ea"/>
-          <a:cs typeface="+mn-cs"/>
-        </a:defRPr>
-      </a:lvl6pPr>
-      <a:lvl7pPr marL="2971800" indent="-228600" algn="l" defTabSz="914400" rtl="0" eaLnBrk="1" latinLnBrk="0" hangingPunct="1">
-        <a:lnSpc>
-          <a:spcPct val="90000"/>
-        </a:lnSpc>
-        <a:spcBef>
-          <a:spcPts val="500"/>
-        </a:spcBef>
-        <a:buFont typeface="Arial" panose="020B0604020202020204" pitchFamily="34" charset="0"/>
-        <a:buChar char="•"/>
-        <a:defRPr sz="1800" kern="1200">
+        <a:defRPr sz="2000" kern="1200">
           <a:solidFill>
             <a:schemeClr val="tx1"/>
           </a:solidFill>
@@ -3198,16 +2964,13 @@
           <a:cs typeface="+mn-cs"/>
         </a:defRPr>
       </a:lvl7pPr>
-      <a:lvl8pPr marL="3429000" indent="-228600" algn="l" defTabSz="914400" rtl="0" eaLnBrk="1" latinLnBrk="0" hangingPunct="1">
-        <a:lnSpc>
-          <a:spcPct val="90000"/>
-        </a:lnSpc>
+      <a:lvl8pPr marL="3429000" indent="-228600" algn="l" defTabSz="457200" rtl="0" eaLnBrk="1" latinLnBrk="0" hangingPunct="1">
         <a:spcBef>
-          <a:spcPts val="500"/>
+          <a:spcPct val="20000"/>
         </a:spcBef>
-        <a:buFont typeface="Arial" panose="020B0604020202020204" pitchFamily="34" charset="0"/>
+        <a:buFont typeface="Arial"/>
         <a:buChar char="•"/>
-        <a:defRPr sz="1800" kern="1200">
+        <a:defRPr sz="2000" kern="1200">
           <a:solidFill>
             <a:schemeClr val="tx1"/>
           </a:solidFill>
@@ -3216,16 +2979,13 @@
           <a:cs typeface="+mn-cs"/>
         </a:defRPr>
       </a:lvl8pPr>
-      <a:lvl9pPr marL="3886200" indent="-228600" algn="l" defTabSz="914400" rtl="0" eaLnBrk="1" latinLnBrk="0" hangingPunct="1">
-        <a:lnSpc>
-          <a:spcPct val="90000"/>
-        </a:lnSpc>
+      <a:lvl9pPr marL="3886200" indent="-228600" algn="l" defTabSz="457200" rtl="0" eaLnBrk="1" latinLnBrk="0" hangingPunct="1">
         <a:spcBef>
-          <a:spcPts val="500"/>
+          <a:spcPct val="20000"/>
         </a:spcBef>
-        <a:buFont typeface="Arial" panose="020B0604020202020204" pitchFamily="34" charset="0"/>
+        <a:buFont typeface="Arial"/>
         <a:buChar char="•"/>
-        <a:defRPr sz="1800" kern="1200">
+        <a:defRPr sz="2000" kern="1200">
           <a:solidFill>
             <a:schemeClr val="tx1"/>
           </a:solidFill>
@@ -3239,7 +2999,7 @@
       <a:defPPr>
         <a:defRPr lang="en-US"/>
       </a:defPPr>
-      <a:lvl1pPr marL="0" algn="l" defTabSz="914400" rtl="0" eaLnBrk="1" latinLnBrk="0" hangingPunct="1">
+      <a:lvl1pPr marL="0" algn="l" defTabSz="457200" rtl="0" eaLnBrk="1" latinLnBrk="0" hangingPunct="1">
         <a:defRPr sz="1800" kern="1200">
           <a:solidFill>
             <a:schemeClr val="tx1"/>
@@ -3249,7 +3009,7 @@
           <a:cs typeface="+mn-cs"/>
         </a:defRPr>
       </a:lvl1pPr>
-      <a:lvl2pPr marL="457200" algn="l" defTabSz="914400" rtl="0" eaLnBrk="1" latinLnBrk="0" hangingPunct="1">
+      <a:lvl2pPr marL="457200" algn="l" defTabSz="457200" rtl="0" eaLnBrk="1" latinLnBrk="0" hangingPunct="1">
         <a:defRPr sz="1800" kern="1200">
           <a:solidFill>
             <a:schemeClr val="tx1"/>
@@ -3259,7 +3019,7 @@
           <a:cs typeface="+mn-cs"/>
         </a:defRPr>
       </a:lvl2pPr>
-      <a:lvl3pPr marL="914400" algn="l" defTabSz="914400" rtl="0" eaLnBrk="1" latinLnBrk="0" hangingPunct="1">
+      <a:lvl3pPr marL="914400" algn="l" defTabSz="457200" rtl="0" eaLnBrk="1" latinLnBrk="0" hangingPunct="1">
         <a:defRPr sz="1800" kern="1200">
           <a:solidFill>
             <a:schemeClr val="tx1"/>
@@ -3269,7 +3029,7 @@
           <a:cs typeface="+mn-cs"/>
         </a:defRPr>
       </a:lvl3pPr>
-      <a:lvl4pPr marL="1371600" algn="l" defTabSz="914400" rtl="0" eaLnBrk="1" latinLnBrk="0" hangingPunct="1">
+      <a:lvl4pPr marL="1371600" algn="l" defTabSz="457200" rtl="0" eaLnBrk="1" latinLnBrk="0" hangingPunct="1">
         <a:defRPr sz="1800" kern="1200">
           <a:solidFill>
             <a:schemeClr val="tx1"/>
@@ -3279,7 +3039,7 @@
           <a:cs typeface="+mn-cs"/>
         </a:defRPr>
       </a:lvl4pPr>
-      <a:lvl5pPr marL="1828800" algn="l" defTabSz="914400" rtl="0" eaLnBrk="1" latinLnBrk="0" hangingPunct="1">
+      <a:lvl5pPr marL="1828800" algn="l" defTabSz="457200" rtl="0" eaLnBrk="1" latinLnBrk="0" hangingPunct="1">
         <a:defRPr sz="1800" kern="1200">
           <a:solidFill>
             <a:schemeClr val="tx1"/>
@@ -3289,7 +3049,7 @@
           <a:cs typeface="+mn-cs"/>
         </a:defRPr>
       </a:lvl5pPr>
-      <a:lvl6pPr marL="2286000" algn="l" defTabSz="914400" rtl="0" eaLnBrk="1" latinLnBrk="0" hangingPunct="1">
+      <a:lvl6pPr marL="2286000" algn="l" defTabSz="457200" rtl="0" eaLnBrk="1" latinLnBrk="0" hangingPunct="1">
         <a:defRPr sz="1800" kern="1200">
           <a:solidFill>
             <a:schemeClr val="tx1"/>
@@ -3299,7 +3059,7 @@
           <a:cs typeface="+mn-cs"/>
         </a:defRPr>
       </a:lvl6pPr>
-      <a:lvl7pPr marL="2743200" algn="l" defTabSz="914400" rtl="0" eaLnBrk="1" latinLnBrk="0" hangingPunct="1">
+      <a:lvl7pPr marL="2743200" algn="l" defTabSz="457200" rtl="0" eaLnBrk="1" latinLnBrk="0" hangingPunct="1">
         <a:defRPr sz="1800" kern="1200">
           <a:solidFill>
             <a:schemeClr val="tx1"/>
@@ -3309,7 +3069,7 @@
           <a:cs typeface="+mn-cs"/>
         </a:defRPr>
       </a:lvl7pPr>
-      <a:lvl8pPr marL="3200400" algn="l" defTabSz="914400" rtl="0" eaLnBrk="1" latinLnBrk="0" hangingPunct="1">
+      <a:lvl8pPr marL="3200400" algn="l" defTabSz="457200" rtl="0" eaLnBrk="1" latinLnBrk="0" hangingPunct="1">
         <a:defRPr sz="1800" kern="1200">
           <a:solidFill>
             <a:schemeClr val="tx1"/>
@@ -3319,7 +3079,7 @@
           <a:cs typeface="+mn-cs"/>
         </a:defRPr>
       </a:lvl8pPr>
-      <a:lvl9pPr marL="3657600" algn="l" defTabSz="914400" rtl="0" eaLnBrk="1" latinLnBrk="0" hangingPunct="1">
+      <a:lvl9pPr marL="3657600" algn="l" defTabSz="457200" rtl="0" eaLnBrk="1" latinLnBrk="0" hangingPunct="1">
         <a:defRPr sz="1800" kern="1200">
           <a:solidFill>
             <a:schemeClr val="tx1"/>
@@ -3353,154 +3113,51 @@
       </p:grpSpPr>
       <p:sp>
         <p:nvSpPr>
-          <p:cNvPr id="5" name="TextBox 4">
-            <a:extLst>
-              <a:ext uri="{FF2B5EF4-FFF2-40B4-BE49-F238E27FC236}">
-                <a16:creationId xmlns:a16="http://schemas.microsoft.com/office/drawing/2014/main" id="{6299E1F4-C76E-49D1-8E32-1834F2864FF3}"/>
-              </a:ext>
-            </a:extLst>
-          </p:cNvPr>
-          <p:cNvSpPr txBox="1"/>
-          <p:nvPr/>
+          <p:cNvPr id="2" name="Title 1"/>
+          <p:cNvSpPr>
+            <a:spLocks noGrp="1"/>
+          </p:cNvSpPr>
+          <p:nvPr>
+            <p:ph type="ctrTitle"/>
+          </p:nvPr>
         </p:nvSpPr>
-        <p:spPr>
-          <a:xfrm>
-            <a:off x="1435306" y="1250036"/>
-            <a:ext cx="9038730" cy="3477875"/>
-          </a:xfrm>
-          <a:prstGeom prst="rect">
-            <a:avLst/>
-          </a:prstGeom>
-          <a:noFill/>
-        </p:spPr>
+        <p:spPr/>
         <p:txBody>
-          <a:bodyPr wrap="square">
-            <a:spAutoFit/>
-          </a:bodyPr>
+          <a:bodyPr/>
           <a:lstStyle/>
           <a:p>
-            <a:pPr algn="l"/>
             <a:r>
-              <a:rPr lang="en-GB" sz="2000" b="0" i="0" u="none" strike="noStrike" baseline="0" dirty="0">
-                <a:solidFill>
-                  <a:srgbClr val="222222"/>
-                </a:solidFill>
-              </a:rPr>
-              <a:t>Slide 1: Title</a:t>
-            </a:r>
-          </a:p>
-          <a:p>
-            <a:pPr algn="l"/>
-            <a:r>
-              <a:rPr lang="en-GB" sz="2000" b="0" i="0" u="none" strike="noStrike" baseline="0" dirty="0">
-                <a:solidFill>
-                  <a:srgbClr val="222222"/>
-                </a:solidFill>
-              </a:rPr>
-              <a:t>• DevOps Migration Assessment</a:t>
-            </a:r>
-          </a:p>
-          <a:p>
-            <a:pPr algn="l"/>
-            <a:r>
-              <a:rPr lang="en-US" sz="2000" b="0" i="0" u="none" strike="noStrike" baseline="0" dirty="0">
-                <a:solidFill>
-                  <a:srgbClr val="222222"/>
-                </a:solidFill>
-              </a:rPr>
-              <a:t>• From Jenkins/Bamboo/GitLab to Azure DevOps</a:t>
-            </a:r>
-          </a:p>
-          <a:p>
-            <a:pPr algn="l"/>
-            <a:endParaRPr lang="en-GB" sz="2000" b="0" i="0" u="none" strike="noStrike" baseline="0" dirty="0">
-              <a:solidFill>
-                <a:srgbClr val="222222"/>
-              </a:solidFill>
-            </a:endParaRPr>
-          </a:p>
-          <a:p>
-            <a:pPr algn="l"/>
-            <a:r>
-              <a:rPr lang="en-GB" sz="2000" b="0" i="0" u="none" strike="noStrike" baseline="0" dirty="0">
-                <a:solidFill>
-                  <a:srgbClr val="222222"/>
-                </a:solidFill>
-              </a:rPr>
-              <a:t>Slide 2: Executive Summary</a:t>
-            </a:r>
-          </a:p>
-          <a:p>
-            <a:pPr algn="l"/>
-            <a:r>
-              <a:rPr lang="en-GB" sz="2000" b="0" i="0" u="none" strike="noStrike" baseline="0" dirty="0">
-                <a:solidFill>
-                  <a:srgbClr val="222222"/>
-                </a:solidFill>
-              </a:rPr>
-              <a:t>• Migration scope and objectives</a:t>
-            </a:r>
-          </a:p>
-          <a:p>
-            <a:pPr algn="l"/>
-            <a:r>
-              <a:rPr lang="en-GB" sz="2000" b="0" i="0" u="none" strike="noStrike" baseline="0" dirty="0">
-                <a:solidFill>
-                  <a:srgbClr val="222222"/>
-                </a:solidFill>
-              </a:rPr>
-              <a:t>• Key accomplishments</a:t>
-            </a:r>
-          </a:p>
-          <a:p>
-            <a:pPr algn="l"/>
-            <a:endParaRPr lang="en-GB" sz="2000" b="0" i="0" u="none" strike="noStrike" baseline="0" dirty="0">
-              <a:solidFill>
-                <a:srgbClr val="222222"/>
-              </a:solidFill>
-            </a:endParaRPr>
-          </a:p>
-          <a:p>
-            <a:pPr algn="l"/>
-            <a:r>
-              <a:rPr lang="en-GB" sz="2000" b="0" i="0" u="none" strike="noStrike" baseline="0" dirty="0">
-                <a:solidFill>
-                  <a:srgbClr val="222222"/>
-                </a:solidFill>
-              </a:rPr>
-              <a:t>Slide 3: Current State</a:t>
-            </a:r>
-          </a:p>
-          <a:p>
-            <a:pPr algn="l"/>
-            <a:r>
-              <a:rPr lang="en-GB" sz="2000" b="0" i="0" u="none" strike="noStrike" baseline="0" dirty="0">
-                <a:solidFill>
-                  <a:srgbClr val="222222"/>
-                </a:solidFill>
-              </a:rPr>
-              <a:t>• On-prem toolchain overview</a:t>
-            </a:r>
-          </a:p>
-          <a:p>
-            <a:pPr algn="l"/>
-            <a:r>
-              <a:rPr lang="en-GB" sz="2000" b="0" i="0" u="none" strike="noStrike" baseline="0" dirty="0">
-                <a:solidFill>
-                  <a:srgbClr val="222222"/>
-                </a:solidFill>
-              </a:rPr>
-              <a:t>• Challenges and pain points</a:t>
+              <a:t>DevOps Migration Assessment</a:t>
             </a:r>
           </a:p>
         </p:txBody>
       </p:sp>
+      <p:sp>
+        <p:nvSpPr>
+          <p:cNvPr id="5" name="Subtitle 4">
+            <a:extLst>
+              <a:ext uri="{FF2B5EF4-FFF2-40B4-BE49-F238E27FC236}">
+                <a16:creationId xmlns:a16="http://schemas.microsoft.com/office/drawing/2014/main" id="{907050A8-E15E-4A5B-90E8-BA9AC7D57B8E}"/>
+              </a:ext>
+            </a:extLst>
+          </p:cNvPr>
+          <p:cNvSpPr>
+            <a:spLocks noGrp="1"/>
+          </p:cNvSpPr>
+          <p:nvPr>
+            <p:ph type="subTitle" idx="1"/>
+          </p:nvPr>
+        </p:nvSpPr>
+        <p:spPr/>
+        <p:txBody>
+          <a:bodyPr/>
+          <a:lstStyle/>
+          <a:p>
+            <a:endParaRPr lang="en-GB"/>
+          </a:p>
+        </p:txBody>
+      </p:sp>
     </p:spTree>
-    <p:extLst>
-      <p:ext uri="{BB962C8B-B14F-4D97-AF65-F5344CB8AC3E}">
-        <p14:creationId xmlns:p14="http://schemas.microsoft.com/office/powerpoint/2010/main" val="3499460387"/>
-      </p:ext>
-    </p:extLst>
   </p:cSld>
   <p:clrMapOvr>
     <a:masterClrMapping/>
@@ -3527,20 +3184,35 @@
       </p:grpSpPr>
       <p:sp>
         <p:nvSpPr>
-          <p:cNvPr id="3" name="TextBox 2">
-            <a:extLst>
-              <a:ext uri="{FF2B5EF4-FFF2-40B4-BE49-F238E27FC236}">
-                <a16:creationId xmlns:a16="http://schemas.microsoft.com/office/drawing/2014/main" id="{4BE9DA39-F863-420F-ACC4-81E3A2429916}"/>
-              </a:ext>
-            </a:extLst>
-          </p:cNvPr>
+          <p:cNvPr id="2" name="Title 1"/>
+          <p:cNvSpPr>
+            <a:spLocks noGrp="1"/>
+          </p:cNvSpPr>
+          <p:nvPr>
+            <p:ph type="title"/>
+          </p:nvPr>
+        </p:nvSpPr>
+        <p:spPr/>
+        <p:txBody>
+          <a:bodyPr/>
+          <a:lstStyle/>
+          <a:p>
+            <a:r>
+              <a:t>Infrastructure as Code</a:t>
+            </a:r>
+          </a:p>
+        </p:txBody>
+      </p:sp>
+      <p:sp>
+        <p:nvSpPr>
+          <p:cNvPr id="3" name="TextBox 2"/>
           <p:cNvSpPr txBox="1"/>
           <p:nvPr/>
         </p:nvSpPr>
         <p:spPr>
           <a:xfrm>
-            <a:off x="1725880" y="1411047"/>
-            <a:ext cx="8740239" cy="4093428"/>
+            <a:off x="685800" y="1752600"/>
+            <a:ext cx="7772400" cy="4572000"/>
           </a:xfrm>
           <a:prstGeom prst="rect">
             <a:avLst/>
@@ -3548,156 +3220,22 @@
           <a:noFill/>
         </p:spPr>
         <p:txBody>
-          <a:bodyPr wrap="square">
+          <a:bodyPr wrap="none">
             <a:spAutoFit/>
           </a:bodyPr>
           <a:lstStyle/>
           <a:p>
-            <a:pPr algn="l"/>
+            <a:pPr>
+              <a:defRPr sz="2200"/>
+            </a:pPr>
             <a:r>
-              <a:rPr lang="en-GB" sz="2000" b="0" i="0" u="none" strike="noStrike" baseline="0" dirty="0">
-                <a:solidFill>
-                  <a:srgbClr val="222222"/>
-                </a:solidFill>
-              </a:rPr>
-              <a:t>Quick Start</a:t>
+              <a:rPr dirty="0"/>
+              <a:t>• Bicep/Terraform, repeatable environments, DRY modules</a:t>
             </a:r>
-          </a:p>
-          <a:p>
-            <a:pPr algn="l"/>
-            <a:r>
-              <a:rPr lang="en-GB" sz="2000" b="0" i="0" u="none" strike="noStrike" baseline="0" dirty="0">
-                <a:solidFill>
-                  <a:srgbClr val="222222"/>
-                </a:solidFill>
-              </a:rPr>
-              <a:t>1. Clone repositories</a:t>
-            </a:r>
-          </a:p>
-          <a:p>
-            <a:pPr algn="l"/>
-            <a:r>
-              <a:rPr lang="en-GB" sz="2000" b="0" i="0" u="none" strike="noStrike" baseline="0" dirty="0">
-                <a:solidFill>
-                  <a:srgbClr val="222222"/>
-                </a:solidFill>
-              </a:rPr>
-              <a:t>2. Setup Azure infrastructure</a:t>
-            </a:r>
-          </a:p>
-          <a:p>
-            <a:pPr algn="l"/>
-            <a:r>
-              <a:rPr lang="en-GB" sz="2000" b="0" i="0" u="none" strike="noStrike" baseline="0" dirty="0">
-                <a:solidFill>
-                  <a:srgbClr val="222222"/>
-                </a:solidFill>
-              </a:rPr>
-              <a:t>3. Configure self-hosted agent</a:t>
-            </a:r>
-          </a:p>
-          <a:p>
-            <a:pPr algn="l"/>
-            <a:r>
-              <a:rPr lang="en-US" sz="2000" b="0" i="0" u="none" strike="noStrike" baseline="0" dirty="0">
-                <a:solidFill>
-                  <a:srgbClr val="222222"/>
-                </a:solidFill>
-              </a:rPr>
-              <a:t>4. Run Azure DevOps pipeline</a:t>
-            </a:r>
-          </a:p>
-          <a:p>
-            <a:pPr algn="l"/>
-            <a:r>
-              <a:rPr lang="en-GB" sz="2000" b="0" i="0" u="none" strike="noStrike" baseline="0" dirty="0">
-                <a:solidFill>
-                  <a:srgbClr val="222222"/>
-                </a:solidFill>
-              </a:rPr>
-              <a:t>5. Validate deployment</a:t>
-            </a:r>
-          </a:p>
-          <a:p>
-            <a:pPr algn="l"/>
-            <a:endParaRPr lang="en-GB" sz="2000" b="0" i="0" u="none" strike="noStrike" baseline="0" dirty="0">
-              <a:solidFill>
-                <a:srgbClr val="222222"/>
-              </a:solidFill>
-            </a:endParaRPr>
-          </a:p>
-          <a:p>
-            <a:pPr algn="l"/>
-            <a:endParaRPr lang="en-GB" sz="2000" dirty="0">
-              <a:solidFill>
-                <a:srgbClr val="222222"/>
-              </a:solidFill>
-            </a:endParaRPr>
-          </a:p>
-          <a:p>
-            <a:pPr algn="l"/>
-            <a:r>
-              <a:rPr lang="en-GB" sz="2000" b="0" i="0" u="none" strike="noStrike" baseline="0" dirty="0">
-                <a:solidFill>
-                  <a:srgbClr val="222222"/>
-                </a:solidFill>
-              </a:rPr>
-              <a:t>Prerequisites</a:t>
-            </a:r>
-          </a:p>
-          <a:p>
-            <a:pPr algn="l"/>
-            <a:r>
-              <a:rPr lang="en-GB" sz="2000" b="0" i="0" u="none" strike="noStrike" baseline="0" dirty="0">
-                <a:solidFill>
-                  <a:srgbClr val="222222"/>
-                </a:solidFill>
-              </a:rPr>
-              <a:t>- Azure subscription</a:t>
-            </a:r>
-          </a:p>
-          <a:p>
-            <a:pPr algn="l"/>
-            <a:r>
-              <a:rPr lang="en-GB" sz="2000" b="0" i="0" u="none" strike="noStrike" baseline="0" dirty="0">
-                <a:solidFill>
-                  <a:srgbClr val="222222"/>
-                </a:solidFill>
-              </a:rPr>
-              <a:t>- Azure DevOps organization</a:t>
-            </a:r>
-          </a:p>
-          <a:p>
-            <a:pPr algn="l"/>
-            <a:r>
-              <a:rPr lang="en-GB" sz="2000" b="0" i="0" u="none" strike="noStrike" baseline="0" dirty="0">
-                <a:solidFill>
-                  <a:srgbClr val="222222"/>
-                </a:solidFill>
-              </a:rPr>
-              <a:t>- GitHub account</a:t>
-            </a:r>
-          </a:p>
-          <a:p>
-            <a:pPr algn="l"/>
-            <a:r>
-              <a:rPr lang="en-GB" sz="2000" b="0" i="0" u="none" strike="noStrike" baseline="0" dirty="0">
-                <a:solidFill>
-                  <a:srgbClr val="222222"/>
-                </a:solidFill>
-              </a:rPr>
-              <a:t>- Local Docker environment</a:t>
-            </a:r>
-            <a:endParaRPr lang="en-GB" sz="2000" dirty="0"/>
           </a:p>
         </p:txBody>
       </p:sp>
     </p:spTree>
-    <p:extLst>
-      <p:ext uri="{BB962C8B-B14F-4D97-AF65-F5344CB8AC3E}">
-        <p14:creationId xmlns:p14="http://schemas.microsoft.com/office/powerpoint/2010/main" val="3311562595"/>
-      </p:ext>
-    </p:extLst>
   </p:cSld>
   <p:clrMapOvr>
     <a:masterClrMapping/>
@@ -3705,7 +3243,7 @@
 </p:sld>
 </file>
 
-<file path=ppt/slides/slide2.xml><?xml version="1.0" encoding="utf-8"?>
+<file path=ppt/slides/slide11.xml><?xml version="1.0" encoding="utf-8"?>
 <p:sld xmlns:a="http://schemas.openxmlformats.org/drawingml/2006/main" xmlns:r="http://schemas.openxmlformats.org/officeDocument/2006/relationships" xmlns:p="http://schemas.openxmlformats.org/presentationml/2006/main">
   <p:cSld>
     <p:spTree>
@@ -3724,20 +3262,35 @@
       </p:grpSpPr>
       <p:sp>
         <p:nvSpPr>
-          <p:cNvPr id="5" name="TextBox 4">
-            <a:extLst>
-              <a:ext uri="{FF2B5EF4-FFF2-40B4-BE49-F238E27FC236}">
-                <a16:creationId xmlns:a16="http://schemas.microsoft.com/office/drawing/2014/main" id="{2CF007C7-575C-41A8-926B-DA42C758FE48}"/>
-              </a:ext>
-            </a:extLst>
-          </p:cNvPr>
+          <p:cNvPr id="2" name="Title 1"/>
+          <p:cNvSpPr>
+            <a:spLocks noGrp="1"/>
+          </p:cNvSpPr>
+          <p:nvPr>
+            <p:ph type="title"/>
+          </p:nvPr>
+        </p:nvSpPr>
+        <p:spPr/>
+        <p:txBody>
+          <a:bodyPr/>
+          <a:lstStyle/>
+          <a:p>
+            <a:r>
+              <a:t>CI/CD Pipeline</a:t>
+            </a:r>
+          </a:p>
+        </p:txBody>
+      </p:sp>
+      <p:sp>
+        <p:nvSpPr>
+          <p:cNvPr id="3" name="TextBox 2"/>
           <p:cNvSpPr txBox="1"/>
           <p:nvPr/>
         </p:nvSpPr>
         <p:spPr>
           <a:xfrm>
-            <a:off x="1733550" y="977889"/>
-            <a:ext cx="8633608" cy="4401205"/>
+            <a:off x="640080" y="1701800"/>
+            <a:ext cx="7772400" cy="4572000"/>
           </a:xfrm>
           <a:prstGeom prst="rect">
             <a:avLst/>
@@ -3745,179 +3298,22 @@
           <a:noFill/>
         </p:spPr>
         <p:txBody>
-          <a:bodyPr wrap="square">
+          <a:bodyPr wrap="none">
             <a:spAutoFit/>
           </a:bodyPr>
           <a:lstStyle/>
           <a:p>
-            <a:pPr algn="l"/>
+            <a:pPr>
+              <a:defRPr sz="2200"/>
+            </a:pPr>
             <a:r>
-              <a:rPr lang="en-GB" sz="2000" b="0" i="0" u="none" strike="noStrike" baseline="0" dirty="0">
-                <a:solidFill>
-                  <a:srgbClr val="222222"/>
-                </a:solidFill>
-              </a:rPr>
-              <a:t>Slide 4: Target Architecture</a:t>
-            </a:r>
-          </a:p>
-          <a:p>
-            <a:pPr algn="l"/>
-            <a:r>
-              <a:rPr lang="en-GB" sz="2000" b="0" i="0" u="none" strike="noStrike" baseline="0" dirty="0">
-                <a:solidFill>
-                  <a:srgbClr val="222222"/>
-                </a:solidFill>
-              </a:rPr>
-              <a:t>• Azure DevOps Services</a:t>
-            </a:r>
-          </a:p>
-          <a:p>
-            <a:pPr algn="l"/>
-            <a:r>
-              <a:rPr lang="en-GB" sz="2000" b="0" i="0" u="none" strike="noStrike" baseline="0" dirty="0">
-                <a:solidFill>
-                  <a:srgbClr val="222222"/>
-                </a:solidFill>
-              </a:rPr>
-              <a:t>• Azure Container Apps</a:t>
-            </a:r>
-          </a:p>
-          <a:p>
-            <a:pPr algn="l"/>
-            <a:r>
-              <a:rPr lang="en-GB" sz="2000" b="0" i="0" u="none" strike="noStrike" baseline="0" dirty="0">
-                <a:solidFill>
-                  <a:srgbClr val="222222"/>
-                </a:solidFill>
-              </a:rPr>
-              <a:t>• Jira Cloud integration</a:t>
-            </a:r>
-          </a:p>
-          <a:p>
-            <a:pPr algn="l"/>
-            <a:endParaRPr lang="en-GB" sz="2000" b="0" i="0" u="none" strike="noStrike" baseline="0" dirty="0">
-              <a:solidFill>
-                <a:srgbClr val="222222"/>
-              </a:solidFill>
-            </a:endParaRPr>
-          </a:p>
-          <a:p>
-            <a:pPr algn="l"/>
-            <a:r>
-              <a:rPr lang="en-GB" sz="2000" b="0" i="0" u="none" strike="noStrike" baseline="0" dirty="0">
-                <a:solidFill>
-                  <a:srgbClr val="222222"/>
-                </a:solidFill>
-              </a:rPr>
-              <a:t>Slide 5: Migration Approach</a:t>
-            </a:r>
-          </a:p>
-          <a:p>
-            <a:pPr algn="l"/>
-            <a:r>
-              <a:rPr lang="en-GB" sz="2000" b="0" i="0" u="none" strike="noStrike" baseline="0" dirty="0">
-                <a:solidFill>
-                  <a:srgbClr val="222222"/>
-                </a:solidFill>
-              </a:rPr>
-              <a:t>• Phased migration strategy</a:t>
-            </a:r>
-          </a:p>
-          <a:p>
-            <a:pPr algn="l"/>
-            <a:r>
-              <a:rPr lang="en-GB" sz="2000" b="0" i="0" u="none" strike="noStrike" baseline="0" dirty="0">
-                <a:solidFill>
-                  <a:srgbClr val="222222"/>
-                </a:solidFill>
-              </a:rPr>
-              <a:t>• Migration factory pattern</a:t>
-            </a:r>
-          </a:p>
-          <a:p>
-            <a:pPr algn="l"/>
-            <a:r>
-              <a:rPr lang="en-GB" sz="2000" b="0" i="0" u="none" strike="noStrike" baseline="0" dirty="0">
-                <a:solidFill>
-                  <a:srgbClr val="222222"/>
-                </a:solidFill>
-              </a:rPr>
-              <a:t>• Reusable templates</a:t>
-            </a:r>
-          </a:p>
-          <a:p>
-            <a:pPr algn="l"/>
-            <a:endParaRPr lang="en-GB" sz="2000" b="0" i="0" u="none" strike="noStrike" baseline="0" dirty="0">
-              <a:solidFill>
-                <a:srgbClr val="222222"/>
-              </a:solidFill>
-            </a:endParaRPr>
-          </a:p>
-          <a:p>
-            <a:pPr algn="l"/>
-            <a:r>
-              <a:rPr lang="en-GB" sz="2000" b="0" i="0" u="none" strike="noStrike" baseline="0" dirty="0">
-                <a:solidFill>
-                  <a:srgbClr val="222222"/>
-                </a:solidFill>
-              </a:rPr>
-              <a:t>Slide 6: Application Containerization</a:t>
-            </a:r>
-          </a:p>
-          <a:p>
-            <a:pPr algn="l"/>
-            <a:r>
-              <a:rPr lang="en-GB" sz="2000" b="0" i="0" u="none" strike="noStrike" baseline="0" dirty="0">
-                <a:solidFill>
-                  <a:srgbClr val="222222"/>
-                </a:solidFill>
-              </a:rPr>
-              <a:t>• Multi-stage </a:t>
-            </a:r>
-            <a:r>
-              <a:rPr lang="en-GB" sz="2000" b="0" i="0" u="none" strike="noStrike" baseline="0" dirty="0" err="1">
-                <a:solidFill>
-                  <a:srgbClr val="222222"/>
-                </a:solidFill>
-              </a:rPr>
-              <a:t>Dockerfile</a:t>
-            </a:r>
-            <a:endParaRPr lang="en-GB" sz="2000" b="0" i="0" u="none" strike="noStrike" baseline="0" dirty="0">
-              <a:solidFill>
-                <a:srgbClr val="222222"/>
-              </a:solidFill>
-            </a:endParaRPr>
-          </a:p>
-          <a:p>
-            <a:pPr algn="l"/>
-            <a:r>
-              <a:rPr lang="en-GB" sz="2000" b="0" i="0" u="none" strike="noStrike" baseline="0" dirty="0">
-                <a:solidFill>
-                  <a:srgbClr val="222222"/>
-                </a:solidFill>
-              </a:rPr>
-              <a:t>• Docker Compose setup</a:t>
-            </a:r>
-          </a:p>
-          <a:p>
-            <a:pPr algn="l"/>
-            <a:r>
-              <a:rPr lang="en-GB" sz="2000" b="0" i="0" u="none" strike="noStrike" baseline="0" dirty="0">
-                <a:solidFill>
-                  <a:srgbClr val="222222"/>
-                </a:solidFill>
-              </a:rPr>
-              <a:t>• Health checks and monitoring</a:t>
+              <a:rPr dirty="0"/>
+              <a:t>• Build, Test, Scan, Publish, Deploy, Validate</a:t>
             </a:r>
           </a:p>
         </p:txBody>
       </p:sp>
     </p:spTree>
-    <p:extLst>
-      <p:ext uri="{BB962C8B-B14F-4D97-AF65-F5344CB8AC3E}">
-        <p14:creationId xmlns:p14="http://schemas.microsoft.com/office/powerpoint/2010/main" val="923005813"/>
-      </p:ext>
-    </p:extLst>
   </p:cSld>
   <p:clrMapOvr>
     <a:masterClrMapping/>
@@ -3925,7 +3321,7 @@
 </p:sld>
 </file>
 
-<file path=ppt/slides/slide3.xml><?xml version="1.0" encoding="utf-8"?>
+<file path=ppt/slides/slide12.xml><?xml version="1.0" encoding="utf-8"?>
 <p:sld xmlns:a="http://schemas.openxmlformats.org/drawingml/2006/main" xmlns:r="http://schemas.openxmlformats.org/officeDocument/2006/relationships" xmlns:p="http://schemas.openxmlformats.org/presentationml/2006/main">
   <p:cSld>
     <p:spTree>
@@ -3944,20 +3340,35 @@
       </p:grpSpPr>
       <p:sp>
         <p:nvSpPr>
-          <p:cNvPr id="5" name="TextBox 4">
-            <a:extLst>
-              <a:ext uri="{FF2B5EF4-FFF2-40B4-BE49-F238E27FC236}">
-                <a16:creationId xmlns:a16="http://schemas.microsoft.com/office/drawing/2014/main" id="{D3F66C49-16D6-4B7C-8C5E-CB9757AEABEC}"/>
-              </a:ext>
-            </a:extLst>
-          </p:cNvPr>
+          <p:cNvPr id="2" name="Title 1"/>
+          <p:cNvSpPr>
+            <a:spLocks noGrp="1"/>
+          </p:cNvSpPr>
+          <p:nvPr>
+            <p:ph type="title"/>
+          </p:nvPr>
+        </p:nvSpPr>
+        <p:spPr/>
+        <p:txBody>
+          <a:bodyPr/>
+          <a:lstStyle/>
+          <a:p>
+            <a:r>
+              <a:t>Security &amp; Compliance</a:t>
+            </a:r>
+          </a:p>
+        </p:txBody>
+      </p:sp>
+      <p:sp>
+        <p:nvSpPr>
+          <p:cNvPr id="3" name="TextBox 2"/>
           <p:cNvSpPr txBox="1"/>
           <p:nvPr/>
         </p:nvSpPr>
         <p:spPr>
           <a:xfrm>
-            <a:off x="2050597" y="1005568"/>
-            <a:ext cx="7687170" cy="5016758"/>
+            <a:off x="685800" y="1676400"/>
+            <a:ext cx="7772400" cy="4572000"/>
           </a:xfrm>
           <a:prstGeom prst="rect">
             <a:avLst/>
@@ -3965,188 +3376,21 @@
           <a:noFill/>
         </p:spPr>
         <p:txBody>
-          <a:bodyPr wrap="square">
+          <a:bodyPr wrap="none">
             <a:spAutoFit/>
           </a:bodyPr>
           <a:lstStyle/>
           <a:p>
-            <a:pPr algn="l"/>
+            <a:pPr>
+              <a:defRPr sz="2200"/>
+            </a:pPr>
             <a:r>
-              <a:rPr lang="fr-FR" sz="2000" b="0" i="0" u="none" strike="noStrike" baseline="0" dirty="0">
-                <a:solidFill>
-                  <a:srgbClr val="222222"/>
-                </a:solidFill>
-              </a:rPr>
-              <a:t>Slide 7: Infrastructure as Code</a:t>
-            </a:r>
-          </a:p>
-          <a:p>
-            <a:pPr algn="l"/>
-            <a:r>
-              <a:rPr lang="en-GB" sz="2000" b="0" i="0" u="none" strike="noStrike" baseline="0" dirty="0">
-                <a:solidFill>
-                  <a:srgbClr val="222222"/>
-                </a:solidFill>
-              </a:rPr>
-              <a:t>• Bicep/Terraform templates</a:t>
-            </a:r>
-          </a:p>
-          <a:p>
-            <a:pPr algn="l"/>
-            <a:r>
-              <a:rPr lang="en-GB" sz="2000" b="0" i="0" u="none" strike="noStrike" baseline="0" dirty="0">
-                <a:solidFill>
-                  <a:srgbClr val="222222"/>
-                </a:solidFill>
-              </a:rPr>
-              <a:t>• Key resources provisioned</a:t>
-            </a:r>
-          </a:p>
-          <a:p>
-            <a:pPr algn="l"/>
-            <a:r>
-              <a:rPr lang="en-GB" sz="2000" b="0" i="0" u="none" strike="noStrike" baseline="0" dirty="0">
-                <a:solidFill>
-                  <a:srgbClr val="222222"/>
-                </a:solidFill>
-              </a:rPr>
-              <a:t>• Environment repeatability</a:t>
-            </a:r>
-          </a:p>
-          <a:p>
-            <a:pPr algn="l"/>
-            <a:endParaRPr lang="it-IT" sz="2000" b="0" i="0" u="none" strike="noStrike" baseline="0" dirty="0">
-              <a:solidFill>
-                <a:srgbClr val="222222"/>
-              </a:solidFill>
-            </a:endParaRPr>
-          </a:p>
-          <a:p>
-            <a:pPr algn="l"/>
-            <a:r>
-              <a:rPr lang="it-IT" sz="2000" b="0" i="0" u="none" strike="noStrike" baseline="0" dirty="0">
-                <a:solidFill>
-                  <a:srgbClr val="222222"/>
-                </a:solidFill>
-              </a:rPr>
-              <a:t>Slide 8: CI/CD Pipeline</a:t>
-            </a:r>
-          </a:p>
-          <a:p>
-            <a:pPr algn="l"/>
-            <a:r>
-              <a:rPr lang="en-GB" sz="2000" b="0" i="0" u="none" strike="noStrike" baseline="0" dirty="0">
-                <a:solidFill>
-                  <a:srgbClr val="222222"/>
-                </a:solidFill>
-              </a:rPr>
-              <a:t>• Azure DevOps YAML pipeline</a:t>
-            </a:r>
-          </a:p>
-          <a:p>
-            <a:pPr algn="l"/>
-            <a:r>
-              <a:rPr lang="en-GB" sz="2000" b="0" i="0" u="none" strike="noStrike" baseline="0" dirty="0">
-                <a:solidFill>
-                  <a:srgbClr val="222222"/>
-                </a:solidFill>
-              </a:rPr>
-              <a:t>• Reusable templates</a:t>
-            </a:r>
-          </a:p>
-          <a:p>
-            <a:pPr algn="l"/>
-            <a:r>
-              <a:rPr lang="en-GB" sz="2000" b="0" i="0" u="none" strike="noStrike" baseline="0" dirty="0">
-                <a:solidFill>
-                  <a:srgbClr val="222222"/>
-                </a:solidFill>
-              </a:rPr>
-              <a:t>• Self-hosted agent setup</a:t>
-            </a:r>
-          </a:p>
-          <a:p>
-            <a:pPr algn="l"/>
-            <a:r>
-              <a:rPr lang="en-GB" sz="2000" b="0" i="0" u="none" strike="noStrike" baseline="0" dirty="0">
-                <a:solidFill>
-                  <a:srgbClr val="222222"/>
-                </a:solidFill>
-              </a:rPr>
-              <a:t>• Security scanning</a:t>
-            </a:r>
-          </a:p>
-          <a:p>
-            <a:pPr algn="l"/>
-            <a:endParaRPr lang="en-GB" sz="2000" b="0" i="0" u="none" strike="noStrike" baseline="0" dirty="0">
-              <a:solidFill>
-                <a:srgbClr val="222222"/>
-              </a:solidFill>
-            </a:endParaRPr>
-          </a:p>
-          <a:p>
-            <a:pPr algn="l"/>
-            <a:r>
-              <a:rPr lang="en-GB" sz="2000" b="0" i="0" u="none" strike="noStrike" baseline="0" dirty="0">
-                <a:solidFill>
-                  <a:srgbClr val="222222"/>
-                </a:solidFill>
-              </a:rPr>
-              <a:t>Slide 9: Security &amp; Governance</a:t>
-            </a:r>
-          </a:p>
-          <a:p>
-            <a:pPr algn="l"/>
-            <a:r>
-              <a:rPr lang="en-GB" sz="2000" b="0" i="0" u="none" strike="noStrike" baseline="0" dirty="0">
-                <a:solidFill>
-                  <a:srgbClr val="222222"/>
-                </a:solidFill>
-              </a:rPr>
-              <a:t>• Key Vault integration</a:t>
-            </a:r>
-          </a:p>
-          <a:p>
-            <a:pPr algn="l"/>
-            <a:r>
-              <a:rPr lang="en-GB" sz="2000" b="0" i="0" u="none" strike="noStrike" baseline="0" dirty="0">
-                <a:solidFill>
-                  <a:srgbClr val="222222"/>
-                </a:solidFill>
-              </a:rPr>
-              <a:t>• OIDC authentication</a:t>
-            </a:r>
-          </a:p>
-          <a:p>
-            <a:pPr algn="l"/>
-            <a:r>
-              <a:rPr lang="en-GB" sz="2000" b="0" i="0" u="none" strike="noStrike" baseline="0" dirty="0">
-                <a:solidFill>
-                  <a:srgbClr val="222222"/>
-                </a:solidFill>
-              </a:rPr>
-              <a:t>• Environment approvals</a:t>
-            </a:r>
-          </a:p>
-          <a:p>
-            <a:pPr algn="l"/>
-            <a:r>
-              <a:rPr lang="en-GB" sz="2000" b="0" i="0" u="none" strike="noStrike" baseline="0" dirty="0">
-                <a:solidFill>
-                  <a:srgbClr val="222222"/>
-                </a:solidFill>
-              </a:rPr>
-              <a:t>• Audit logging</a:t>
+              <a:t>• OIDC, Key Vault, approvals, audit, compliance</a:t>
             </a:r>
           </a:p>
         </p:txBody>
       </p:sp>
     </p:spTree>
-    <p:extLst>
-      <p:ext uri="{BB962C8B-B14F-4D97-AF65-F5344CB8AC3E}">
-        <p14:creationId xmlns:p14="http://schemas.microsoft.com/office/powerpoint/2010/main" val="1203156630"/>
-      </p:ext>
-    </p:extLst>
   </p:cSld>
   <p:clrMapOvr>
     <a:masterClrMapping/>
@@ -4154,7 +3398,7 @@
 </p:sld>
 </file>
 
-<file path=ppt/slides/slide4.xml><?xml version="1.0" encoding="utf-8"?>
+<file path=ppt/slides/slide13.xml><?xml version="1.0" encoding="utf-8"?>
 <p:sld xmlns:a="http://schemas.openxmlformats.org/drawingml/2006/main" xmlns:r="http://schemas.openxmlformats.org/officeDocument/2006/relationships" xmlns:p="http://schemas.openxmlformats.org/presentationml/2006/main">
   <p:cSld>
     <p:spTree>
@@ -4173,20 +3417,35 @@
       </p:grpSpPr>
       <p:sp>
         <p:nvSpPr>
-          <p:cNvPr id="5" name="TextBox 4">
-            <a:extLst>
-              <a:ext uri="{FF2B5EF4-FFF2-40B4-BE49-F238E27FC236}">
-                <a16:creationId xmlns:a16="http://schemas.microsoft.com/office/drawing/2014/main" id="{1D268CB1-75E1-4A92-AD60-0C4EBE2F6BFC}"/>
-              </a:ext>
-            </a:extLst>
-          </p:cNvPr>
+          <p:cNvPr id="2" name="Title 1"/>
+          <p:cNvSpPr>
+            <a:spLocks noGrp="1"/>
+          </p:cNvSpPr>
+          <p:nvPr>
+            <p:ph type="title"/>
+          </p:nvPr>
+        </p:nvSpPr>
+        <p:spPr/>
+        <p:txBody>
+          <a:bodyPr/>
+          <a:lstStyle/>
+          <a:p>
+            <a:r>
+              <a:t>Identity &amp; Secrets</a:t>
+            </a:r>
+          </a:p>
+        </p:txBody>
+      </p:sp>
+      <p:sp>
+        <p:nvSpPr>
+          <p:cNvPr id="3" name="TextBox 2"/>
           <p:cNvSpPr txBox="1"/>
           <p:nvPr/>
         </p:nvSpPr>
         <p:spPr>
           <a:xfrm>
-            <a:off x="2054431" y="1720840"/>
-            <a:ext cx="7410203" cy="4401205"/>
+            <a:off x="640080" y="1638300"/>
+            <a:ext cx="7772400" cy="4572000"/>
           </a:xfrm>
           <a:prstGeom prst="rect">
             <a:avLst/>
@@ -4194,167 +3453,22 @@
           <a:noFill/>
         </p:spPr>
         <p:txBody>
-          <a:bodyPr wrap="square">
+          <a:bodyPr wrap="none">
             <a:spAutoFit/>
           </a:bodyPr>
           <a:lstStyle/>
           <a:p>
-            <a:pPr algn="l"/>
+            <a:pPr>
+              <a:defRPr sz="2200"/>
+            </a:pPr>
             <a:r>
-              <a:rPr lang="fr-FR" sz="2000" b="0" i="0" u="none" strike="noStrike" baseline="0" dirty="0">
-                <a:solidFill>
-                  <a:srgbClr val="222222"/>
-                </a:solidFill>
-              </a:rPr>
-              <a:t>Slide 10: Jira Cloud Migration</a:t>
+              <a:rPr dirty="0"/>
+              <a:t>• Managed identities, secret rotation, zero hardcoded secrets</a:t>
             </a:r>
-          </a:p>
-          <a:p>
-            <a:pPr algn="l"/>
-            <a:r>
-              <a:rPr lang="en-GB" sz="2000" b="0" i="0" u="none" strike="noStrike" baseline="0" dirty="0">
-                <a:solidFill>
-                  <a:srgbClr val="222222"/>
-                </a:solidFill>
-              </a:rPr>
-              <a:t>• Migration readiness assessment</a:t>
-            </a:r>
-          </a:p>
-          <a:p>
-            <a:pPr algn="l"/>
-            <a:r>
-              <a:rPr lang="en-GB" sz="2000" b="0" i="0" u="none" strike="noStrike" baseline="0" dirty="0">
-                <a:solidFill>
-                  <a:srgbClr val="222222"/>
-                </a:solidFill>
-              </a:rPr>
-              <a:t>• Wave planning</a:t>
-            </a:r>
-          </a:p>
-          <a:p>
-            <a:pPr algn="l"/>
-            <a:r>
-              <a:rPr lang="en-GB" sz="2000" b="0" i="0" u="none" strike="noStrike" baseline="0" dirty="0">
-                <a:solidFill>
-                  <a:srgbClr val="222222"/>
-                </a:solidFill>
-              </a:rPr>
-              <a:t>• Integration with ADO</a:t>
-            </a:r>
-          </a:p>
-          <a:p>
-            <a:pPr algn="l"/>
-            <a:endParaRPr lang="en-GB" sz="2000" b="0" i="0" u="none" strike="noStrike" baseline="0" dirty="0">
-              <a:solidFill>
-                <a:srgbClr val="222222"/>
-              </a:solidFill>
-            </a:endParaRPr>
-          </a:p>
-          <a:p>
-            <a:pPr algn="l"/>
-            <a:r>
-              <a:rPr lang="en-GB" sz="2000" b="0" i="0" u="none" strike="noStrike" baseline="0" dirty="0">
-                <a:solidFill>
-                  <a:srgbClr val="222222"/>
-                </a:solidFill>
-              </a:rPr>
-              <a:t>Slide 11: Rollback Strategy</a:t>
-            </a:r>
-          </a:p>
-          <a:p>
-            <a:pPr algn="l"/>
-            <a:r>
-              <a:rPr lang="en-GB" sz="2000" b="0" i="0" u="none" strike="noStrike" baseline="0" dirty="0">
-                <a:solidFill>
-                  <a:srgbClr val="222222"/>
-                </a:solidFill>
-              </a:rPr>
-              <a:t>• Container App revision rollback</a:t>
-            </a:r>
-          </a:p>
-          <a:p>
-            <a:pPr algn="l"/>
-            <a:r>
-              <a:rPr lang="en-GB" sz="2000" b="0" i="0" u="none" strike="noStrike" baseline="0" dirty="0">
-                <a:solidFill>
-                  <a:srgbClr val="222222"/>
-                </a:solidFill>
-              </a:rPr>
-              <a:t>• Database restoration</a:t>
-            </a:r>
-          </a:p>
-          <a:p>
-            <a:pPr algn="l"/>
-            <a:r>
-              <a:rPr lang="en-GB" sz="2000" b="0" i="0" u="none" strike="noStrike" baseline="0" dirty="0">
-                <a:solidFill>
-                  <a:srgbClr val="222222"/>
-                </a:solidFill>
-              </a:rPr>
-              <a:t>• Pipeline rollback</a:t>
-            </a:r>
-          </a:p>
-          <a:p>
-            <a:pPr algn="l"/>
-            <a:endParaRPr lang="en-GB" sz="2000" b="0" i="0" u="none" strike="noStrike" baseline="0" dirty="0">
-              <a:solidFill>
-                <a:srgbClr val="222222"/>
-              </a:solidFill>
-            </a:endParaRPr>
-          </a:p>
-          <a:p>
-            <a:pPr algn="l"/>
-            <a:r>
-              <a:rPr lang="en-GB" sz="2000" b="0" i="0" u="none" strike="noStrike" baseline="0" dirty="0">
-                <a:solidFill>
-                  <a:srgbClr val="222222"/>
-                </a:solidFill>
-              </a:rPr>
-              <a:t>Slide 12: Monitoring &amp; Observability</a:t>
-            </a:r>
-          </a:p>
-          <a:p>
-            <a:pPr algn="l"/>
-            <a:r>
-              <a:rPr lang="en-GB" sz="2000" b="0" i="0" u="none" strike="noStrike" baseline="0" dirty="0">
-                <a:solidFill>
-                  <a:srgbClr val="222222"/>
-                </a:solidFill>
-              </a:rPr>
-              <a:t>• Application Insights</a:t>
-            </a:r>
-          </a:p>
-          <a:p>
-            <a:pPr algn="l"/>
-            <a:r>
-              <a:rPr lang="en-GB" sz="2000" b="0" i="0" u="none" strike="noStrike" baseline="0" dirty="0">
-                <a:solidFill>
-                  <a:srgbClr val="222222"/>
-                </a:solidFill>
-              </a:rPr>
-              <a:t>• Log Analytics</a:t>
-            </a:r>
-          </a:p>
-          <a:p>
-            <a:pPr algn="l"/>
-            <a:r>
-              <a:rPr lang="en-GB" sz="2000" b="0" i="0" u="none" strike="noStrike" baseline="0" dirty="0">
-                <a:solidFill>
-                  <a:srgbClr val="222222"/>
-                </a:solidFill>
-              </a:rPr>
-              <a:t>• Metrics and alerts</a:t>
-            </a:r>
-            <a:endParaRPr lang="en-GB" sz="2000" dirty="0"/>
           </a:p>
         </p:txBody>
       </p:sp>
     </p:spTree>
-    <p:extLst>
-      <p:ext uri="{BB962C8B-B14F-4D97-AF65-F5344CB8AC3E}">
-        <p14:creationId xmlns:p14="http://schemas.microsoft.com/office/powerpoint/2010/main" val="1953105884"/>
-      </p:ext>
-    </p:extLst>
   </p:cSld>
   <p:clrMapOvr>
     <a:masterClrMapping/>
@@ -4362,7 +3476,7 @@
 </p:sld>
 </file>
 
-<file path=ppt/slides/slide5.xml><?xml version="1.0" encoding="utf-8"?>
+<file path=ppt/slides/slide14.xml><?xml version="1.0" encoding="utf-8"?>
 <p:sld xmlns:a="http://schemas.openxmlformats.org/drawingml/2006/main" xmlns:r="http://schemas.openxmlformats.org/officeDocument/2006/relationships" xmlns:p="http://schemas.openxmlformats.org/presentationml/2006/main">
   <p:cSld>
     <p:spTree>
@@ -4381,20 +3495,36 @@
       </p:grpSpPr>
       <p:sp>
         <p:nvSpPr>
-          <p:cNvPr id="5" name="TextBox 4">
-            <a:extLst>
-              <a:ext uri="{FF2B5EF4-FFF2-40B4-BE49-F238E27FC236}">
-                <a16:creationId xmlns:a16="http://schemas.microsoft.com/office/drawing/2014/main" id="{D2D7DB25-285E-4E63-B274-E81815B1FA24}"/>
-              </a:ext>
-            </a:extLst>
-          </p:cNvPr>
+          <p:cNvPr id="2" name="Title 1"/>
+          <p:cNvSpPr>
+            <a:spLocks noGrp="1"/>
+          </p:cNvSpPr>
+          <p:nvPr>
+            <p:ph type="title"/>
+          </p:nvPr>
+        </p:nvSpPr>
+        <p:spPr/>
+        <p:txBody>
+          <a:bodyPr/>
+          <a:lstStyle/>
+          <a:p>
+            <a:r>
+              <a:rPr dirty="0"/>
+              <a:t>Jira &amp; Azure Boards</a:t>
+            </a:r>
+          </a:p>
+        </p:txBody>
+      </p:sp>
+      <p:sp>
+        <p:nvSpPr>
+          <p:cNvPr id="3" name="TextBox 2"/>
           <p:cNvSpPr txBox="1"/>
           <p:nvPr/>
         </p:nvSpPr>
         <p:spPr>
           <a:xfrm>
-            <a:off x="2763116" y="1536174"/>
-            <a:ext cx="7247783" cy="4401205"/>
+            <a:off x="640080" y="1587500"/>
+            <a:ext cx="7772400" cy="4572000"/>
           </a:xfrm>
           <a:prstGeom prst="rect">
             <a:avLst/>
@@ -4402,167 +3532,22 @@
           <a:noFill/>
         </p:spPr>
         <p:txBody>
-          <a:bodyPr wrap="square">
+          <a:bodyPr wrap="none">
             <a:spAutoFit/>
           </a:bodyPr>
           <a:lstStyle/>
           <a:p>
-            <a:pPr algn="l"/>
+            <a:pPr>
+              <a:defRPr sz="2200"/>
+            </a:pPr>
             <a:r>
-              <a:rPr lang="en-GB" sz="2000" b="0" i="0" u="none" strike="noStrike" baseline="0" dirty="0">
-                <a:solidFill>
-                  <a:srgbClr val="222222"/>
-                </a:solidFill>
-              </a:rPr>
-              <a:t>Slide 13: Hypercare Plan</a:t>
+              <a:rPr dirty="0"/>
+              <a:t>• Migration waves, work tracking, traceability</a:t>
             </a:r>
-          </a:p>
-          <a:p>
-            <a:pPr algn="l"/>
-            <a:r>
-              <a:rPr lang="en-GB" sz="2000" b="0" i="0" u="none" strike="noStrike" baseline="0" dirty="0">
-                <a:solidFill>
-                  <a:srgbClr val="222222"/>
-                </a:solidFill>
-              </a:rPr>
-              <a:t>• 24/7 monitoring</a:t>
-            </a:r>
-          </a:p>
-          <a:p>
-            <a:pPr algn="l"/>
-            <a:r>
-              <a:rPr lang="en-GB" sz="2000" b="0" i="0" u="none" strike="noStrike" baseline="0" dirty="0">
-                <a:solidFill>
-                  <a:srgbClr val="222222"/>
-                </a:solidFill>
-              </a:rPr>
-              <a:t>• Incident response</a:t>
-            </a:r>
-          </a:p>
-          <a:p>
-            <a:pPr algn="l"/>
-            <a:r>
-              <a:rPr lang="en-GB" sz="2000" b="0" i="0" u="none" strike="noStrike" baseline="0" dirty="0">
-                <a:solidFill>
-                  <a:srgbClr val="222222"/>
-                </a:solidFill>
-              </a:rPr>
-              <a:t>• Knowledge transfer</a:t>
-            </a:r>
-          </a:p>
-          <a:p>
-            <a:pPr algn="l"/>
-            <a:endParaRPr lang="en-GB" sz="2000" b="0" i="0" u="none" strike="noStrike" baseline="0" dirty="0">
-              <a:solidFill>
-                <a:srgbClr val="222222"/>
-              </a:solidFill>
-            </a:endParaRPr>
-          </a:p>
-          <a:p>
-            <a:pPr algn="l"/>
-            <a:r>
-              <a:rPr lang="en-GB" sz="2000" b="0" i="0" u="none" strike="noStrike" baseline="0" dirty="0">
-                <a:solidFill>
-                  <a:srgbClr val="222222"/>
-                </a:solidFill>
-              </a:rPr>
-              <a:t>Slide 14: Key Learnings</a:t>
-            </a:r>
-          </a:p>
-          <a:p>
-            <a:pPr algn="l"/>
-            <a:r>
-              <a:rPr lang="en-GB" sz="2000" b="0" i="0" u="none" strike="noStrike" baseline="0" dirty="0">
-                <a:solidFill>
-                  <a:srgbClr val="222222"/>
-                </a:solidFill>
-              </a:rPr>
-              <a:t>• Technical challenges</a:t>
-            </a:r>
-          </a:p>
-          <a:p>
-            <a:pPr algn="l"/>
-            <a:r>
-              <a:rPr lang="en-GB" sz="2000" b="0" i="0" u="none" strike="noStrike" baseline="0" dirty="0">
-                <a:solidFill>
-                  <a:srgbClr val="222222"/>
-                </a:solidFill>
-              </a:rPr>
-              <a:t>• Team collaboration</a:t>
-            </a:r>
-          </a:p>
-          <a:p>
-            <a:pPr algn="l"/>
-            <a:r>
-              <a:rPr lang="en-GB" sz="2000" b="0" i="0" u="none" strike="noStrike" baseline="0" dirty="0">
-                <a:solidFill>
-                  <a:srgbClr val="222222"/>
-                </a:solidFill>
-              </a:rPr>
-              <a:t>• Risk mitigation</a:t>
-            </a:r>
-          </a:p>
-          <a:p>
-            <a:pPr algn="l"/>
-            <a:endParaRPr lang="en-GB" sz="2000" b="0" i="0" u="none" strike="noStrike" baseline="0" dirty="0">
-              <a:solidFill>
-                <a:srgbClr val="222222"/>
-              </a:solidFill>
-            </a:endParaRPr>
-          </a:p>
-          <a:p>
-            <a:pPr algn="l"/>
-            <a:r>
-              <a:rPr lang="en-GB" sz="2000" b="0" i="0" u="none" strike="noStrike" baseline="0" dirty="0">
-                <a:solidFill>
-                  <a:srgbClr val="222222"/>
-                </a:solidFill>
-              </a:rPr>
-              <a:t>Slide 15: Next Steps</a:t>
-            </a:r>
-          </a:p>
-          <a:p>
-            <a:pPr algn="l"/>
-            <a:r>
-              <a:rPr lang="en-GB" sz="2000" b="0" i="0" u="none" strike="noStrike" baseline="0" dirty="0">
-                <a:solidFill>
-                  <a:srgbClr val="222222"/>
-                </a:solidFill>
-              </a:rPr>
-              <a:t>• Production deployment</a:t>
-            </a:r>
-          </a:p>
-          <a:p>
-            <a:pPr algn="l"/>
-            <a:r>
-              <a:rPr lang="en-GB" sz="2000" b="0" i="0" u="none" strike="noStrike" baseline="0" dirty="0">
-                <a:solidFill>
-                  <a:srgbClr val="222222"/>
-                </a:solidFill>
-              </a:rPr>
-              <a:t>• Toolchain optimization</a:t>
-            </a:r>
-          </a:p>
-          <a:p>
-            <a:pPr algn="l"/>
-            <a:r>
-              <a:rPr lang="en-GB" sz="2000" b="0" i="0" u="none" strike="noStrike" baseline="0" dirty="0">
-                <a:solidFill>
-                  <a:srgbClr val="222222"/>
-                </a:solidFill>
-              </a:rPr>
-              <a:t>• Continuous improvement</a:t>
-            </a:r>
-            <a:endParaRPr lang="en-GB" sz="2000" dirty="0"/>
           </a:p>
         </p:txBody>
       </p:sp>
     </p:spTree>
-    <p:extLst>
-      <p:ext uri="{BB962C8B-B14F-4D97-AF65-F5344CB8AC3E}">
-        <p14:creationId xmlns:p14="http://schemas.microsoft.com/office/powerpoint/2010/main" val="2569204952"/>
-      </p:ext>
-    </p:extLst>
   </p:cSld>
   <p:clrMapOvr>
     <a:masterClrMapping/>
@@ -4570,7 +3555,162 @@
 </p:sld>
 </file>
 
-<file path=ppt/slides/slide6.xml><?xml version="1.0" encoding="utf-8"?>
+<file path=ppt/slides/slide15.xml><?xml version="1.0" encoding="utf-8"?>
+<p:sld xmlns:a="http://schemas.openxmlformats.org/drawingml/2006/main" xmlns:r="http://schemas.openxmlformats.org/officeDocument/2006/relationships" xmlns:p="http://schemas.openxmlformats.org/presentationml/2006/main">
+  <p:cSld>
+    <p:spTree>
+      <p:nvGrpSpPr>
+        <p:cNvPr id="1" name=""/>
+        <p:cNvGrpSpPr/>
+        <p:nvPr/>
+      </p:nvGrpSpPr>
+      <p:grpSpPr>
+        <a:xfrm>
+          <a:off x="0" y="0"/>
+          <a:ext cx="0" cy="0"/>
+          <a:chOff x="0" y="0"/>
+          <a:chExt cx="0" cy="0"/>
+        </a:xfrm>
+      </p:grpSpPr>
+      <p:sp>
+        <p:nvSpPr>
+          <p:cNvPr id="2" name="Title 1"/>
+          <p:cNvSpPr>
+            <a:spLocks noGrp="1"/>
+          </p:cNvSpPr>
+          <p:nvPr>
+            <p:ph type="title"/>
+          </p:nvPr>
+        </p:nvSpPr>
+        <p:spPr/>
+        <p:txBody>
+          <a:bodyPr/>
+          <a:lstStyle/>
+          <a:p>
+            <a:r>
+              <a:t>Monitoring &amp; SRE</a:t>
+            </a:r>
+          </a:p>
+        </p:txBody>
+      </p:sp>
+      <p:sp>
+        <p:nvSpPr>
+          <p:cNvPr id="3" name="TextBox 2"/>
+          <p:cNvSpPr txBox="1"/>
+          <p:nvPr/>
+        </p:nvSpPr>
+        <p:spPr>
+          <a:xfrm>
+            <a:off x="640080" y="1562100"/>
+            <a:ext cx="7772400" cy="4572000"/>
+          </a:xfrm>
+          <a:prstGeom prst="rect">
+            <a:avLst/>
+          </a:prstGeom>
+          <a:noFill/>
+        </p:spPr>
+        <p:txBody>
+          <a:bodyPr wrap="none">
+            <a:spAutoFit/>
+          </a:bodyPr>
+          <a:lstStyle/>
+          <a:p>
+            <a:pPr>
+              <a:defRPr sz="2200"/>
+            </a:pPr>
+            <a:r>
+              <a:rPr dirty="0"/>
+              <a:t>• App Insights, Log Analytics, alerts, dashboards, SLOs</a:t>
+            </a:r>
+          </a:p>
+        </p:txBody>
+      </p:sp>
+    </p:spTree>
+  </p:cSld>
+  <p:clrMapOvr>
+    <a:masterClrMapping/>
+  </p:clrMapOvr>
+</p:sld>
+</file>
+
+<file path=ppt/slides/slide16.xml><?xml version="1.0" encoding="utf-8"?>
+<p:sld xmlns:a="http://schemas.openxmlformats.org/drawingml/2006/main" xmlns:r="http://schemas.openxmlformats.org/officeDocument/2006/relationships" xmlns:p="http://schemas.openxmlformats.org/presentationml/2006/main">
+  <p:cSld>
+    <p:spTree>
+      <p:nvGrpSpPr>
+        <p:cNvPr id="1" name=""/>
+        <p:cNvGrpSpPr/>
+        <p:nvPr/>
+      </p:nvGrpSpPr>
+      <p:grpSpPr>
+        <a:xfrm>
+          <a:off x="0" y="0"/>
+          <a:ext cx="0" cy="0"/>
+          <a:chOff x="0" y="0"/>
+          <a:chExt cx="0" cy="0"/>
+        </a:xfrm>
+      </p:grpSpPr>
+      <p:sp>
+        <p:nvSpPr>
+          <p:cNvPr id="2" name="Title 1"/>
+          <p:cNvSpPr>
+            <a:spLocks noGrp="1"/>
+          </p:cNvSpPr>
+          <p:nvPr>
+            <p:ph type="title"/>
+          </p:nvPr>
+        </p:nvSpPr>
+        <p:spPr/>
+        <p:txBody>
+          <a:bodyPr/>
+          <a:lstStyle/>
+          <a:p>
+            <a:r>
+              <a:t>Deployment &amp; Rollback</a:t>
+            </a:r>
+          </a:p>
+        </p:txBody>
+      </p:sp>
+      <p:sp>
+        <p:nvSpPr>
+          <p:cNvPr id="3" name="TextBox 2"/>
+          <p:cNvSpPr txBox="1"/>
+          <p:nvPr/>
+        </p:nvSpPr>
+        <p:spPr>
+          <a:xfrm>
+            <a:off x="640080" y="1625600"/>
+            <a:ext cx="7772400" cy="4572000"/>
+          </a:xfrm>
+          <a:prstGeom prst="rect">
+            <a:avLst/>
+          </a:prstGeom>
+          <a:noFill/>
+        </p:spPr>
+        <p:txBody>
+          <a:bodyPr wrap="none">
+            <a:spAutoFit/>
+          </a:bodyPr>
+          <a:lstStyle/>
+          <a:p>
+            <a:pPr>
+              <a:defRPr sz="2200"/>
+            </a:pPr>
+            <a:r>
+              <a:t>• Blue/Green, rollback, smoke tests, recovery objectives</a:t>
+            </a:r>
+          </a:p>
+        </p:txBody>
+      </p:sp>
+    </p:spTree>
+  </p:cSld>
+  <p:clrMapOvr>
+    <a:masterClrMapping/>
+  </p:clrMapOvr>
+</p:sld>
+</file>
+
+<file path=ppt/slides/slide17.xml><?xml version="1.0" encoding="utf-8"?>
 <p:sld xmlns:a="http://schemas.openxmlformats.org/drawingml/2006/main" xmlns:r="http://schemas.openxmlformats.org/officeDocument/2006/relationships" xmlns:p="http://schemas.openxmlformats.org/presentationml/2006/main">
   <p:cSld>
     <p:spTree>
@@ -4595,8 +3735,8 @@
         </p:nvSpPr>
         <p:spPr>
           <a:xfrm>
-            <a:off x="1045029" y="1086204"/>
-            <a:ext cx="10129652" cy="5314595"/>
+            <a:off x="783772" y="1671904"/>
+            <a:ext cx="7597239" cy="3985946"/>
           </a:xfrm>
           <a:prstGeom prst="rect">
             <a:avLst/>
@@ -4613,7 +3753,7 @@
           <a:lstStyle/>
           <a:p>
             <a:pPr algn="ctr"/>
-            <a:endParaRPr/>
+            <a:endParaRPr sz="1350"/>
           </a:p>
         </p:txBody>
       </p:sp>
@@ -4625,8 +3765,8 @@
         </p:nvSpPr>
         <p:spPr>
           <a:xfrm>
-            <a:off x="2236777" y="3631865"/>
-            <a:ext cx="7130616" cy="8519"/>
+            <a:off x="1677583" y="3581149"/>
+            <a:ext cx="5347962" cy="6389"/>
           </a:xfrm>
           <a:custGeom>
             <a:avLst/>
@@ -4735,7 +3875,7 @@
           <a:lstStyle/>
           <a:p>
             <a:pPr algn="ctr"/>
-            <a:endParaRPr/>
+            <a:endParaRPr sz="1350"/>
           </a:p>
         </p:txBody>
       </p:sp>
@@ -4747,8 +3887,8 @@
         </p:nvGrpSpPr>
         <p:grpSpPr>
           <a:xfrm>
-            <a:off x="9409991" y="3553487"/>
-            <a:ext cx="467707" cy="156754"/>
+            <a:off x="7057494" y="3522365"/>
+            <a:ext cx="350780" cy="117566"/>
             <a:chOff x="7428790" y="2467282"/>
             <a:chExt cx="467707" cy="156754"/>
           </a:xfrm>
@@ -4793,7 +3933,7 @@
             <a:lstStyle/>
             <a:p>
               <a:pPr algn="ctr"/>
-              <a:endParaRPr/>
+              <a:endParaRPr sz="1350"/>
             </a:p>
           </p:txBody>
         </p:sp>
@@ -4840,7 +3980,7 @@
             <a:lstStyle/>
             <a:p>
               <a:pPr algn="ctr"/>
-              <a:endParaRPr/>
+              <a:endParaRPr sz="1350"/>
             </a:p>
           </p:txBody>
         </p:sp>
@@ -4853,8 +3993,8 @@
         </p:nvSpPr>
         <p:spPr>
           <a:xfrm>
-            <a:off x="2722376" y="3606308"/>
-            <a:ext cx="51115" cy="51115"/>
+            <a:off x="2041783" y="3561982"/>
+            <a:ext cx="38336" cy="38336"/>
           </a:xfrm>
           <a:custGeom>
             <a:avLst/>
@@ -4903,7 +4043,7 @@
           <a:lstStyle/>
           <a:p>
             <a:pPr algn="ctr"/>
-            <a:endParaRPr/>
+            <a:endParaRPr sz="1350"/>
           </a:p>
         </p:txBody>
       </p:sp>
@@ -4915,8 +4055,8 @@
         </p:nvSpPr>
         <p:spPr>
           <a:xfrm>
-            <a:off x="3233531" y="3606308"/>
-            <a:ext cx="51115" cy="51115"/>
+            <a:off x="2425149" y="3561982"/>
+            <a:ext cx="38336" cy="38336"/>
           </a:xfrm>
           <a:custGeom>
             <a:avLst/>
@@ -4965,7 +4105,7 @@
           <a:lstStyle/>
           <a:p>
             <a:pPr algn="ctr"/>
-            <a:endParaRPr/>
+            <a:endParaRPr sz="1350"/>
           </a:p>
         </p:txBody>
       </p:sp>
@@ -4977,8 +4117,8 @@
         </p:nvSpPr>
         <p:spPr>
           <a:xfrm>
-            <a:off x="3744686" y="3606308"/>
-            <a:ext cx="51115" cy="51115"/>
+            <a:off x="2808515" y="3561982"/>
+            <a:ext cx="38336" cy="38336"/>
           </a:xfrm>
           <a:custGeom>
             <a:avLst/>
@@ -5027,7 +4167,7 @@
           <a:lstStyle/>
           <a:p>
             <a:pPr algn="ctr"/>
-            <a:endParaRPr/>
+            <a:endParaRPr sz="1350"/>
           </a:p>
         </p:txBody>
       </p:sp>
@@ -5039,8 +4179,8 @@
         </p:nvSpPr>
         <p:spPr>
           <a:xfrm>
-            <a:off x="5278152" y="3606308"/>
-            <a:ext cx="51115" cy="51115"/>
+            <a:off x="3958615" y="3561982"/>
+            <a:ext cx="38336" cy="38336"/>
           </a:xfrm>
           <a:custGeom>
             <a:avLst/>
@@ -5089,7 +4229,7 @@
           <a:lstStyle/>
           <a:p>
             <a:pPr algn="ctr"/>
-            <a:endParaRPr/>
+            <a:endParaRPr sz="1350"/>
           </a:p>
         </p:txBody>
       </p:sp>
@@ -5101,8 +4241,8 @@
         </p:nvSpPr>
         <p:spPr>
           <a:xfrm>
-            <a:off x="4766997" y="3606308"/>
-            <a:ext cx="51115" cy="51115"/>
+            <a:off x="3575248" y="3561982"/>
+            <a:ext cx="38336" cy="38336"/>
           </a:xfrm>
           <a:custGeom>
             <a:avLst/>
@@ -5151,7 +4291,7 @@
           <a:lstStyle/>
           <a:p>
             <a:pPr algn="ctr"/>
-            <a:endParaRPr/>
+            <a:endParaRPr sz="1350"/>
           </a:p>
         </p:txBody>
       </p:sp>
@@ -5163,8 +4303,8 @@
         </p:nvSpPr>
         <p:spPr>
           <a:xfrm>
-            <a:off x="5789307" y="3606308"/>
-            <a:ext cx="51115" cy="51115"/>
+            <a:off x="4341981" y="3561982"/>
+            <a:ext cx="38336" cy="38336"/>
           </a:xfrm>
           <a:custGeom>
             <a:avLst/>
@@ -5213,7 +4353,7 @@
           <a:lstStyle/>
           <a:p>
             <a:pPr algn="ctr"/>
-            <a:endParaRPr/>
+            <a:endParaRPr sz="1350"/>
           </a:p>
         </p:txBody>
       </p:sp>
@@ -5225,8 +4365,8 @@
         </p:nvSpPr>
         <p:spPr>
           <a:xfrm>
-            <a:off x="4255842" y="3606308"/>
-            <a:ext cx="51115" cy="51115"/>
+            <a:off x="3191882" y="3561982"/>
+            <a:ext cx="38336" cy="38336"/>
           </a:xfrm>
           <a:custGeom>
             <a:avLst/>
@@ -5275,7 +4415,7 @@
           <a:lstStyle/>
           <a:p>
             <a:pPr algn="ctr"/>
-            <a:endParaRPr/>
+            <a:endParaRPr sz="1350"/>
           </a:p>
         </p:txBody>
       </p:sp>
@@ -5287,8 +4427,8 @@
         </p:nvSpPr>
         <p:spPr>
           <a:xfrm>
-            <a:off x="6300463" y="3606308"/>
-            <a:ext cx="51115" cy="51115"/>
+            <a:off x="4725348" y="3561982"/>
+            <a:ext cx="38336" cy="38336"/>
           </a:xfrm>
           <a:custGeom>
             <a:avLst/>
@@ -5337,7 +4477,7 @@
           <a:lstStyle/>
           <a:p>
             <a:pPr algn="ctr"/>
-            <a:endParaRPr/>
+            <a:endParaRPr sz="1350"/>
           </a:p>
         </p:txBody>
       </p:sp>
@@ -5349,8 +4489,8 @@
         </p:nvSpPr>
         <p:spPr>
           <a:xfrm>
-            <a:off x="6811618" y="3606308"/>
-            <a:ext cx="51115" cy="51115"/>
+            <a:off x="5108714" y="3561982"/>
+            <a:ext cx="38336" cy="38336"/>
           </a:xfrm>
           <a:custGeom>
             <a:avLst/>
@@ -5399,7 +4539,7 @@
           <a:lstStyle/>
           <a:p>
             <a:pPr algn="ctr"/>
-            <a:endParaRPr/>
+            <a:endParaRPr sz="1350"/>
           </a:p>
         </p:txBody>
       </p:sp>
@@ -5411,8 +4551,8 @@
         </p:nvSpPr>
         <p:spPr>
           <a:xfrm>
-            <a:off x="7322773" y="3606308"/>
-            <a:ext cx="51115" cy="51115"/>
+            <a:off x="5492080" y="3561982"/>
+            <a:ext cx="38336" cy="38336"/>
           </a:xfrm>
           <a:custGeom>
             <a:avLst/>
@@ -5461,7 +4601,7 @@
           <a:lstStyle/>
           <a:p>
             <a:pPr algn="ctr"/>
-            <a:endParaRPr/>
+            <a:endParaRPr sz="1350"/>
           </a:p>
         </p:txBody>
       </p:sp>
@@ -5473,8 +4613,8 @@
         </p:nvSpPr>
         <p:spPr>
           <a:xfrm>
-            <a:off x="7833928" y="3606308"/>
-            <a:ext cx="51115" cy="51115"/>
+            <a:off x="5875447" y="3561982"/>
+            <a:ext cx="38336" cy="38336"/>
           </a:xfrm>
           <a:custGeom>
             <a:avLst/>
@@ -5523,7 +4663,7 @@
           <a:lstStyle/>
           <a:p>
             <a:pPr algn="ctr"/>
-            <a:endParaRPr/>
+            <a:endParaRPr sz="1350"/>
           </a:p>
         </p:txBody>
       </p:sp>
@@ -5535,8 +4675,8 @@
         </p:nvSpPr>
         <p:spPr>
           <a:xfrm>
-            <a:off x="8345084" y="3606308"/>
-            <a:ext cx="51115" cy="51115"/>
+            <a:off x="6258814" y="3561982"/>
+            <a:ext cx="38336" cy="38336"/>
           </a:xfrm>
           <a:custGeom>
             <a:avLst/>
@@ -5585,7 +4725,7 @@
           <a:lstStyle/>
           <a:p>
             <a:pPr algn="ctr"/>
-            <a:endParaRPr/>
+            <a:endParaRPr sz="1350"/>
           </a:p>
         </p:txBody>
       </p:sp>
@@ -5597,8 +4737,8 @@
         </p:nvSpPr>
         <p:spPr>
           <a:xfrm>
-            <a:off x="8856239" y="3606308"/>
-            <a:ext cx="51115" cy="51115"/>
+            <a:off x="6642180" y="3561982"/>
+            <a:ext cx="38336" cy="38336"/>
           </a:xfrm>
           <a:custGeom>
             <a:avLst/>
@@ -5647,7 +4787,7 @@
           <a:lstStyle/>
           <a:p>
             <a:pPr algn="ctr"/>
-            <a:endParaRPr/>
+            <a:endParaRPr sz="1350"/>
           </a:p>
         </p:txBody>
       </p:sp>
@@ -5659,8 +4799,8 @@
         </p:nvSpPr>
         <p:spPr>
           <a:xfrm>
-            <a:off x="9367394" y="3606308"/>
-            <a:ext cx="51115" cy="51115"/>
+            <a:off x="7025546" y="3561982"/>
+            <a:ext cx="38336" cy="38336"/>
           </a:xfrm>
           <a:custGeom>
             <a:avLst/>
@@ -5709,7 +4849,7 @@
           <a:lstStyle/>
           <a:p>
             <a:pPr algn="ctr"/>
-            <a:endParaRPr/>
+            <a:endParaRPr sz="1350"/>
           </a:p>
         </p:txBody>
       </p:sp>
@@ -5721,8 +4861,8 @@
         </p:nvSpPr>
         <p:spPr>
           <a:xfrm>
-            <a:off x="9239588" y="3733703"/>
-            <a:ext cx="306199" cy="314428"/>
+            <a:off x="6929692" y="3657527"/>
+            <a:ext cx="229649" cy="235821"/>
           </a:xfrm>
           <a:custGeom>
             <a:avLst/>
@@ -6035,7 +5175,7 @@
           <a:lstStyle/>
           <a:p>
             <a:pPr algn="ctr"/>
-            <a:endParaRPr/>
+            <a:endParaRPr sz="1350"/>
           </a:p>
         </p:txBody>
       </p:sp>
@@ -6047,8 +5187,8 @@
         </p:nvSpPr>
         <p:spPr>
           <a:xfrm>
-            <a:off x="2594587" y="3222941"/>
-            <a:ext cx="306693" cy="306693"/>
+            <a:off x="1945941" y="3274456"/>
+            <a:ext cx="230020" cy="230020"/>
           </a:xfrm>
           <a:custGeom>
             <a:avLst/>
@@ -6519,7 +5659,7 @@
           <a:lstStyle/>
           <a:p>
             <a:pPr algn="ctr"/>
-            <a:endParaRPr/>
+            <a:endParaRPr sz="1350"/>
           </a:p>
         </p:txBody>
       </p:sp>
@@ -6531,8 +5671,8 @@
         </p:nvSpPr>
         <p:spPr>
           <a:xfrm>
-            <a:off x="3613625" y="3221040"/>
-            <a:ext cx="309964" cy="308592"/>
+            <a:off x="2710219" y="3273030"/>
+            <a:ext cx="232473" cy="231444"/>
           </a:xfrm>
           <a:custGeom>
             <a:avLst/>
@@ -6901,7 +6041,7 @@
           <a:lstStyle/>
           <a:p>
             <a:pPr algn="ctr"/>
-            <a:endParaRPr/>
+            <a:endParaRPr sz="1350"/>
           </a:p>
         </p:txBody>
       </p:sp>
@@ -6913,8 +6053,8 @@
         </p:nvSpPr>
         <p:spPr>
           <a:xfrm>
-            <a:off x="4639089" y="3242108"/>
-            <a:ext cx="307383" cy="268356"/>
+            <a:off x="3479317" y="3288831"/>
+            <a:ext cx="230537" cy="201267"/>
           </a:xfrm>
           <a:custGeom>
             <a:avLst/>
@@ -7168,7 +6308,7 @@
           <a:lstStyle/>
           <a:p>
             <a:pPr algn="ctr"/>
-            <a:endParaRPr/>
+            <a:endParaRPr sz="1350"/>
           </a:p>
         </p:txBody>
       </p:sp>
@@ -7180,8 +6320,8 @@
         </p:nvSpPr>
         <p:spPr>
           <a:xfrm>
-            <a:off x="5661757" y="3222941"/>
-            <a:ext cx="306369" cy="306701"/>
+            <a:off x="4246318" y="3274456"/>
+            <a:ext cx="229777" cy="230026"/>
           </a:xfrm>
           <a:custGeom>
             <a:avLst/>
@@ -7331,7 +6471,7 @@
           <a:lstStyle/>
           <a:p>
             <a:pPr algn="ctr"/>
-            <a:endParaRPr/>
+            <a:endParaRPr sz="1350"/>
           </a:p>
         </p:txBody>
       </p:sp>
@@ -7343,8 +6483,8 @@
         </p:nvSpPr>
         <p:spPr>
           <a:xfrm>
-            <a:off x="6705867" y="3223946"/>
-            <a:ext cx="263832" cy="304145"/>
+            <a:off x="5029400" y="3275210"/>
+            <a:ext cx="197874" cy="228109"/>
           </a:xfrm>
           <a:custGeom>
             <a:avLst/>
@@ -7622,7 +6762,7 @@
           <a:lstStyle/>
           <a:p>
             <a:pPr algn="ctr"/>
-            <a:endParaRPr/>
+            <a:endParaRPr sz="1350"/>
           </a:p>
         </p:txBody>
       </p:sp>
@@ -7634,8 +6774,8 @@
         </p:nvSpPr>
         <p:spPr>
           <a:xfrm>
-            <a:off x="7706140" y="3222940"/>
-            <a:ext cx="306693" cy="306948"/>
+            <a:off x="5779605" y="3274455"/>
+            <a:ext cx="230020" cy="230211"/>
           </a:xfrm>
           <a:custGeom>
             <a:avLst/>
@@ -7921,7 +7061,7 @@
           <a:lstStyle/>
           <a:p>
             <a:pPr algn="ctr"/>
-            <a:endParaRPr/>
+            <a:endParaRPr sz="1350"/>
           </a:p>
         </p:txBody>
       </p:sp>
@@ -7933,8 +7073,8 @@
         </p:nvSpPr>
         <p:spPr>
           <a:xfrm>
-            <a:off x="8729983" y="3222813"/>
-            <a:ext cx="304520" cy="307153"/>
+            <a:off x="6547487" y="3274360"/>
+            <a:ext cx="228390" cy="230365"/>
           </a:xfrm>
           <a:custGeom>
             <a:avLst/>
@@ -8402,7 +7542,7 @@
           <a:lstStyle/>
           <a:p>
             <a:pPr algn="ctr"/>
-            <a:endParaRPr/>
+            <a:endParaRPr sz="1350"/>
           </a:p>
         </p:txBody>
       </p:sp>
@@ -8414,8 +7554,8 @@
         </p:nvSpPr>
         <p:spPr>
           <a:xfrm>
-            <a:off x="6176813" y="3737486"/>
-            <a:ext cx="304818" cy="301930"/>
+            <a:off x="4632610" y="3660364"/>
+            <a:ext cx="228614" cy="226448"/>
           </a:xfrm>
           <a:custGeom>
             <a:avLst/>
@@ -8649,7 +7789,7 @@
           <a:lstStyle/>
           <a:p>
             <a:pPr algn="ctr"/>
-            <a:endParaRPr/>
+            <a:endParaRPr sz="1350"/>
           </a:p>
         </p:txBody>
       </p:sp>
@@ -8661,8 +7801,8 @@
         </p:nvSpPr>
         <p:spPr>
           <a:xfrm>
-            <a:off x="7198178" y="3737291"/>
-            <a:ext cx="299034" cy="300295"/>
+            <a:off x="5398633" y="3660219"/>
+            <a:ext cx="224276" cy="225221"/>
           </a:xfrm>
           <a:custGeom>
             <a:avLst/>
@@ -9258,7 +8398,7 @@
           <a:lstStyle/>
           <a:p>
             <a:pPr algn="ctr"/>
-            <a:endParaRPr/>
+            <a:endParaRPr sz="1350"/>
           </a:p>
         </p:txBody>
       </p:sp>
@@ -9270,8 +8410,8 @@
         </p:nvSpPr>
         <p:spPr>
           <a:xfrm>
-            <a:off x="8217295" y="3737418"/>
-            <a:ext cx="307621" cy="299792"/>
+            <a:off x="6162972" y="3660314"/>
+            <a:ext cx="230716" cy="224844"/>
           </a:xfrm>
           <a:custGeom>
             <a:avLst/>
@@ -9491,7 +8631,7 @@
           <a:lstStyle/>
           <a:p>
             <a:pPr algn="ctr"/>
-            <a:endParaRPr/>
+            <a:endParaRPr sz="1350"/>
           </a:p>
         </p:txBody>
       </p:sp>
@@ -9503,8 +8643,8 @@
         </p:nvSpPr>
         <p:spPr>
           <a:xfrm>
-            <a:off x="3105742" y="3734095"/>
-            <a:ext cx="306769" cy="306386"/>
+            <a:off x="2329307" y="3657821"/>
+            <a:ext cx="230077" cy="229790"/>
           </a:xfrm>
           <a:custGeom>
             <a:avLst/>
@@ -9903,7 +9043,7 @@
           <a:lstStyle/>
           <a:p>
             <a:pPr algn="ctr"/>
-            <a:endParaRPr/>
+            <a:endParaRPr sz="1350"/>
           </a:p>
         </p:txBody>
       </p:sp>
@@ -9915,8 +9055,8 @@
         </p:nvSpPr>
         <p:spPr>
           <a:xfrm>
-            <a:off x="4128052" y="3743288"/>
-            <a:ext cx="306948" cy="288300"/>
+            <a:off x="3096039" y="3664716"/>
+            <a:ext cx="230211" cy="216225"/>
           </a:xfrm>
           <a:custGeom>
             <a:avLst/>
@@ -10271,7 +9411,7 @@
           <a:lstStyle/>
           <a:p>
             <a:pPr algn="ctr"/>
-            <a:endParaRPr/>
+            <a:endParaRPr sz="1350"/>
           </a:p>
         </p:txBody>
       </p:sp>
@@ -10283,8 +9423,8 @@
         </p:nvSpPr>
         <p:spPr>
           <a:xfrm>
-            <a:off x="5153557" y="3734088"/>
-            <a:ext cx="299792" cy="307255"/>
+            <a:off x="3865168" y="3657817"/>
+            <a:ext cx="224844" cy="230441"/>
           </a:xfrm>
           <a:custGeom>
             <a:avLst/>
@@ -10688,7 +9828,7 @@
           <a:lstStyle/>
           <a:p>
             <a:pPr algn="ctr"/>
-            <a:endParaRPr/>
+            <a:endParaRPr sz="1350"/>
           </a:p>
         </p:txBody>
       </p:sp>
@@ -10700,8 +9840,8 @@
         </p:nvGrpSpPr>
         <p:grpSpPr>
           <a:xfrm>
-            <a:off x="8511789" y="2323133"/>
-            <a:ext cx="740025" cy="644233"/>
+            <a:off x="6383842" y="2599600"/>
+            <a:ext cx="555019" cy="483175"/>
             <a:chOff x="6530588" y="1236927"/>
             <a:chExt cx="740025" cy="644233"/>
           </a:xfrm>
@@ -10733,7 +9873,7 @@
             <a:p>
               <a:pPr algn="ctr"/>
               <a:r>
-                <a:rPr sz="600">
+                <a:rPr sz="450">
                   <a:solidFill>
                     <a:srgbClr val="384F61"/>
                   </a:solidFill>
@@ -10771,7 +9911,7 @@
             <a:p>
               <a:pPr algn="ctr"/>
               <a:r>
-                <a:rPr sz="600">
+                <a:rPr sz="450">
                   <a:solidFill>
                     <a:srgbClr val="384F61"/>
                   </a:solidFill>
@@ -10809,7 +9949,7 @@
             <a:p>
               <a:pPr algn="ctr"/>
               <a:r>
-                <a:rPr sz="600">
+                <a:rPr sz="450">
                   <a:solidFill>
                     <a:srgbClr val="384F61"/>
                   </a:solidFill>
@@ -10847,7 +9987,7 @@
             <a:p>
               <a:pPr algn="ctr"/>
               <a:r>
-                <a:rPr sz="600">
+                <a:rPr sz="450">
                   <a:solidFill>
                     <a:srgbClr val="384F61"/>
                   </a:solidFill>
@@ -10885,7 +10025,7 @@
             <a:p>
               <a:pPr algn="ctr"/>
               <a:r>
-                <a:rPr sz="600">
+                <a:rPr sz="450">
                   <a:solidFill>
                     <a:srgbClr val="384F61"/>
                   </a:solidFill>
@@ -10923,7 +10063,7 @@
             <a:p>
               <a:pPr algn="ctr"/>
               <a:r>
-                <a:rPr sz="600">
+                <a:rPr sz="450">
                   <a:solidFill>
                     <a:srgbClr val="384F61"/>
                   </a:solidFill>
@@ -10943,8 +10083,8 @@
         </p:nvGrpSpPr>
         <p:grpSpPr>
           <a:xfrm>
-            <a:off x="7479178" y="2430508"/>
-            <a:ext cx="760607" cy="536856"/>
+            <a:off x="5609384" y="2680131"/>
+            <a:ext cx="570455" cy="402642"/>
             <a:chOff x="5497977" y="1344303"/>
             <a:chExt cx="760607" cy="536856"/>
           </a:xfrm>
@@ -10976,7 +10116,7 @@
             <a:p>
               <a:pPr algn="ctr"/>
               <a:r>
-                <a:rPr sz="600">
+                <a:rPr sz="450">
                   <a:solidFill>
                     <a:srgbClr val="384F61"/>
                   </a:solidFill>
@@ -11014,7 +10154,7 @@
             <a:p>
               <a:pPr algn="ctr"/>
               <a:r>
-                <a:rPr sz="600">
+                <a:rPr sz="450">
                   <a:solidFill>
                     <a:srgbClr val="384F61"/>
                   </a:solidFill>
@@ -11052,7 +10192,7 @@
             <a:p>
               <a:pPr algn="ctr"/>
               <a:r>
-                <a:rPr sz="600">
+                <a:rPr sz="450">
                   <a:solidFill>
                     <a:srgbClr val="384F61"/>
                   </a:solidFill>
@@ -11090,7 +10230,7 @@
             <a:p>
               <a:pPr algn="ctr"/>
               <a:r>
-                <a:rPr sz="600">
+                <a:rPr sz="450">
                   <a:solidFill>
                     <a:srgbClr val="384F61"/>
                   </a:solidFill>
@@ -11128,7 +10268,7 @@
             <a:p>
               <a:pPr algn="ctr"/>
               <a:r>
-                <a:rPr sz="600">
+                <a:rPr sz="450">
                   <a:solidFill>
                     <a:srgbClr val="384F61"/>
                   </a:solidFill>
@@ -11148,8 +10288,8 @@
         </p:nvGrpSpPr>
         <p:grpSpPr>
           <a:xfrm>
-            <a:off x="6460463" y="2430508"/>
-            <a:ext cx="753425" cy="536856"/>
+            <a:off x="4845348" y="2680131"/>
+            <a:ext cx="565069" cy="402642"/>
             <a:chOff x="4479262" y="1344303"/>
             <a:chExt cx="753425" cy="536856"/>
           </a:xfrm>
@@ -11181,7 +10321,7 @@
             <a:p>
               <a:pPr algn="ctr"/>
               <a:r>
-                <a:rPr sz="600">
+                <a:rPr sz="450">
                   <a:solidFill>
                     <a:srgbClr val="384F61"/>
                   </a:solidFill>
@@ -11219,7 +10359,7 @@
             <a:p>
               <a:pPr algn="ctr"/>
               <a:r>
-                <a:rPr sz="600">
+                <a:rPr sz="450">
                   <a:solidFill>
                     <a:srgbClr val="384F61"/>
                   </a:solidFill>
@@ -11257,7 +10397,7 @@
             <a:p>
               <a:pPr algn="ctr"/>
               <a:r>
-                <a:rPr sz="600">
+                <a:rPr sz="450">
                   <a:solidFill>
                     <a:srgbClr val="384F61"/>
                   </a:solidFill>
@@ -11295,7 +10435,7 @@
             <a:p>
               <a:pPr algn="ctr"/>
               <a:r>
-                <a:rPr sz="600">
+                <a:rPr sz="450">
                   <a:solidFill>
                     <a:srgbClr val="384F61"/>
                   </a:solidFill>
@@ -11333,7 +10473,7 @@
             <a:p>
               <a:pPr algn="ctr"/>
               <a:r>
-                <a:rPr sz="600">
+                <a:rPr sz="450">
                   <a:solidFill>
                     <a:srgbClr val="384F61"/>
                   </a:solidFill>
@@ -11353,8 +10493,8 @@
         </p:nvGrpSpPr>
         <p:grpSpPr>
           <a:xfrm>
-            <a:off x="5427102" y="2215755"/>
-            <a:ext cx="775516" cy="751610"/>
+            <a:off x="4070327" y="2519066"/>
+            <a:ext cx="581637" cy="563708"/>
             <a:chOff x="3445902" y="1129550"/>
             <a:chExt cx="775516" cy="751610"/>
           </a:xfrm>
@@ -11386,7 +10526,7 @@
             <a:p>
               <a:pPr algn="ctr"/>
               <a:r>
-                <a:rPr sz="600">
+                <a:rPr sz="450">
                   <a:solidFill>
                     <a:srgbClr val="384F61"/>
                   </a:solidFill>
@@ -11424,7 +10564,7 @@
             <a:p>
               <a:pPr algn="ctr"/>
               <a:r>
-                <a:rPr sz="600">
+                <a:rPr sz="450">
                   <a:solidFill>
                     <a:srgbClr val="384F61"/>
                   </a:solidFill>
@@ -11462,7 +10602,7 @@
             <a:p>
               <a:pPr algn="ctr"/>
               <a:r>
-                <a:rPr sz="600">
+                <a:rPr sz="450">
                   <a:solidFill>
                     <a:srgbClr val="384F61"/>
                   </a:solidFill>
@@ -11500,7 +10640,7 @@
             <a:p>
               <a:pPr algn="ctr"/>
               <a:r>
-                <a:rPr sz="600">
+                <a:rPr sz="450">
                   <a:solidFill>
                     <a:srgbClr val="384F61"/>
                   </a:solidFill>
@@ -11538,7 +10678,7 @@
             <a:p>
               <a:pPr algn="ctr"/>
               <a:r>
-                <a:rPr sz="600">
+                <a:rPr sz="450">
                   <a:solidFill>
                     <a:srgbClr val="384F61"/>
                   </a:solidFill>
@@ -11576,7 +10716,7 @@
             <a:p>
               <a:pPr algn="ctr"/>
               <a:r>
-                <a:rPr sz="600">
+                <a:rPr sz="450">
                   <a:solidFill>
                     <a:srgbClr val="384F61"/>
                   </a:solidFill>
@@ -11614,7 +10754,7 @@
             <a:p>
               <a:pPr algn="ctr"/>
               <a:r>
-                <a:rPr sz="600">
+                <a:rPr sz="450">
                   <a:solidFill>
                     <a:srgbClr val="384F61"/>
                   </a:solidFill>
@@ -11634,8 +10774,8 @@
         </p:nvGrpSpPr>
         <p:grpSpPr>
           <a:xfrm>
-            <a:off x="4431107" y="2323133"/>
-            <a:ext cx="722892" cy="644233"/>
+            <a:off x="3323330" y="2599600"/>
+            <a:ext cx="542169" cy="483175"/>
             <a:chOff x="2449907" y="1236927"/>
             <a:chExt cx="722892" cy="644233"/>
           </a:xfrm>
@@ -11667,7 +10807,7 @@
             <a:p>
               <a:pPr algn="ctr"/>
               <a:r>
-                <a:rPr sz="600">
+                <a:rPr sz="450">
                   <a:solidFill>
                     <a:srgbClr val="384F61"/>
                   </a:solidFill>
@@ -11705,7 +10845,7 @@
             <a:p>
               <a:pPr algn="ctr"/>
               <a:r>
-                <a:rPr sz="600">
+                <a:rPr sz="450">
                   <a:solidFill>
                     <a:srgbClr val="384F61"/>
                   </a:solidFill>
@@ -11743,7 +10883,7 @@
             <a:p>
               <a:pPr algn="ctr"/>
               <a:r>
-                <a:rPr sz="600">
+                <a:rPr sz="450">
                   <a:solidFill>
                     <a:srgbClr val="384F61"/>
                   </a:solidFill>
@@ -11781,7 +10921,7 @@
             <a:p>
               <a:pPr algn="ctr"/>
               <a:r>
-                <a:rPr sz="600">
+                <a:rPr sz="450">
                   <a:solidFill>
                     <a:srgbClr val="384F61"/>
                   </a:solidFill>
@@ -11819,7 +10959,7 @@
             <a:p>
               <a:pPr algn="ctr"/>
               <a:r>
-                <a:rPr sz="600">
+                <a:rPr sz="450">
                   <a:solidFill>
                     <a:srgbClr val="384F61"/>
                   </a:solidFill>
@@ -11857,7 +10997,7 @@
             <a:p>
               <a:pPr algn="ctr"/>
               <a:r>
-                <a:rPr sz="600">
+                <a:rPr sz="450">
                   <a:solidFill>
                     <a:srgbClr val="384F61"/>
                   </a:solidFill>
@@ -11877,8 +11017,8 @@
         </p:nvGrpSpPr>
         <p:grpSpPr>
           <a:xfrm>
-            <a:off x="3439415" y="2323133"/>
-            <a:ext cx="661664" cy="644233"/>
+            <a:off x="2579561" y="2599600"/>
+            <a:ext cx="496248" cy="483175"/>
             <a:chOff x="1458215" y="1236927"/>
             <a:chExt cx="661664" cy="644233"/>
           </a:xfrm>
@@ -11910,7 +11050,7 @@
             <a:p>
               <a:pPr algn="ctr"/>
               <a:r>
-                <a:rPr sz="600">
+                <a:rPr sz="450">
                   <a:solidFill>
                     <a:srgbClr val="384F61"/>
                   </a:solidFill>
@@ -11948,7 +11088,7 @@
             <a:p>
               <a:pPr algn="ctr"/>
               <a:r>
-                <a:rPr sz="600">
+                <a:rPr sz="450">
                   <a:solidFill>
                     <a:srgbClr val="384F61"/>
                   </a:solidFill>
@@ -11986,7 +11126,7 @@
             <a:p>
               <a:pPr algn="ctr"/>
               <a:r>
-                <a:rPr sz="600">
+                <a:rPr sz="450">
                   <a:solidFill>
                     <a:srgbClr val="384F61"/>
                   </a:solidFill>
@@ -12024,7 +11164,7 @@
             <a:p>
               <a:pPr algn="ctr"/>
               <a:r>
-                <a:rPr sz="600">
+                <a:rPr sz="450">
                   <a:solidFill>
                     <a:srgbClr val="384F61"/>
                   </a:solidFill>
@@ -12062,7 +11202,7 @@
             <a:p>
               <a:pPr algn="ctr"/>
               <a:r>
-                <a:rPr sz="600">
+                <a:rPr sz="450">
                   <a:solidFill>
                     <a:srgbClr val="384F61"/>
                   </a:solidFill>
@@ -12100,7 +11240,7 @@
             <a:p>
               <a:pPr algn="ctr"/>
               <a:r>
-                <a:rPr sz="600">
+                <a:rPr sz="450">
                   <a:solidFill>
                     <a:srgbClr val="384F61"/>
                   </a:solidFill>
@@ -12120,8 +11260,8 @@
         </p:nvGrpSpPr>
         <p:grpSpPr>
           <a:xfrm>
-            <a:off x="2366118" y="2323133"/>
-            <a:ext cx="763623" cy="644233"/>
+            <a:off x="1774589" y="2599600"/>
+            <a:ext cx="572717" cy="483175"/>
             <a:chOff x="384917" y="1236927"/>
             <a:chExt cx="763623" cy="644233"/>
           </a:xfrm>
@@ -12153,7 +11293,7 @@
             <a:p>
               <a:pPr algn="ctr"/>
               <a:r>
-                <a:rPr sz="600">
+                <a:rPr sz="450">
                   <a:solidFill>
                     <a:srgbClr val="384F61"/>
                   </a:solidFill>
@@ -12191,7 +11331,7 @@
             <a:p>
               <a:pPr algn="ctr"/>
               <a:r>
-                <a:rPr sz="600">
+                <a:rPr sz="450">
                   <a:solidFill>
                     <a:srgbClr val="384F61"/>
                   </a:solidFill>
@@ -12229,7 +11369,7 @@
             <a:p>
               <a:pPr algn="ctr"/>
               <a:r>
-                <a:rPr sz="600">
+                <a:rPr sz="450">
                   <a:solidFill>
                     <a:srgbClr val="384F61"/>
                   </a:solidFill>
@@ -12267,7 +11407,7 @@
             <a:p>
               <a:pPr algn="ctr"/>
               <a:r>
-                <a:rPr sz="600">
+                <a:rPr sz="450">
                   <a:solidFill>
                     <a:srgbClr val="384F61"/>
                   </a:solidFill>
@@ -12305,7 +11445,7 @@
             <a:p>
               <a:pPr algn="ctr"/>
               <a:r>
-                <a:rPr sz="600">
+                <a:rPr sz="450">
                   <a:solidFill>
                     <a:srgbClr val="384F61"/>
                   </a:solidFill>
@@ -12343,7 +11483,7 @@
             <a:p>
               <a:pPr algn="ctr"/>
               <a:r>
-                <a:rPr sz="600">
+                <a:rPr sz="450">
                   <a:solidFill>
                     <a:srgbClr val="384F61"/>
                   </a:solidFill>
@@ -12363,8 +11503,8 @@
         </p:nvGrpSpPr>
         <p:grpSpPr>
           <a:xfrm>
-            <a:off x="7516321" y="2134071"/>
-            <a:ext cx="686336" cy="245319"/>
+            <a:off x="5637241" y="2457804"/>
+            <a:ext cx="514752" cy="183989"/>
             <a:chOff x="5535121" y="1047865"/>
             <a:chExt cx="686336" cy="245319"/>
           </a:xfrm>
@@ -12396,7 +11536,7 @@
             <a:p>
               <a:pPr algn="ctr"/>
               <a:r>
-                <a:rPr sz="700" b="1">
+                <a:rPr sz="525" b="1">
                   <a:solidFill>
                     <a:srgbClr val="384F61"/>
                   </a:solidFill>
@@ -12434,7 +11574,7 @@
             <a:p>
               <a:pPr algn="ctr"/>
               <a:r>
-                <a:rPr sz="700" b="1">
+                <a:rPr sz="525" b="1">
                   <a:solidFill>
                     <a:srgbClr val="384F61"/>
                   </a:solidFill>
@@ -12454,8 +11594,8 @@
         </p:nvGrpSpPr>
         <p:grpSpPr>
           <a:xfrm>
-            <a:off x="6499200" y="2134071"/>
-            <a:ext cx="675951" cy="245319"/>
+            <a:off x="4874401" y="2457804"/>
+            <a:ext cx="506963" cy="183989"/>
             <a:chOff x="4517999" y="1047865"/>
             <a:chExt cx="675951" cy="245319"/>
           </a:xfrm>
@@ -12487,7 +11627,7 @@
             <a:p>
               <a:pPr algn="ctr"/>
               <a:r>
-                <a:rPr sz="700" b="1">
+                <a:rPr sz="525" b="1">
                   <a:solidFill>
                     <a:srgbClr val="384F61"/>
                   </a:solidFill>
@@ -12525,7 +11665,7 @@
             <a:p>
               <a:pPr algn="ctr"/>
               <a:r>
-                <a:rPr sz="700" b="1">
+                <a:rPr sz="525" b="1">
                   <a:solidFill>
                     <a:srgbClr val="384F61"/>
                   </a:solidFill>
@@ -12545,8 +11685,8 @@
         </p:nvGrpSpPr>
         <p:grpSpPr>
           <a:xfrm>
-            <a:off x="8565697" y="2026695"/>
-            <a:ext cx="632196" cy="245319"/>
+            <a:off x="6424273" y="2377272"/>
+            <a:ext cx="474147" cy="183989"/>
             <a:chOff x="6584497" y="940489"/>
             <a:chExt cx="632196" cy="245319"/>
           </a:xfrm>
@@ -12578,7 +11718,7 @@
             <a:p>
               <a:pPr algn="ctr"/>
               <a:r>
-                <a:rPr sz="700" b="1">
+                <a:rPr sz="525" b="1">
                   <a:solidFill>
                     <a:srgbClr val="384F61"/>
                   </a:solidFill>
@@ -12616,7 +11756,7 @@
             <a:p>
               <a:pPr algn="ctr"/>
               <a:r>
-                <a:rPr sz="700" b="1">
+                <a:rPr sz="525" b="1">
                   <a:solidFill>
                     <a:srgbClr val="384F61"/>
                   </a:solidFill>
@@ -12636,8 +11776,8 @@
         </p:nvGrpSpPr>
         <p:grpSpPr>
           <a:xfrm>
-            <a:off x="4441134" y="2026695"/>
-            <a:ext cx="702838" cy="245319"/>
+            <a:off x="3330850" y="2377272"/>
+            <a:ext cx="527129" cy="183989"/>
             <a:chOff x="2459934" y="940489"/>
             <a:chExt cx="702838" cy="245319"/>
           </a:xfrm>
@@ -12669,7 +11809,7 @@
             <a:p>
               <a:pPr algn="ctr"/>
               <a:r>
-                <a:rPr sz="700" b="1">
+                <a:rPr sz="525" b="1">
                   <a:solidFill>
                     <a:srgbClr val="384F61"/>
                   </a:solidFill>
@@ -12707,7 +11847,7 @@
             <a:p>
               <a:pPr algn="ctr"/>
               <a:r>
-                <a:rPr sz="700" b="1">
+                <a:rPr sz="525" b="1">
                   <a:solidFill>
                     <a:srgbClr val="384F61"/>
                   </a:solidFill>
@@ -12727,8 +11867,8 @@
         </p:nvGrpSpPr>
         <p:grpSpPr>
           <a:xfrm>
-            <a:off x="3392339" y="2026695"/>
-            <a:ext cx="755819" cy="245319"/>
+            <a:off x="2544255" y="2377272"/>
+            <a:ext cx="566864" cy="183989"/>
             <a:chOff x="1411138" y="940489"/>
             <a:chExt cx="755819" cy="245319"/>
           </a:xfrm>
@@ -12760,7 +11900,7 @@
             <a:p>
               <a:pPr algn="ctr"/>
               <a:r>
-                <a:rPr sz="700" b="1">
+                <a:rPr sz="525" b="1">
                   <a:solidFill>
                     <a:srgbClr val="384F61"/>
                   </a:solidFill>
@@ -12798,7 +11938,7 @@
             <a:p>
               <a:pPr algn="ctr"/>
               <a:r>
-                <a:rPr sz="700" b="1">
+                <a:rPr sz="525" b="1">
                   <a:solidFill>
                     <a:srgbClr val="384F61"/>
                   </a:solidFill>
@@ -12818,8 +11958,8 @@
         </p:nvGrpSpPr>
         <p:grpSpPr>
           <a:xfrm>
-            <a:off x="5483321" y="1919316"/>
-            <a:ext cx="663079" cy="245319"/>
+            <a:off x="4112491" y="2296738"/>
+            <a:ext cx="497309" cy="183989"/>
             <a:chOff x="3502120" y="833110"/>
             <a:chExt cx="663079" cy="245319"/>
           </a:xfrm>
@@ -12851,7 +11991,7 @@
             <a:p>
               <a:pPr algn="ctr"/>
               <a:r>
-                <a:rPr sz="700" b="1">
+                <a:rPr sz="525" b="1">
                   <a:solidFill>
                     <a:srgbClr val="384F61"/>
                   </a:solidFill>
@@ -12889,7 +12029,7 @@
             <a:p>
               <a:pPr algn="ctr"/>
               <a:r>
-                <a:rPr sz="700" b="1">
+                <a:rPr sz="525" b="1">
                   <a:solidFill>
                     <a:srgbClr val="384F61"/>
                   </a:solidFill>
@@ -12909,8 +12049,8 @@
         </p:nvGrpSpPr>
         <p:grpSpPr>
           <a:xfrm>
-            <a:off x="2471858" y="1904050"/>
-            <a:ext cx="552158" cy="367962"/>
+            <a:off x="1853893" y="2285287"/>
+            <a:ext cx="414119" cy="275972"/>
             <a:chOff x="490658" y="817845"/>
             <a:chExt cx="552158" cy="367962"/>
           </a:xfrm>
@@ -12942,7 +12082,7 @@
             <a:p>
               <a:pPr algn="ctr"/>
               <a:r>
-                <a:rPr sz="700" b="1">
+                <a:rPr sz="525" b="1">
                   <a:solidFill>
                     <a:srgbClr val="384F61"/>
                   </a:solidFill>
@@ -12980,7 +12120,7 @@
             <a:p>
               <a:pPr algn="ctr"/>
               <a:r>
-                <a:rPr sz="700" b="1">
+                <a:rPr sz="525" b="1">
                   <a:solidFill>
                     <a:srgbClr val="384F61"/>
                   </a:solidFill>
@@ -13018,7 +12158,7 @@
             <a:p>
               <a:pPr algn="ctr"/>
               <a:r>
-                <a:rPr sz="700" b="1">
+                <a:rPr sz="525" b="1">
                   <a:solidFill>
                     <a:srgbClr val="384F61"/>
                   </a:solidFill>
@@ -13038,8 +12178,8 @@
         </p:nvGrpSpPr>
         <p:grpSpPr>
           <a:xfrm>
-            <a:off x="2903494" y="4296365"/>
-            <a:ext cx="711178" cy="245319"/>
+            <a:off x="2177620" y="4079524"/>
+            <a:ext cx="533384" cy="183989"/>
             <a:chOff x="922294" y="3210159"/>
             <a:chExt cx="711178" cy="245319"/>
           </a:xfrm>
@@ -13071,7 +12211,7 @@
             <a:p>
               <a:pPr algn="ctr"/>
               <a:r>
-                <a:rPr sz="700" b="1">
+                <a:rPr sz="525" b="1">
                   <a:solidFill>
                     <a:srgbClr val="384F61"/>
                   </a:solidFill>
@@ -13109,7 +12249,7 @@
             <a:p>
               <a:pPr algn="ctr"/>
               <a:r>
-                <a:rPr sz="700" b="1">
+                <a:rPr sz="525" b="1">
                   <a:solidFill>
                     <a:srgbClr val="384F61"/>
                   </a:solidFill>
@@ -13129,8 +12269,8 @@
         </p:nvGrpSpPr>
         <p:grpSpPr>
           <a:xfrm>
-            <a:off x="4005324" y="4296364"/>
-            <a:ext cx="552158" cy="367962"/>
+            <a:off x="3003993" y="4079523"/>
+            <a:ext cx="414119" cy="275972"/>
             <a:chOff x="2024124" y="3210159"/>
             <a:chExt cx="552158" cy="367962"/>
           </a:xfrm>
@@ -13162,7 +12302,7 @@
             <a:p>
               <a:pPr algn="ctr"/>
               <a:r>
-                <a:rPr sz="700" b="1">
+                <a:rPr sz="525" b="1">
                   <a:solidFill>
                     <a:srgbClr val="384F61"/>
                   </a:solidFill>
@@ -13200,7 +12340,7 @@
             <a:p>
               <a:pPr algn="ctr"/>
               <a:r>
-                <a:rPr sz="700" b="1">
+                <a:rPr sz="525" b="1">
                   <a:solidFill>
                     <a:srgbClr val="384F61"/>
                   </a:solidFill>
@@ -13238,7 +12378,7 @@
             <a:p>
               <a:pPr algn="ctr"/>
               <a:r>
-                <a:rPr sz="700" b="1">
+                <a:rPr sz="525" b="1">
                   <a:solidFill>
                     <a:srgbClr val="384F61"/>
                   </a:solidFill>
@@ -13258,8 +12398,8 @@
         </p:nvGrpSpPr>
         <p:grpSpPr>
           <a:xfrm>
-            <a:off x="4922959" y="4296365"/>
-            <a:ext cx="761493" cy="245319"/>
+            <a:off x="3692220" y="4079524"/>
+            <a:ext cx="571120" cy="183989"/>
             <a:chOff x="2941758" y="3210159"/>
             <a:chExt cx="761493" cy="245319"/>
           </a:xfrm>
@@ -13291,7 +12431,7 @@
             <a:p>
               <a:pPr algn="ctr"/>
               <a:r>
-                <a:rPr sz="700" b="1">
+                <a:rPr sz="525" b="1">
                   <a:solidFill>
                     <a:srgbClr val="384F61"/>
                   </a:solidFill>
@@ -13329,7 +12469,7 @@
             <a:p>
               <a:pPr algn="ctr"/>
               <a:r>
-                <a:rPr sz="700" b="1">
+                <a:rPr sz="525" b="1">
                   <a:solidFill>
                     <a:srgbClr val="384F61"/>
                   </a:solidFill>
@@ -13349,8 +12489,8 @@
         </p:nvGrpSpPr>
         <p:grpSpPr>
           <a:xfrm>
-            <a:off x="6009120" y="4296364"/>
-            <a:ext cx="633798" cy="367962"/>
+            <a:off x="4506840" y="4079523"/>
+            <a:ext cx="475349" cy="275972"/>
             <a:chOff x="4027920" y="3210159"/>
             <a:chExt cx="633798" cy="367962"/>
           </a:xfrm>
@@ -13382,7 +12522,7 @@
             <a:p>
               <a:pPr algn="ctr"/>
               <a:r>
-                <a:rPr sz="700" b="1">
+                <a:rPr sz="525" b="1">
                   <a:solidFill>
                     <a:srgbClr val="384F61"/>
                   </a:solidFill>
@@ -13420,7 +12560,7 @@
             <a:p>
               <a:pPr algn="ctr"/>
               <a:r>
-                <a:rPr sz="700" b="1">
+                <a:rPr sz="525" b="1">
                   <a:solidFill>
                     <a:srgbClr val="384F61"/>
                   </a:solidFill>
@@ -13458,7 +12598,7 @@
             <a:p>
               <a:pPr algn="ctr"/>
               <a:r>
-                <a:rPr sz="700" b="1">
+                <a:rPr sz="525" b="1">
                   <a:solidFill>
                     <a:srgbClr val="384F61"/>
                   </a:solidFill>
@@ -13478,8 +12618,8 @@
         </p:nvGrpSpPr>
         <p:grpSpPr>
           <a:xfrm>
-            <a:off x="7091867" y="4296364"/>
-            <a:ext cx="512927" cy="367962"/>
+            <a:off x="5318901" y="4079523"/>
+            <a:ext cx="384695" cy="275972"/>
             <a:chOff x="5110666" y="3210159"/>
             <a:chExt cx="512927" cy="367962"/>
           </a:xfrm>
@@ -13511,7 +12651,7 @@
             <a:p>
               <a:pPr algn="ctr"/>
               <a:r>
-                <a:rPr sz="700" b="1">
+                <a:rPr sz="525" b="1">
                   <a:solidFill>
                     <a:srgbClr val="384F61"/>
                   </a:solidFill>
@@ -13549,7 +12689,7 @@
             <a:p>
               <a:pPr algn="ctr"/>
               <a:r>
-                <a:rPr sz="700" b="1">
+                <a:rPr sz="525" b="1">
                   <a:solidFill>
                     <a:srgbClr val="384F61"/>
                   </a:solidFill>
@@ -13587,7 +12727,7 @@
             <a:p>
               <a:pPr algn="ctr"/>
               <a:r>
-                <a:rPr sz="700" b="1">
+                <a:rPr sz="525" b="1">
                   <a:solidFill>
                     <a:srgbClr val="384F61"/>
                   </a:solidFill>
@@ -13607,8 +12747,8 @@
         </p:nvGrpSpPr>
         <p:grpSpPr>
           <a:xfrm>
-            <a:off x="8079384" y="4296364"/>
-            <a:ext cx="582504" cy="367962"/>
+            <a:off x="6059538" y="4079523"/>
+            <a:ext cx="436878" cy="275972"/>
             <a:chOff x="6098184" y="3210159"/>
             <a:chExt cx="582504" cy="367962"/>
           </a:xfrm>
@@ -13640,7 +12780,7 @@
             <a:p>
               <a:pPr algn="ctr"/>
               <a:r>
-                <a:rPr sz="700" b="1">
+                <a:rPr sz="525" b="1">
                   <a:solidFill>
                     <a:srgbClr val="384F61"/>
                   </a:solidFill>
@@ -13678,7 +12818,7 @@
             <a:p>
               <a:pPr algn="ctr"/>
               <a:r>
-                <a:rPr sz="700" b="1">
+                <a:rPr sz="525" b="1">
                   <a:solidFill>
                     <a:srgbClr val="384F61"/>
                   </a:solidFill>
@@ -13716,7 +12856,7 @@
             <a:p>
               <a:pPr algn="ctr"/>
               <a:r>
-                <a:rPr sz="700" b="1">
+                <a:rPr sz="525" b="1">
                   <a:solidFill>
                     <a:srgbClr val="384F61"/>
                   </a:solidFill>
@@ -13736,8 +12876,8 @@
         </p:nvGrpSpPr>
         <p:grpSpPr>
           <a:xfrm>
-            <a:off x="9125302" y="4296365"/>
-            <a:ext cx="535290" cy="245319"/>
+            <a:off x="6843976" y="4079524"/>
+            <a:ext cx="401468" cy="183989"/>
             <a:chOff x="7144102" y="3210159"/>
             <a:chExt cx="535290" cy="245319"/>
           </a:xfrm>
@@ -13769,7 +12909,7 @@
             <a:p>
               <a:pPr algn="ctr"/>
               <a:r>
-                <a:rPr sz="700" b="1">
+                <a:rPr sz="525" b="1">
                   <a:solidFill>
                     <a:srgbClr val="384F61"/>
                   </a:solidFill>
@@ -13807,7 +12947,7 @@
             <a:p>
               <a:pPr algn="ctr"/>
               <a:r>
-                <a:rPr sz="700" b="1">
+                <a:rPr sz="525" b="1">
                   <a:solidFill>
                     <a:srgbClr val="384F61"/>
                   </a:solidFill>
@@ -13827,8 +12967,8 @@
         </p:nvGrpSpPr>
         <p:grpSpPr>
           <a:xfrm>
-            <a:off x="2868089" y="4592805"/>
-            <a:ext cx="781999" cy="644233"/>
+            <a:off x="2151067" y="4301854"/>
+            <a:ext cx="586499" cy="483175"/>
             <a:chOff x="886888" y="3506599"/>
             <a:chExt cx="781999" cy="644233"/>
           </a:xfrm>
@@ -13860,7 +13000,7 @@
             <a:p>
               <a:pPr algn="ctr"/>
               <a:r>
-                <a:rPr sz="600">
+                <a:rPr sz="450">
                   <a:solidFill>
                     <a:srgbClr val="384F61"/>
                   </a:solidFill>
@@ -13898,7 +13038,7 @@
             <a:p>
               <a:pPr algn="ctr"/>
               <a:r>
-                <a:rPr sz="600">
+                <a:rPr sz="450">
                   <a:solidFill>
                     <a:srgbClr val="384F61"/>
                   </a:solidFill>
@@ -13936,7 +13076,7 @@
             <a:p>
               <a:pPr algn="ctr"/>
               <a:r>
-                <a:rPr sz="600">
+                <a:rPr sz="450">
                   <a:solidFill>
                     <a:srgbClr val="384F61"/>
                   </a:solidFill>
@@ -13974,7 +13114,7 @@
             <a:p>
               <a:pPr algn="ctr"/>
               <a:r>
-                <a:rPr sz="600">
+                <a:rPr sz="450">
                   <a:solidFill>
                     <a:srgbClr val="384F61"/>
                   </a:solidFill>
@@ -14012,7 +13152,7 @@
             <a:p>
               <a:pPr algn="ctr"/>
               <a:r>
-                <a:rPr sz="600">
+                <a:rPr sz="450">
                   <a:solidFill>
                     <a:srgbClr val="384F61"/>
                   </a:solidFill>
@@ -14050,7 +13190,7 @@
             <a:p>
               <a:pPr algn="ctr"/>
               <a:r>
-                <a:rPr sz="600">
+                <a:rPr sz="450">
                   <a:solidFill>
                     <a:srgbClr val="384F61"/>
                   </a:solidFill>
@@ -14070,8 +13210,8 @@
         </p:nvGrpSpPr>
         <p:grpSpPr>
           <a:xfrm>
-            <a:off x="4979440" y="4592802"/>
-            <a:ext cx="648528" cy="536856"/>
+            <a:off x="3734580" y="4301852"/>
+            <a:ext cx="486396" cy="402642"/>
             <a:chOff x="2998240" y="3506597"/>
             <a:chExt cx="648528" cy="536856"/>
           </a:xfrm>
@@ -14103,7 +13243,7 @@
             <a:p>
               <a:pPr algn="ctr"/>
               <a:r>
-                <a:rPr sz="600">
+                <a:rPr sz="450">
                   <a:solidFill>
                     <a:srgbClr val="384F61"/>
                   </a:solidFill>
@@ -14141,7 +13281,7 @@
             <a:p>
               <a:pPr algn="ctr"/>
               <a:r>
-                <a:rPr sz="600">
+                <a:rPr sz="450">
                   <a:solidFill>
                     <a:srgbClr val="384F61"/>
                   </a:solidFill>
@@ -14179,7 +13319,7 @@
             <a:p>
               <a:pPr algn="ctr"/>
               <a:r>
-                <a:rPr sz="600">
+                <a:rPr sz="450">
                   <a:solidFill>
                     <a:srgbClr val="384F61"/>
                   </a:solidFill>
@@ -14217,7 +13357,7 @@
             <a:p>
               <a:pPr algn="ctr"/>
               <a:r>
-                <a:rPr sz="600">
+                <a:rPr sz="450">
                   <a:solidFill>
                     <a:srgbClr val="384F61"/>
                   </a:solidFill>
@@ -14255,7 +13395,7 @@
             <a:p>
               <a:pPr algn="ctr"/>
               <a:r>
-                <a:rPr sz="600">
+                <a:rPr sz="450">
                   <a:solidFill>
                     <a:srgbClr val="384F61"/>
                   </a:solidFill>
@@ -14275,8 +13415,8 @@
         </p:nvGrpSpPr>
         <p:grpSpPr>
           <a:xfrm>
-            <a:off x="9007984" y="4592805"/>
-            <a:ext cx="769927" cy="644233"/>
+            <a:off x="6755989" y="4301854"/>
+            <a:ext cx="577445" cy="483175"/>
             <a:chOff x="7026783" y="3506599"/>
             <a:chExt cx="769927" cy="644233"/>
           </a:xfrm>
@@ -14308,7 +13448,7 @@
             <a:p>
               <a:pPr algn="ctr"/>
               <a:r>
-                <a:rPr sz="600">
+                <a:rPr sz="450">
                   <a:solidFill>
                     <a:srgbClr val="384F61"/>
                   </a:solidFill>
@@ -14346,7 +13486,7 @@
             <a:p>
               <a:pPr algn="ctr"/>
               <a:r>
-                <a:rPr sz="600">
+                <a:rPr sz="450">
                   <a:solidFill>
                     <a:srgbClr val="384F61"/>
                   </a:solidFill>
@@ -14384,7 +13524,7 @@
             <a:p>
               <a:pPr algn="ctr"/>
               <a:r>
-                <a:rPr sz="600">
+                <a:rPr sz="450">
                   <a:solidFill>
                     <a:srgbClr val="384F61"/>
                   </a:solidFill>
@@ -14422,7 +13562,7 @@
             <a:p>
               <a:pPr algn="ctr"/>
               <a:r>
-                <a:rPr sz="600">
+                <a:rPr sz="450">
                   <a:solidFill>
                     <a:srgbClr val="384F61"/>
                   </a:solidFill>
@@ -14460,7 +13600,7 @@
             <a:p>
               <a:pPr algn="ctr"/>
               <a:r>
-                <a:rPr sz="600">
+                <a:rPr sz="450">
                   <a:solidFill>
                     <a:srgbClr val="384F61"/>
                   </a:solidFill>
@@ -14498,7 +13638,7 @@
             <a:p>
               <a:pPr algn="ctr"/>
               <a:r>
-                <a:rPr sz="600">
+                <a:rPr sz="450">
                   <a:solidFill>
                     <a:srgbClr val="384F61"/>
                   </a:solidFill>
@@ -14518,8 +13658,8 @@
         </p:nvGrpSpPr>
         <p:grpSpPr>
           <a:xfrm>
-            <a:off x="3897812" y="4715446"/>
-            <a:ext cx="767175" cy="644233"/>
+            <a:off x="2923360" y="4393835"/>
+            <a:ext cx="575381" cy="483175"/>
             <a:chOff x="1916611" y="3629240"/>
             <a:chExt cx="767175" cy="644233"/>
           </a:xfrm>
@@ -14551,7 +13691,7 @@
             <a:p>
               <a:pPr algn="ctr"/>
               <a:r>
-                <a:rPr sz="600">
+                <a:rPr sz="450">
                   <a:solidFill>
                     <a:srgbClr val="384F61"/>
                   </a:solidFill>
@@ -14589,7 +13729,7 @@
             <a:p>
               <a:pPr algn="ctr"/>
               <a:r>
-                <a:rPr sz="600">
+                <a:rPr sz="450">
                   <a:solidFill>
                     <a:srgbClr val="384F61"/>
                   </a:solidFill>
@@ -14627,7 +13767,7 @@
             <a:p>
               <a:pPr algn="ctr"/>
               <a:r>
-                <a:rPr sz="600">
+                <a:rPr sz="450">
                   <a:solidFill>
                     <a:srgbClr val="384F61"/>
                   </a:solidFill>
@@ -14665,7 +13805,7 @@
             <a:p>
               <a:pPr algn="ctr"/>
               <a:r>
-                <a:rPr sz="600">
+                <a:rPr sz="450">
                   <a:solidFill>
                     <a:srgbClr val="384F61"/>
                   </a:solidFill>
@@ -14703,7 +13843,7 @@
             <a:p>
               <a:pPr algn="ctr"/>
               <a:r>
-                <a:rPr sz="600">
+                <a:rPr sz="450">
                   <a:solidFill>
                     <a:srgbClr val="384F61"/>
                   </a:solidFill>
@@ -14741,7 +13881,7 @@
             <a:p>
               <a:pPr algn="ctr"/>
               <a:r>
-                <a:rPr sz="600">
+                <a:rPr sz="450">
                   <a:solidFill>
                     <a:srgbClr val="384F61"/>
                   </a:solidFill>
@@ -14761,8 +13901,8 @@
         </p:nvGrpSpPr>
         <p:grpSpPr>
           <a:xfrm>
-            <a:off x="6014845" y="4715446"/>
-            <a:ext cx="622348" cy="644233"/>
+            <a:off x="4511134" y="4393835"/>
+            <a:ext cx="466761" cy="483175"/>
             <a:chOff x="4033645" y="3629240"/>
             <a:chExt cx="622348" cy="644233"/>
           </a:xfrm>
@@ -14794,7 +13934,7 @@
             <a:p>
               <a:pPr algn="ctr"/>
               <a:r>
-                <a:rPr sz="600">
+                <a:rPr sz="450">
                   <a:solidFill>
                     <a:srgbClr val="384F61"/>
                   </a:solidFill>
@@ -14832,7 +13972,7 @@
             <a:p>
               <a:pPr algn="ctr"/>
               <a:r>
-                <a:rPr sz="600">
+                <a:rPr sz="450">
                   <a:solidFill>
                     <a:srgbClr val="384F61"/>
                   </a:solidFill>
@@ -14870,7 +14010,7 @@
             <a:p>
               <a:pPr algn="ctr"/>
               <a:r>
-                <a:rPr sz="600">
+                <a:rPr sz="450">
                   <a:solidFill>
                     <a:srgbClr val="384F61"/>
                   </a:solidFill>
@@ -14908,7 +14048,7 @@
             <a:p>
               <a:pPr algn="ctr"/>
               <a:r>
-                <a:rPr sz="600">
+                <a:rPr sz="450">
                   <a:solidFill>
                     <a:srgbClr val="384F61"/>
                   </a:solidFill>
@@ -14946,7 +14086,7 @@
             <a:p>
               <a:pPr algn="ctr"/>
               <a:r>
-                <a:rPr sz="600">
+                <a:rPr sz="450">
                   <a:solidFill>
                     <a:srgbClr val="384F61"/>
                   </a:solidFill>
@@ -14984,7 +14124,7 @@
             <a:p>
               <a:pPr algn="ctr"/>
               <a:r>
-                <a:rPr sz="600">
+                <a:rPr sz="450">
                   <a:solidFill>
                     <a:srgbClr val="384F61"/>
                   </a:solidFill>
@@ -15004,8 +14144,8 @@
         </p:nvGrpSpPr>
         <p:grpSpPr>
           <a:xfrm>
-            <a:off x="6975306" y="4715446"/>
-            <a:ext cx="746056" cy="644233"/>
+            <a:off x="5231480" y="4393835"/>
+            <a:ext cx="559542" cy="483175"/>
             <a:chOff x="4994106" y="3629240"/>
             <a:chExt cx="746056" cy="644233"/>
           </a:xfrm>
@@ -15037,7 +14177,7 @@
             <a:p>
               <a:pPr algn="ctr"/>
               <a:r>
-                <a:rPr sz="600">
+                <a:rPr sz="450">
                   <a:solidFill>
                     <a:srgbClr val="384F61"/>
                   </a:solidFill>
@@ -15075,7 +14215,7 @@
             <a:p>
               <a:pPr algn="ctr"/>
               <a:r>
-                <a:rPr sz="600">
+                <a:rPr sz="450">
                   <a:solidFill>
                     <a:srgbClr val="384F61"/>
                   </a:solidFill>
@@ -15113,7 +14253,7 @@
             <a:p>
               <a:pPr algn="ctr"/>
               <a:r>
-                <a:rPr sz="600">
+                <a:rPr sz="450">
                   <a:solidFill>
                     <a:srgbClr val="384F61"/>
                   </a:solidFill>
@@ -15151,7 +14291,7 @@
             <a:p>
               <a:pPr algn="ctr"/>
               <a:r>
-                <a:rPr sz="600">
+                <a:rPr sz="450">
                   <a:solidFill>
                     <a:srgbClr val="384F61"/>
                   </a:solidFill>
@@ -15189,7 +14329,7 @@
             <a:p>
               <a:pPr algn="ctr"/>
               <a:r>
-                <a:rPr sz="600">
+                <a:rPr sz="450">
                   <a:solidFill>
                     <a:srgbClr val="384F61"/>
                   </a:solidFill>
@@ -15227,7 +14367,7 @@
             <a:p>
               <a:pPr algn="ctr"/>
               <a:r>
-                <a:rPr sz="600">
+                <a:rPr sz="450">
                   <a:solidFill>
                     <a:srgbClr val="384F61"/>
                   </a:solidFill>
@@ -15247,8 +14387,8 @@
         </p:nvGrpSpPr>
         <p:grpSpPr>
           <a:xfrm>
-            <a:off x="7998545" y="4715445"/>
-            <a:ext cx="744190" cy="536856"/>
+            <a:off x="5998909" y="4393834"/>
+            <a:ext cx="558143" cy="402642"/>
             <a:chOff x="6017345" y="3629240"/>
             <a:chExt cx="744190" cy="536856"/>
           </a:xfrm>
@@ -15280,7 +14420,7 @@
             <a:p>
               <a:pPr algn="ctr"/>
               <a:r>
-                <a:rPr sz="600">
+                <a:rPr sz="450">
                   <a:solidFill>
                     <a:srgbClr val="384F61"/>
                   </a:solidFill>
@@ -15318,7 +14458,7 @@
             <a:p>
               <a:pPr algn="ctr"/>
               <a:r>
-                <a:rPr sz="600">
+                <a:rPr sz="450">
                   <a:solidFill>
                     <a:srgbClr val="384F61"/>
                   </a:solidFill>
@@ -15356,7 +14496,7 @@
             <a:p>
               <a:pPr algn="ctr"/>
               <a:r>
-                <a:rPr sz="600">
+                <a:rPr sz="450">
                   <a:solidFill>
                     <a:srgbClr val="384F61"/>
                   </a:solidFill>
@@ -15394,7 +14534,7 @@
             <a:p>
               <a:pPr algn="ctr"/>
               <a:r>
-                <a:rPr sz="600">
+                <a:rPr sz="450">
                   <a:solidFill>
                     <a:srgbClr val="384F61"/>
                   </a:solidFill>
@@ -15432,7 +14572,7 @@
             <a:p>
               <a:pPr algn="ctr"/>
               <a:r>
-                <a:rPr sz="600">
+                <a:rPr sz="450">
                   <a:solidFill>
                     <a:srgbClr val="384F61"/>
                   </a:solidFill>
@@ -15452,8 +14592,8 @@
         </p:nvSpPr>
         <p:spPr>
           <a:xfrm>
-            <a:off x="4385402" y="1495128"/>
-            <a:ext cx="3421187" cy="204462"/>
+            <a:off x="3289052" y="1978596"/>
+            <a:ext cx="2565890" cy="153347"/>
           </a:xfrm>
           <a:prstGeom prst="rect">
             <a:avLst/>
@@ -15471,7 +14611,7 @@
           <a:p>
             <a:pPr algn="ctr"/>
             <a:r>
-              <a:rPr sz="1200" b="1">
+              <a:rPr sz="900" b="1">
                 <a:solidFill>
                   <a:srgbClr val="384F61"/>
                 </a:solidFill>
@@ -15479,6 +14619,837 @@
               </a:rPr>
               <a:t>DevOps Migration Assessment Structure</a:t>
             </a:r>
+          </a:p>
+        </p:txBody>
+      </p:sp>
+    </p:spTree>
+  </p:cSld>
+  <p:clrMapOvr>
+    <a:masterClrMapping/>
+  </p:clrMapOvr>
+</p:sld>
+</file>
+
+<file path=ppt/slides/slide18.xml><?xml version="1.0" encoding="utf-8"?>
+<p:sld xmlns:a="http://schemas.openxmlformats.org/drawingml/2006/main" xmlns:r="http://schemas.openxmlformats.org/officeDocument/2006/relationships" xmlns:p="http://schemas.openxmlformats.org/presentationml/2006/main">
+  <p:cSld>
+    <p:spTree>
+      <p:nvGrpSpPr>
+        <p:cNvPr id="1" name=""/>
+        <p:cNvGrpSpPr/>
+        <p:nvPr/>
+      </p:nvGrpSpPr>
+      <p:grpSpPr>
+        <a:xfrm>
+          <a:off x="0" y="0"/>
+          <a:ext cx="0" cy="0"/>
+          <a:chOff x="0" y="0"/>
+          <a:chExt cx="0" cy="0"/>
+        </a:xfrm>
+      </p:grpSpPr>
+      <p:sp>
+        <p:nvSpPr>
+          <p:cNvPr id="2" name="Title 1"/>
+          <p:cNvSpPr>
+            <a:spLocks noGrp="1"/>
+          </p:cNvSpPr>
+          <p:nvPr>
+            <p:ph type="title"/>
+          </p:nvPr>
+        </p:nvSpPr>
+        <p:spPr/>
+        <p:txBody>
+          <a:bodyPr/>
+          <a:lstStyle/>
+          <a:p>
+            <a:r>
+              <a:t>Hypercare &amp; Support</a:t>
+            </a:r>
+          </a:p>
+        </p:txBody>
+      </p:sp>
+      <p:sp>
+        <p:nvSpPr>
+          <p:cNvPr id="3" name="TextBox 2"/>
+          <p:cNvSpPr txBox="1"/>
+          <p:nvPr/>
+        </p:nvSpPr>
+        <p:spPr>
+          <a:xfrm>
+            <a:off x="640080" y="1536700"/>
+            <a:ext cx="7772400" cy="4572000"/>
+          </a:xfrm>
+          <a:prstGeom prst="rect">
+            <a:avLst/>
+          </a:prstGeom>
+          <a:noFill/>
+        </p:spPr>
+        <p:txBody>
+          <a:bodyPr wrap="none">
+            <a:spAutoFit/>
+          </a:bodyPr>
+          <a:lstStyle/>
+          <a:p>
+            <a:pPr>
+              <a:defRPr sz="2200"/>
+            </a:pPr>
+            <a:r>
+              <a:rPr dirty="0"/>
+              <a:t>• 24x7 support, KT, runbooks, incident management</a:t>
+            </a:r>
+          </a:p>
+        </p:txBody>
+      </p:sp>
+    </p:spTree>
+  </p:cSld>
+  <p:clrMapOvr>
+    <a:masterClrMapping/>
+  </p:clrMapOvr>
+</p:sld>
+</file>
+
+<file path=ppt/slides/slide19.xml><?xml version="1.0" encoding="utf-8"?>
+<p:sld xmlns:a="http://schemas.openxmlformats.org/drawingml/2006/main" xmlns:r="http://schemas.openxmlformats.org/officeDocument/2006/relationships" xmlns:p="http://schemas.openxmlformats.org/presentationml/2006/main">
+  <p:cSld>
+    <p:spTree>
+      <p:nvGrpSpPr>
+        <p:cNvPr id="1" name=""/>
+        <p:cNvGrpSpPr/>
+        <p:nvPr/>
+      </p:nvGrpSpPr>
+      <p:grpSpPr>
+        <a:xfrm>
+          <a:off x="0" y="0"/>
+          <a:ext cx="0" cy="0"/>
+          <a:chOff x="0" y="0"/>
+          <a:chExt cx="0" cy="0"/>
+        </a:xfrm>
+      </p:grpSpPr>
+      <p:sp>
+        <p:nvSpPr>
+          <p:cNvPr id="2" name="Title 1"/>
+          <p:cNvSpPr>
+            <a:spLocks noGrp="1"/>
+          </p:cNvSpPr>
+          <p:nvPr>
+            <p:ph type="title"/>
+          </p:nvPr>
+        </p:nvSpPr>
+        <p:spPr/>
+        <p:txBody>
+          <a:bodyPr/>
+          <a:lstStyle/>
+          <a:p>
+            <a:r>
+              <a:t>Risks &amp; Mitigations</a:t>
+            </a:r>
+          </a:p>
+        </p:txBody>
+      </p:sp>
+      <p:sp>
+        <p:nvSpPr>
+          <p:cNvPr id="3" name="TextBox 2"/>
+          <p:cNvSpPr txBox="1"/>
+          <p:nvPr/>
+        </p:nvSpPr>
+        <p:spPr>
+          <a:xfrm>
+            <a:off x="457200" y="1443038"/>
+            <a:ext cx="7772400" cy="4572000"/>
+          </a:xfrm>
+          <a:prstGeom prst="rect">
+            <a:avLst/>
+          </a:prstGeom>
+          <a:noFill/>
+        </p:spPr>
+        <p:txBody>
+          <a:bodyPr wrap="none">
+            <a:spAutoFit/>
+          </a:bodyPr>
+          <a:lstStyle/>
+          <a:p>
+            <a:pPr>
+              <a:defRPr sz="2200"/>
+            </a:pPr>
+            <a:r>
+              <a:rPr dirty="0"/>
+              <a:t>• Top technical, schedule and adoption risks with mitigations</a:t>
+            </a:r>
+          </a:p>
+        </p:txBody>
+      </p:sp>
+    </p:spTree>
+  </p:cSld>
+  <p:clrMapOvr>
+    <a:masterClrMapping/>
+  </p:clrMapOvr>
+</p:sld>
+</file>
+
+<file path=ppt/slides/slide2.xml><?xml version="1.0" encoding="utf-8"?>
+<p:sld xmlns:a="http://schemas.openxmlformats.org/drawingml/2006/main" xmlns:r="http://schemas.openxmlformats.org/officeDocument/2006/relationships" xmlns:p="http://schemas.openxmlformats.org/presentationml/2006/main">
+  <p:cSld>
+    <p:spTree>
+      <p:nvGrpSpPr>
+        <p:cNvPr id="1" name=""/>
+        <p:cNvGrpSpPr/>
+        <p:nvPr/>
+      </p:nvGrpSpPr>
+      <p:grpSpPr>
+        <a:xfrm>
+          <a:off x="0" y="0"/>
+          <a:ext cx="0" cy="0"/>
+          <a:chOff x="0" y="0"/>
+          <a:chExt cx="0" cy="0"/>
+        </a:xfrm>
+      </p:grpSpPr>
+      <p:sp>
+        <p:nvSpPr>
+          <p:cNvPr id="2" name="Title 1"/>
+          <p:cNvSpPr>
+            <a:spLocks noGrp="1"/>
+          </p:cNvSpPr>
+          <p:nvPr>
+            <p:ph type="title"/>
+          </p:nvPr>
+        </p:nvSpPr>
+        <p:spPr/>
+        <p:txBody>
+          <a:bodyPr>
+            <a:normAutofit fontScale="90000"/>
+          </a:bodyPr>
+          <a:lstStyle/>
+          <a:p>
+            <a:r>
+              <a:rPr dirty="0"/>
+              <a:t>Executive Summary</a:t>
+            </a:r>
+            <a:br>
+              <a:rPr lang="en-US" dirty="0"/>
+            </a:br>
+            <a:endParaRPr dirty="0"/>
+          </a:p>
+        </p:txBody>
+      </p:sp>
+      <p:sp>
+        <p:nvSpPr>
+          <p:cNvPr id="3" name="TextBox 2"/>
+          <p:cNvSpPr txBox="1"/>
+          <p:nvPr/>
+        </p:nvSpPr>
+        <p:spPr>
+          <a:xfrm>
+            <a:off x="640080" y="914400"/>
+            <a:ext cx="5922262" cy="1107996"/>
+          </a:xfrm>
+          <a:prstGeom prst="rect">
+            <a:avLst/>
+          </a:prstGeom>
+          <a:noFill/>
+        </p:spPr>
+        <p:txBody>
+          <a:bodyPr wrap="none">
+            <a:spAutoFit/>
+          </a:bodyPr>
+          <a:lstStyle/>
+          <a:p>
+            <a:pPr>
+              <a:defRPr sz="2200"/>
+            </a:pPr>
+            <a:endParaRPr lang="en-US" dirty="0"/>
+          </a:p>
+          <a:p>
+            <a:pPr>
+              <a:defRPr sz="2200"/>
+            </a:pPr>
+            <a:endParaRPr lang="en-GB" dirty="0"/>
+          </a:p>
+          <a:p>
+            <a:pPr>
+              <a:defRPr sz="2200"/>
+            </a:pPr>
+            <a:r>
+              <a:rPr dirty="0"/>
+              <a:t>•Objectives, scope, readiness, expected outcomes</a:t>
+            </a:r>
+          </a:p>
+        </p:txBody>
+      </p:sp>
+    </p:spTree>
+  </p:cSld>
+  <p:clrMapOvr>
+    <a:masterClrMapping/>
+  </p:clrMapOvr>
+</p:sld>
+</file>
+
+<file path=ppt/slides/slide20.xml><?xml version="1.0" encoding="utf-8"?>
+<p:sld xmlns:a="http://schemas.openxmlformats.org/drawingml/2006/main" xmlns:r="http://schemas.openxmlformats.org/officeDocument/2006/relationships" xmlns:p="http://schemas.openxmlformats.org/presentationml/2006/main">
+  <p:cSld>
+    <p:spTree>
+      <p:nvGrpSpPr>
+        <p:cNvPr id="1" name=""/>
+        <p:cNvGrpSpPr/>
+        <p:nvPr/>
+      </p:nvGrpSpPr>
+      <p:grpSpPr>
+        <a:xfrm>
+          <a:off x="0" y="0"/>
+          <a:ext cx="0" cy="0"/>
+          <a:chOff x="0" y="0"/>
+          <a:chExt cx="0" cy="0"/>
+        </a:xfrm>
+      </p:grpSpPr>
+      <p:sp>
+        <p:nvSpPr>
+          <p:cNvPr id="2" name="Title 1"/>
+          <p:cNvSpPr>
+            <a:spLocks noGrp="1"/>
+          </p:cNvSpPr>
+          <p:nvPr>
+            <p:ph type="title"/>
+          </p:nvPr>
+        </p:nvSpPr>
+        <p:spPr/>
+        <p:txBody>
+          <a:bodyPr/>
+          <a:lstStyle/>
+          <a:p>
+            <a:r>
+              <a:rPr dirty="0"/>
+              <a:t>Business Benefits</a:t>
+            </a:r>
+          </a:p>
+        </p:txBody>
+      </p:sp>
+      <p:sp>
+        <p:nvSpPr>
+          <p:cNvPr id="3" name="TextBox 2"/>
+          <p:cNvSpPr txBox="1"/>
+          <p:nvPr/>
+        </p:nvSpPr>
+        <p:spPr>
+          <a:xfrm>
+            <a:off x="640080" y="1638300"/>
+            <a:ext cx="7772400" cy="4572000"/>
+          </a:xfrm>
+          <a:prstGeom prst="rect">
+            <a:avLst/>
+          </a:prstGeom>
+          <a:noFill/>
+        </p:spPr>
+        <p:txBody>
+          <a:bodyPr wrap="none">
+            <a:spAutoFit/>
+          </a:bodyPr>
+          <a:lstStyle/>
+          <a:p>
+            <a:pPr>
+              <a:defRPr sz="2200"/>
+            </a:pPr>
+            <a:r>
+              <a:rPr dirty="0"/>
+              <a:t>• Faster releases, improved security, scalability, cost optimization</a:t>
+            </a:r>
+          </a:p>
+        </p:txBody>
+      </p:sp>
+    </p:spTree>
+  </p:cSld>
+  <p:clrMapOvr>
+    <a:masterClrMapping/>
+  </p:clrMapOvr>
+</p:sld>
+</file>
+
+<file path=ppt/slides/slide21.xml><?xml version="1.0" encoding="utf-8"?>
+<p:sld xmlns:a="http://schemas.openxmlformats.org/drawingml/2006/main" xmlns:r="http://schemas.openxmlformats.org/officeDocument/2006/relationships" xmlns:p="http://schemas.openxmlformats.org/presentationml/2006/main">
+  <p:cSld>
+    <p:spTree>
+      <p:nvGrpSpPr>
+        <p:cNvPr id="1" name=""/>
+        <p:cNvGrpSpPr/>
+        <p:nvPr/>
+      </p:nvGrpSpPr>
+      <p:grpSpPr>
+        <a:xfrm>
+          <a:off x="0" y="0"/>
+          <a:ext cx="0" cy="0"/>
+          <a:chOff x="0" y="0"/>
+          <a:chExt cx="0" cy="0"/>
+        </a:xfrm>
+      </p:grpSpPr>
+      <p:sp>
+        <p:nvSpPr>
+          <p:cNvPr id="2" name="Title 1"/>
+          <p:cNvSpPr>
+            <a:spLocks noGrp="1"/>
+          </p:cNvSpPr>
+          <p:nvPr>
+            <p:ph type="title"/>
+          </p:nvPr>
+        </p:nvSpPr>
+        <p:spPr/>
+        <p:txBody>
+          <a:bodyPr/>
+          <a:lstStyle/>
+          <a:p>
+            <a:r>
+              <a:t>Next Steps</a:t>
+            </a:r>
+          </a:p>
+        </p:txBody>
+      </p:sp>
+      <p:sp>
+        <p:nvSpPr>
+          <p:cNvPr id="3" name="TextBox 2"/>
+          <p:cNvSpPr txBox="1"/>
+          <p:nvPr/>
+        </p:nvSpPr>
+        <p:spPr>
+          <a:xfrm>
+            <a:off x="640080" y="1417638"/>
+            <a:ext cx="7772400" cy="4572000"/>
+          </a:xfrm>
+          <a:prstGeom prst="rect">
+            <a:avLst/>
+          </a:prstGeom>
+          <a:noFill/>
+        </p:spPr>
+        <p:txBody>
+          <a:bodyPr wrap="none">
+            <a:spAutoFit/>
+          </a:bodyPr>
+          <a:lstStyle/>
+          <a:p>
+            <a:pPr>
+              <a:defRPr sz="2200"/>
+            </a:pPr>
+            <a:r>
+              <a:rPr dirty="0"/>
+              <a:t>• Production rollout, training, optimization roadmap</a:t>
+            </a:r>
+          </a:p>
+        </p:txBody>
+      </p:sp>
+    </p:spTree>
+  </p:cSld>
+  <p:clrMapOvr>
+    <a:masterClrMapping/>
+  </p:clrMapOvr>
+</p:sld>
+</file>
+
+<file path=ppt/slides/slide22.xml><?xml version="1.0" encoding="utf-8"?>
+<p:sld xmlns:a="http://schemas.openxmlformats.org/drawingml/2006/main" xmlns:r="http://schemas.openxmlformats.org/officeDocument/2006/relationships" xmlns:p="http://schemas.openxmlformats.org/presentationml/2006/main">
+  <p:cSld>
+    <p:spTree>
+      <p:nvGrpSpPr>
+        <p:cNvPr id="1" name=""/>
+        <p:cNvGrpSpPr/>
+        <p:nvPr/>
+      </p:nvGrpSpPr>
+      <p:grpSpPr>
+        <a:xfrm>
+          <a:off x="0" y="0"/>
+          <a:ext cx="0" cy="0"/>
+          <a:chOff x="0" y="0"/>
+          <a:chExt cx="0" cy="0"/>
+        </a:xfrm>
+      </p:grpSpPr>
+      <p:sp>
+        <p:nvSpPr>
+          <p:cNvPr id="2" name="Title 1"/>
+          <p:cNvSpPr>
+            <a:spLocks noGrp="1"/>
+          </p:cNvSpPr>
+          <p:nvPr>
+            <p:ph type="title"/>
+          </p:nvPr>
+        </p:nvSpPr>
+        <p:spPr/>
+        <p:txBody>
+          <a:bodyPr/>
+          <a:lstStyle/>
+          <a:p>
+            <a:r>
+              <a:t>Q&amp;A</a:t>
+            </a:r>
+          </a:p>
+        </p:txBody>
+      </p:sp>
+      <p:sp>
+        <p:nvSpPr>
+          <p:cNvPr id="3" name="TextBox 2"/>
+          <p:cNvSpPr txBox="1"/>
+          <p:nvPr/>
+        </p:nvSpPr>
+        <p:spPr>
+          <a:xfrm>
+            <a:off x="640080" y="1854200"/>
+            <a:ext cx="7772400" cy="4572000"/>
+          </a:xfrm>
+          <a:prstGeom prst="rect">
+            <a:avLst/>
+          </a:prstGeom>
+          <a:noFill/>
+        </p:spPr>
+        <p:txBody>
+          <a:bodyPr wrap="none">
+            <a:spAutoFit/>
+          </a:bodyPr>
+          <a:lstStyle/>
+          <a:p>
+            <a:pPr>
+              <a:defRPr sz="2200"/>
+            </a:pPr>
+            <a:r>
+              <a:rPr dirty="0"/>
+              <a:t>• Discussion</a:t>
+            </a:r>
+          </a:p>
+        </p:txBody>
+      </p:sp>
+    </p:spTree>
+  </p:cSld>
+  <p:clrMapOvr>
+    <a:masterClrMapping/>
+  </p:clrMapOvr>
+</p:sld>
+</file>
+
+<file path=ppt/slides/slide3.xml><?xml version="1.0" encoding="utf-8"?>
+<p:sld xmlns:a="http://schemas.openxmlformats.org/drawingml/2006/main" xmlns:r="http://schemas.openxmlformats.org/officeDocument/2006/relationships" xmlns:p="http://schemas.openxmlformats.org/presentationml/2006/main">
+  <p:cSld>
+    <p:spTree>
+      <p:nvGrpSpPr>
+        <p:cNvPr id="1" name=""/>
+        <p:cNvGrpSpPr/>
+        <p:nvPr/>
+      </p:nvGrpSpPr>
+      <p:grpSpPr>
+        <a:xfrm>
+          <a:off x="0" y="0"/>
+          <a:ext cx="0" cy="0"/>
+          <a:chOff x="0" y="0"/>
+          <a:chExt cx="0" cy="0"/>
+        </a:xfrm>
+      </p:grpSpPr>
+      <p:sp>
+        <p:nvSpPr>
+          <p:cNvPr id="2" name="Title 1"/>
+          <p:cNvSpPr>
+            <a:spLocks noGrp="1"/>
+          </p:cNvSpPr>
+          <p:nvPr>
+            <p:ph type="title"/>
+          </p:nvPr>
+        </p:nvSpPr>
+        <p:spPr/>
+        <p:txBody>
+          <a:bodyPr/>
+          <a:lstStyle/>
+          <a:p>
+            <a:r>
+              <a:t>Business Drivers</a:t>
+            </a:r>
+          </a:p>
+        </p:txBody>
+      </p:sp>
+      <p:sp>
+        <p:nvSpPr>
+          <p:cNvPr id="3" name="TextBox 2"/>
+          <p:cNvSpPr txBox="1"/>
+          <p:nvPr/>
+        </p:nvSpPr>
+        <p:spPr>
+          <a:xfrm>
+            <a:off x="685800" y="1600200"/>
+            <a:ext cx="7772400" cy="4572000"/>
+          </a:xfrm>
+          <a:prstGeom prst="rect">
+            <a:avLst/>
+          </a:prstGeom>
+          <a:noFill/>
+        </p:spPr>
+        <p:txBody>
+          <a:bodyPr wrap="none">
+            <a:spAutoFit/>
+          </a:bodyPr>
+          <a:lstStyle/>
+          <a:p>
+            <a:pPr>
+              <a:defRPr sz="2200"/>
+            </a:pPr>
+            <a:r>
+              <a:rPr dirty="0"/>
+              <a:t>• Reduce tool sprawl</a:t>
+            </a:r>
+          </a:p>
+          <a:p>
+            <a:pPr>
+              <a:defRPr sz="2200"/>
+            </a:pPr>
+            <a:r>
+              <a:rPr dirty="0"/>
+              <a:t>• Improve governance</a:t>
+            </a:r>
+          </a:p>
+          <a:p>
+            <a:pPr>
+              <a:defRPr sz="2200"/>
+            </a:pPr>
+            <a:r>
+              <a:rPr dirty="0"/>
+              <a:t>• Cloud-native delivery</a:t>
+            </a:r>
+          </a:p>
+          <a:p>
+            <a:pPr>
+              <a:defRPr sz="2200"/>
+            </a:pPr>
+            <a:r>
+              <a:rPr dirty="0"/>
+              <a:t>• Lower operational cost</a:t>
+            </a:r>
+          </a:p>
+        </p:txBody>
+      </p:sp>
+    </p:spTree>
+  </p:cSld>
+  <p:clrMapOvr>
+    <a:masterClrMapping/>
+  </p:clrMapOvr>
+</p:sld>
+</file>
+
+<file path=ppt/slides/slide4.xml><?xml version="1.0" encoding="utf-8"?>
+<p:sld xmlns:a="http://schemas.openxmlformats.org/drawingml/2006/main" xmlns:r="http://schemas.openxmlformats.org/officeDocument/2006/relationships" xmlns:p="http://schemas.openxmlformats.org/presentationml/2006/main">
+  <p:cSld>
+    <p:spTree>
+      <p:nvGrpSpPr>
+        <p:cNvPr id="1" name=""/>
+        <p:cNvGrpSpPr/>
+        <p:nvPr/>
+      </p:nvGrpSpPr>
+      <p:grpSpPr>
+        <a:xfrm>
+          <a:off x="0" y="0"/>
+          <a:ext cx="0" cy="0"/>
+          <a:chOff x="0" y="0"/>
+          <a:chExt cx="0" cy="0"/>
+        </a:xfrm>
+      </p:grpSpPr>
+      <p:sp>
+        <p:nvSpPr>
+          <p:cNvPr id="2" name="Title 1"/>
+          <p:cNvSpPr>
+            <a:spLocks noGrp="1"/>
+          </p:cNvSpPr>
+          <p:nvPr>
+            <p:ph type="title"/>
+          </p:nvPr>
+        </p:nvSpPr>
+        <p:spPr/>
+        <p:txBody>
+          <a:bodyPr/>
+          <a:lstStyle/>
+          <a:p>
+            <a:r>
+              <a:t>Current State Assessment</a:t>
+            </a:r>
+          </a:p>
+        </p:txBody>
+      </p:sp>
+      <p:sp>
+        <p:nvSpPr>
+          <p:cNvPr id="3" name="TextBox 2"/>
+          <p:cNvSpPr txBox="1"/>
+          <p:nvPr/>
+        </p:nvSpPr>
+        <p:spPr>
+          <a:xfrm>
+            <a:off x="309880" y="1828800"/>
+            <a:ext cx="7772400" cy="4572000"/>
+          </a:xfrm>
+          <a:prstGeom prst="rect">
+            <a:avLst/>
+          </a:prstGeom>
+          <a:noFill/>
+        </p:spPr>
+        <p:txBody>
+          <a:bodyPr wrap="none">
+            <a:spAutoFit/>
+          </a:bodyPr>
+          <a:lstStyle/>
+          <a:p>
+            <a:pPr>
+              <a:defRPr sz="2200"/>
+            </a:pPr>
+            <a:r>
+              <a:t>• Legacy CI/CD, manual deployments, credential risks, limited observability</a:t>
+            </a:r>
+          </a:p>
+        </p:txBody>
+      </p:sp>
+    </p:spTree>
+  </p:cSld>
+  <p:clrMapOvr>
+    <a:masterClrMapping/>
+  </p:clrMapOvr>
+</p:sld>
+</file>
+
+<file path=ppt/slides/slide5.xml><?xml version="1.0" encoding="utf-8"?>
+<p:sld xmlns:a="http://schemas.openxmlformats.org/drawingml/2006/main" xmlns:r="http://schemas.openxmlformats.org/officeDocument/2006/relationships" xmlns:p="http://schemas.openxmlformats.org/presentationml/2006/main">
+  <p:cSld>
+    <p:spTree>
+      <p:nvGrpSpPr>
+        <p:cNvPr id="1" name=""/>
+        <p:cNvGrpSpPr/>
+        <p:nvPr/>
+      </p:nvGrpSpPr>
+      <p:grpSpPr>
+        <a:xfrm>
+          <a:off x="0" y="0"/>
+          <a:ext cx="0" cy="0"/>
+          <a:chOff x="0" y="0"/>
+          <a:chExt cx="0" cy="0"/>
+        </a:xfrm>
+      </p:grpSpPr>
+      <p:sp>
+        <p:nvSpPr>
+          <p:cNvPr id="2" name="Title 1"/>
+          <p:cNvSpPr>
+            <a:spLocks noGrp="1"/>
+          </p:cNvSpPr>
+          <p:nvPr>
+            <p:ph type="title"/>
+          </p:nvPr>
+        </p:nvSpPr>
+        <p:spPr/>
+        <p:txBody>
+          <a:bodyPr/>
+          <a:lstStyle/>
+          <a:p>
+            <a:r>
+              <a:t>Target Azure Architecture</a:t>
+            </a:r>
+          </a:p>
+        </p:txBody>
+      </p:sp>
+      <p:sp>
+        <p:nvSpPr>
+          <p:cNvPr id="3" name="TextBox 2"/>
+          <p:cNvSpPr txBox="1"/>
+          <p:nvPr/>
+        </p:nvSpPr>
+        <p:spPr>
+          <a:xfrm>
+            <a:off x="685800" y="1520575"/>
+            <a:ext cx="7772400" cy="4572000"/>
+          </a:xfrm>
+          <a:prstGeom prst="rect">
+            <a:avLst/>
+          </a:prstGeom>
+          <a:noFill/>
+        </p:spPr>
+        <p:txBody>
+          <a:bodyPr wrap="none">
+            <a:spAutoFit/>
+          </a:bodyPr>
+          <a:lstStyle/>
+          <a:p>
+            <a:pPr>
+              <a:defRPr sz="2200"/>
+            </a:pPr>
+            <a:r>
+              <a:rPr dirty="0"/>
+              <a:t>• Azure DevOps, ACR, Key Vault, Container Apps, Monitoring</a:t>
+            </a:r>
+          </a:p>
+        </p:txBody>
+      </p:sp>
+    </p:spTree>
+  </p:cSld>
+  <p:clrMapOvr>
+    <a:masterClrMapping/>
+  </p:clrMapOvr>
+</p:sld>
+</file>
+
+<file path=ppt/slides/slide6.xml><?xml version="1.0" encoding="utf-8"?>
+<p:sld xmlns:a="http://schemas.openxmlformats.org/drawingml/2006/main" xmlns:r="http://schemas.openxmlformats.org/officeDocument/2006/relationships" xmlns:p="http://schemas.openxmlformats.org/presentationml/2006/main">
+  <p:cSld>
+    <p:spTree>
+      <p:nvGrpSpPr>
+        <p:cNvPr id="1" name=""/>
+        <p:cNvGrpSpPr/>
+        <p:nvPr/>
+      </p:nvGrpSpPr>
+      <p:grpSpPr>
+        <a:xfrm>
+          <a:off x="0" y="0"/>
+          <a:ext cx="0" cy="0"/>
+          <a:chOff x="0" y="0"/>
+          <a:chExt cx="0" cy="0"/>
+        </a:xfrm>
+      </p:grpSpPr>
+      <p:sp>
+        <p:nvSpPr>
+          <p:cNvPr id="2" name="Title 1"/>
+          <p:cNvSpPr>
+            <a:spLocks noGrp="1"/>
+          </p:cNvSpPr>
+          <p:nvPr>
+            <p:ph type="title"/>
+          </p:nvPr>
+        </p:nvSpPr>
+        <p:spPr/>
+        <p:txBody>
+          <a:bodyPr/>
+          <a:lstStyle/>
+          <a:p>
+            <a:r>
+              <a:t>Migration Roadmap</a:t>
+            </a:r>
+          </a:p>
+        </p:txBody>
+      </p:sp>
+      <p:sp>
+        <p:nvSpPr>
+          <p:cNvPr id="3" name="TextBox 2"/>
+          <p:cNvSpPr txBox="1"/>
+          <p:nvPr/>
+        </p:nvSpPr>
+        <p:spPr>
+          <a:xfrm>
+            <a:off x="457200" y="1676400"/>
+            <a:ext cx="7772400" cy="4572000"/>
+          </a:xfrm>
+          <a:prstGeom prst="rect">
+            <a:avLst/>
+          </a:prstGeom>
+          <a:noFill/>
+        </p:spPr>
+        <p:txBody>
+          <a:bodyPr wrap="none">
+            <a:spAutoFit/>
+          </a:bodyPr>
+          <a:lstStyle/>
+          <a:p>
+            <a:pPr>
+              <a:defRPr sz="2200"/>
+            </a:pPr>
+            <a:r>
+              <a:rPr dirty="0"/>
+              <a:t>• </a:t>
+            </a:r>
+            <a:r>
+              <a:rPr dirty="0" err="1"/>
+              <a:t>Discover→Containerize→Automate→Secure→Deploy→Optimize</a:t>
+            </a:r>
+            <a:endParaRPr dirty="0"/>
           </a:p>
         </p:txBody>
       </p:sp>
@@ -15509,20 +15480,35 @@
       </p:grpSpPr>
       <p:sp>
         <p:nvSpPr>
-          <p:cNvPr id="3" name="TextBox 2">
-            <a:extLst>
-              <a:ext uri="{FF2B5EF4-FFF2-40B4-BE49-F238E27FC236}">
-                <a16:creationId xmlns:a16="http://schemas.microsoft.com/office/drawing/2014/main" id="{B0D15C41-A86C-4559-832E-667C28233A66}"/>
-              </a:ext>
-            </a:extLst>
-          </p:cNvPr>
+          <p:cNvPr id="2" name="Title 1"/>
+          <p:cNvSpPr>
+            <a:spLocks noGrp="1"/>
+          </p:cNvSpPr>
+          <p:nvPr>
+            <p:ph type="title"/>
+          </p:nvPr>
+        </p:nvSpPr>
+        <p:spPr/>
+        <p:txBody>
+          <a:bodyPr/>
+          <a:lstStyle/>
+          <a:p>
+            <a:r>
+              <a:t>Repository &amp; Branch Strategy</a:t>
+            </a:r>
+          </a:p>
+        </p:txBody>
+      </p:sp>
+      <p:sp>
+        <p:nvSpPr>
+          <p:cNvPr id="3" name="TextBox 2"/>
           <p:cNvSpPr txBox="1"/>
           <p:nvPr/>
         </p:nvSpPr>
         <p:spPr>
           <a:xfrm>
-            <a:off x="1508165" y="1451229"/>
-            <a:ext cx="8811491" cy="2800767"/>
+            <a:off x="457200" y="1790700"/>
+            <a:ext cx="7772400" cy="4572000"/>
           </a:xfrm>
           <a:prstGeom prst="rect">
             <a:avLst/>
@@ -15530,213 +15516,21 @@
           <a:noFill/>
         </p:spPr>
         <p:txBody>
-          <a:bodyPr wrap="square">
+          <a:bodyPr wrap="none">
             <a:spAutoFit/>
           </a:bodyPr>
           <a:lstStyle/>
           <a:p>
-            <a:pPr algn="l"/>
-            <a:r>
-              <a:rPr lang="en-GB" sz="2000" b="0" i="0" u="none" strike="noStrike" baseline="0" dirty="0">
-                <a:solidFill>
-                  <a:srgbClr val="222222"/>
-                </a:solidFill>
-              </a:rPr>
-              <a:t>Create all directories</a:t>
-            </a:r>
-          </a:p>
-          <a:p>
-            <a:pPr marL="285750" indent="-285750" algn="l">
-              <a:buFont typeface="Arial" panose="020B0604020202020204" pitchFamily="34" charset="0"/>
-              <a:buChar char="•"/>
+            <a:pPr>
+              <a:defRPr sz="2200"/>
             </a:pPr>
             <a:r>
-              <a:rPr lang="en-GB" sz="2000" b="0" i="0" u="none" strike="noStrike" baseline="0" dirty="0" err="1">
-                <a:solidFill>
-                  <a:srgbClr val="222222"/>
-                </a:solidFill>
-              </a:rPr>
-              <a:t>mkdir</a:t>
+              <a:t>• Git strategy, PR validation, branch policies, reusable templates</a:t>
             </a:r>
-            <a:r>
-              <a:rPr lang="en-GB" sz="2000" b="0" i="0" u="none" strike="noStrike" baseline="0" dirty="0">
-                <a:solidFill>
-                  <a:srgbClr val="222222"/>
-                </a:solidFill>
-              </a:rPr>
-              <a:t> -p candidate-repo/{</a:t>
-            </a:r>
-            <a:r>
-              <a:rPr lang="en-GB" sz="2000" b="0" i="0" u="none" strike="noStrike" baseline="0" dirty="0" err="1">
-                <a:solidFill>
-                  <a:srgbClr val="222222"/>
-                </a:solidFill>
-              </a:rPr>
-              <a:t>apps,container,pipelines</a:t>
-            </a:r>
-            <a:r>
-              <a:rPr lang="en-GB" sz="2000" b="0" i="0" u="none" strike="noStrike" baseline="0" dirty="0">
-                <a:solidFill>
-                  <a:srgbClr val="222222"/>
-                </a:solidFill>
-              </a:rPr>
-              <a:t>/{</a:t>
-            </a:r>
-            <a:r>
-              <a:rPr lang="en-GB" sz="2000" b="0" i="0" u="none" strike="noStrike" baseline="0" dirty="0" err="1">
-                <a:solidFill>
-                  <a:srgbClr val="222222"/>
-                </a:solidFill>
-              </a:rPr>
-              <a:t>templates,githubactions</a:t>
-            </a:r>
-            <a:r>
-              <a:rPr lang="en-GB" sz="2000" b="0" i="0" u="none" strike="noStrike" baseline="0" dirty="0">
-                <a:solidFill>
-                  <a:srgbClr val="222222"/>
-                </a:solidFill>
-              </a:rPr>
-              <a:t>,</a:t>
-            </a:r>
-          </a:p>
-          <a:p>
-            <a:pPr marL="285750" indent="-285750" algn="l">
-              <a:buFont typeface="Arial" panose="020B0604020202020204" pitchFamily="34" charset="0"/>
-              <a:buChar char="•"/>
-            </a:pPr>
-            <a:r>
-              <a:rPr lang="en-GB" sz="2000" b="0" i="0" u="none" strike="noStrike" baseline="0" dirty="0">
-                <a:solidFill>
-                  <a:srgbClr val="222222"/>
-                </a:solidFill>
-              </a:rPr>
-              <a:t>legacy-migration},legacy-ci/{</a:t>
-            </a:r>
-            <a:r>
-              <a:rPr lang="en-GB" sz="2000" b="0" i="0" u="none" strike="noStrike" baseline="0" dirty="0" err="1">
-                <a:solidFill>
-                  <a:srgbClr val="222222"/>
-                </a:solidFill>
-              </a:rPr>
-              <a:t>jenkins,bamboo,gitlab</a:t>
-            </a:r>
-            <a:r>
-              <a:rPr lang="en-GB" sz="2000" b="0" i="0" u="none" strike="noStrike" baseline="0" dirty="0">
-                <a:solidFill>
-                  <a:srgbClr val="222222"/>
-                </a:solidFill>
-              </a:rPr>
-              <a:t>},self-</a:t>
-            </a:r>
-            <a:r>
-              <a:rPr lang="en-GB" sz="2000" b="0" i="0" u="none" strike="noStrike" baseline="0" dirty="0" err="1">
-                <a:solidFill>
-                  <a:srgbClr val="222222"/>
-                </a:solidFill>
-              </a:rPr>
-              <a:t>hostedagent</a:t>
-            </a:r>
-            <a:r>
-              <a:rPr lang="en-GB" sz="2000" b="0" i="0" u="none" strike="noStrike" baseline="0" dirty="0">
-                <a:solidFill>
-                  <a:srgbClr val="222222"/>
-                </a:solidFill>
-              </a:rPr>
-              <a:t>,</a:t>
-            </a:r>
-          </a:p>
-          <a:p>
-            <a:pPr marL="285750" indent="-285750" algn="l">
-              <a:buFont typeface="Arial" panose="020B0604020202020204" pitchFamily="34" charset="0"/>
-              <a:buChar char="•"/>
-            </a:pPr>
-            <a:r>
-              <a:rPr lang="en-US" sz="2000" b="0" i="0" u="none" strike="noStrike" baseline="0" dirty="0" err="1">
-                <a:solidFill>
-                  <a:srgbClr val="222222"/>
-                </a:solidFill>
-              </a:rPr>
-              <a:t>iac</a:t>
-            </a:r>
-            <a:r>
-              <a:rPr lang="en-US" sz="2000" b="0" i="0" u="none" strike="noStrike" baseline="0" dirty="0">
-                <a:solidFill>
-                  <a:srgbClr val="222222"/>
-                </a:solidFill>
-              </a:rPr>
-              <a:t>/{</a:t>
-            </a:r>
-            <a:r>
-              <a:rPr lang="en-US" sz="2000" b="0" i="0" u="none" strike="noStrike" baseline="0" dirty="0" err="1">
-                <a:solidFill>
-                  <a:srgbClr val="222222"/>
-                </a:solidFill>
-              </a:rPr>
-              <a:t>bicep,terraform</a:t>
-            </a:r>
-            <a:r>
-              <a:rPr lang="en-US" sz="2000" b="0" i="0" u="none" strike="noStrike" baseline="0" dirty="0">
-                <a:solidFill>
-                  <a:srgbClr val="222222"/>
-                </a:solidFill>
-              </a:rPr>
-              <a:t>},k8s,tools,reports,docs}</a:t>
-            </a:r>
-          </a:p>
-          <a:p>
-            <a:pPr algn="l"/>
-            <a:endParaRPr lang="en-GB" sz="2000" dirty="0">
-              <a:solidFill>
-                <a:srgbClr val="222222"/>
-              </a:solidFill>
-            </a:endParaRPr>
-          </a:p>
-          <a:p>
-            <a:pPr algn="l"/>
-            <a:r>
-              <a:rPr lang="en-GB" sz="2000" b="0" i="0" u="none" strike="noStrike" baseline="0" dirty="0">
-                <a:solidFill>
-                  <a:srgbClr val="222222"/>
-                </a:solidFill>
-              </a:rPr>
-              <a:t>Create README.md</a:t>
-            </a:r>
-          </a:p>
-          <a:p>
-            <a:pPr marL="285750" indent="-285750" algn="l">
-              <a:buFont typeface="Arial" panose="020B0604020202020204" pitchFamily="34" charset="0"/>
-              <a:buChar char="•"/>
-            </a:pPr>
-            <a:r>
-              <a:rPr lang="en-GB" sz="2000" b="0" i="0" u="none" strike="noStrike" baseline="0" dirty="0">
-                <a:solidFill>
-                  <a:srgbClr val="222222"/>
-                </a:solidFill>
-              </a:rPr>
-              <a:t>cat &gt; candidate-repo/README.md &lt;&lt; 'EOF’</a:t>
-            </a:r>
-          </a:p>
-          <a:p>
-            <a:pPr algn="l"/>
-            <a:endParaRPr lang="en-GB" dirty="0">
-              <a:solidFill>
-                <a:srgbClr val="222222"/>
-              </a:solidFill>
-              <a:latin typeface="Inconsolata-Regular"/>
-            </a:endParaRPr>
-          </a:p>
-          <a:p>
-            <a:pPr algn="l"/>
-            <a:endParaRPr lang="en-GB" dirty="0"/>
           </a:p>
         </p:txBody>
       </p:sp>
     </p:spTree>
-    <p:extLst>
-      <p:ext uri="{BB962C8B-B14F-4D97-AF65-F5344CB8AC3E}">
-        <p14:creationId xmlns:p14="http://schemas.microsoft.com/office/powerpoint/2010/main" val="3533837577"/>
-      </p:ext>
-    </p:extLst>
   </p:cSld>
   <p:clrMapOvr>
     <a:masterClrMapping/>
@@ -15763,243 +15557,14 @@
       </p:grpSpPr>
       <p:sp>
         <p:nvSpPr>
-          <p:cNvPr id="3" name="TextBox 2">
-            <a:extLst>
-              <a:ext uri="{FF2B5EF4-FFF2-40B4-BE49-F238E27FC236}">
-                <a16:creationId xmlns:a16="http://schemas.microsoft.com/office/drawing/2014/main" id="{A8BD2212-EB19-4314-8E11-21A1E75AEA00}"/>
-              </a:ext>
-            </a:extLst>
-          </p:cNvPr>
-          <p:cNvSpPr txBox="1"/>
-          <p:nvPr/>
-        </p:nvSpPr>
-        <p:spPr>
-          <a:xfrm>
-            <a:off x="1163780" y="1382286"/>
-            <a:ext cx="9393383" cy="4093428"/>
-          </a:xfrm>
-          <a:prstGeom prst="rect">
-            <a:avLst/>
-          </a:prstGeom>
-          <a:noFill/>
-        </p:spPr>
-        <p:txBody>
-          <a:bodyPr wrap="square">
-            <a:spAutoFit/>
-          </a:bodyPr>
-          <a:lstStyle/>
-          <a:p>
-            <a:pPr algn="l"/>
-            <a:r>
-              <a:rPr lang="en-GB" sz="2000" b="1" i="0" u="none" strike="noStrike" baseline="0" dirty="0">
-                <a:solidFill>
-                  <a:srgbClr val="222222"/>
-                </a:solidFill>
-              </a:rPr>
-              <a:t>DevOps Migration Assessment</a:t>
-            </a:r>
-          </a:p>
-          <a:p>
-            <a:pPr algn="l"/>
-            <a:r>
-              <a:rPr lang="en-GB" sz="2000" b="0" i="0" u="none" strike="noStrike" baseline="0" dirty="0">
-                <a:solidFill>
-                  <a:srgbClr val="222222"/>
-                </a:solidFill>
-              </a:rPr>
-              <a:t>Overview</a:t>
-            </a:r>
-          </a:p>
-          <a:p>
-            <a:pPr algn="l"/>
-            <a:r>
-              <a:rPr lang="en-US" sz="2000" i="0" u="none" strike="noStrike" baseline="0" dirty="0">
-                <a:solidFill>
-                  <a:srgbClr val="222222"/>
-                </a:solidFill>
-              </a:rPr>
-              <a:t>This repository contains the complete implementation for migrating a Spring </a:t>
-            </a:r>
-            <a:r>
-              <a:rPr lang="en-GB" sz="2000" i="0" u="none" strike="noStrike" baseline="0" dirty="0" err="1">
-                <a:solidFill>
-                  <a:srgbClr val="222222"/>
-                </a:solidFill>
-              </a:rPr>
-              <a:t>PetClinic</a:t>
-            </a:r>
-            <a:r>
-              <a:rPr lang="en-GB" sz="2000" i="0" u="none" strike="noStrike" baseline="0" dirty="0">
-                <a:solidFill>
-                  <a:srgbClr val="222222"/>
-                </a:solidFill>
-              </a:rPr>
-              <a:t> monolith from on-prem Jenkins/Bamboo/GitLab to Azure DevOps Services and Jira Cloud.</a:t>
-            </a:r>
-          </a:p>
-          <a:p>
-            <a:pPr algn="l"/>
-            <a:r>
-              <a:rPr lang="en-GB" sz="2000" b="0" i="0" u="none" strike="noStrike" baseline="0" dirty="0">
-                <a:solidFill>
-                  <a:srgbClr val="222222"/>
-                </a:solidFill>
-              </a:rPr>
-              <a:t>## Structure</a:t>
-            </a:r>
-          </a:p>
-          <a:p>
-            <a:pPr algn="l"/>
-            <a:r>
-              <a:rPr lang="en-US" sz="2000" b="0" i="0" u="none" strike="noStrike" baseline="0" dirty="0">
-                <a:solidFill>
-                  <a:srgbClr val="222222"/>
-                </a:solidFill>
-              </a:rPr>
-              <a:t>- `/apps` - Application source code (cloned from GitHub)</a:t>
-            </a:r>
-          </a:p>
-          <a:p>
-            <a:pPr algn="l"/>
-            <a:r>
-              <a:rPr lang="en-GB" sz="2000" b="0" i="0" u="none" strike="noStrike" baseline="0" dirty="0">
-                <a:solidFill>
-                  <a:srgbClr val="222222"/>
-                </a:solidFill>
-              </a:rPr>
-              <a:t>- `/container` - </a:t>
-            </a:r>
-            <a:r>
-              <a:rPr lang="en-GB" sz="2000" b="0" i="0" u="none" strike="noStrike" baseline="0" dirty="0" err="1">
-                <a:solidFill>
-                  <a:srgbClr val="222222"/>
-                </a:solidFill>
-              </a:rPr>
-              <a:t>Dockerfiles</a:t>
-            </a:r>
-            <a:r>
-              <a:rPr lang="en-GB" sz="2000" b="0" i="0" u="none" strike="noStrike" baseline="0" dirty="0">
-                <a:solidFill>
-                  <a:srgbClr val="222222"/>
-                </a:solidFill>
-              </a:rPr>
-              <a:t> and compose configurations</a:t>
-            </a:r>
-          </a:p>
-          <a:p>
-            <a:pPr algn="l"/>
-            <a:r>
-              <a:rPr lang="en-US" sz="2000" b="0" i="0" u="none" strike="noStrike" baseline="0" dirty="0">
-                <a:solidFill>
-                  <a:srgbClr val="222222"/>
-                </a:solidFill>
-              </a:rPr>
-              <a:t>- `/pipelines` - Azure DevOps and GitHub Actions pipelines</a:t>
-            </a:r>
-          </a:p>
-          <a:p>
-            <a:pPr algn="l"/>
-            <a:r>
-              <a:rPr lang="en-GB" sz="2000" b="0" i="0" u="none" strike="noStrike" baseline="0" dirty="0">
-                <a:solidFill>
-                  <a:srgbClr val="222222"/>
-                </a:solidFill>
-              </a:rPr>
-              <a:t>- `/</a:t>
-            </a:r>
-            <a:r>
-              <a:rPr lang="en-GB" sz="2000" b="0" i="0" u="none" strike="noStrike" baseline="0" dirty="0" err="1">
-                <a:solidFill>
-                  <a:srgbClr val="222222"/>
-                </a:solidFill>
-              </a:rPr>
-              <a:t>iac</a:t>
-            </a:r>
-            <a:r>
-              <a:rPr lang="en-GB" sz="2000" b="0" i="0" u="none" strike="noStrike" baseline="0" dirty="0">
-                <a:solidFill>
-                  <a:srgbClr val="222222"/>
-                </a:solidFill>
-              </a:rPr>
-              <a:t>` - Infrastructure as Code (Bicep/Terraform)</a:t>
-            </a:r>
-          </a:p>
-          <a:p>
-            <a:pPr algn="l"/>
-            <a:r>
-              <a:rPr lang="en-GB" sz="2000" b="0" i="0" u="none" strike="noStrike" baseline="0" dirty="0">
-                <a:solidFill>
-                  <a:srgbClr val="222222"/>
-                </a:solidFill>
-              </a:rPr>
-              <a:t>- `/k8s` - Kubernetes manifests</a:t>
-            </a:r>
-          </a:p>
-          <a:p>
-            <a:pPr algn="l"/>
-            <a:r>
-              <a:rPr lang="en-GB" sz="2000" b="0" i="0" u="none" strike="noStrike" baseline="0" dirty="0">
-                <a:solidFill>
-                  <a:srgbClr val="222222"/>
-                </a:solidFill>
-              </a:rPr>
-              <a:t>- `/tools` - Migration analysis scripts</a:t>
-            </a:r>
-          </a:p>
-          <a:p>
-            <a:pPr algn="l"/>
-            <a:r>
-              <a:rPr lang="en-US" sz="2000" b="0" i="0" u="none" strike="noStrike" baseline="0" dirty="0">
-                <a:solidFill>
-                  <a:srgbClr val="222222"/>
-                </a:solidFill>
-              </a:rPr>
-              <a:t>- `/docs` - Architecture and runbook documentation</a:t>
-            </a:r>
-            <a:endParaRPr lang="en-GB" sz="2000" dirty="0"/>
-          </a:p>
-        </p:txBody>
-      </p:sp>
-    </p:spTree>
-    <p:extLst>
-      <p:ext uri="{BB962C8B-B14F-4D97-AF65-F5344CB8AC3E}">
-        <p14:creationId xmlns:p14="http://schemas.microsoft.com/office/powerpoint/2010/main" val="1510991619"/>
-      </p:ext>
-    </p:extLst>
-  </p:cSld>
-  <p:clrMapOvr>
-    <a:masterClrMapping/>
-  </p:clrMapOvr>
-</p:sld>
-</file>
-
-<file path=ppt/slides/slide9.xml><?xml version="1.0" encoding="utf-8"?>
-<p:sld xmlns:a="http://schemas.openxmlformats.org/drawingml/2006/main" xmlns:r="http://schemas.openxmlformats.org/officeDocument/2006/relationships" xmlns:p="http://schemas.openxmlformats.org/presentationml/2006/main">
-  <p:cSld>
-    <p:spTree>
-      <p:nvGrpSpPr>
-        <p:cNvPr id="1" name=""/>
-        <p:cNvGrpSpPr/>
-        <p:nvPr/>
-      </p:nvGrpSpPr>
-      <p:grpSpPr>
-        <a:xfrm>
-          <a:off x="0" y="0"/>
-          <a:ext cx="0" cy="0"/>
-          <a:chOff x="0" y="0"/>
-          <a:chExt cx="0" cy="0"/>
-        </a:xfrm>
-      </p:grpSpPr>
-      <p:sp>
-        <p:nvSpPr>
           <p:cNvPr id="2" name="Rectangle 1"/>
           <p:cNvSpPr/>
           <p:nvPr/>
         </p:nvSpPr>
         <p:spPr>
           <a:xfrm>
-            <a:off x="1840675" y="457200"/>
-            <a:ext cx="8918369" cy="5943600"/>
+            <a:off x="1380507" y="1200150"/>
+            <a:ext cx="6688777" cy="4457700"/>
           </a:xfrm>
           <a:prstGeom prst="rect">
             <a:avLst/>
@@ -16016,7 +15581,7 @@
           <a:lstStyle/>
           <a:p>
             <a:pPr algn="ctr"/>
-            <a:endParaRPr/>
+            <a:endParaRPr sz="1350"/>
           </a:p>
         </p:txBody>
       </p:sp>
@@ -16028,8 +15593,8 @@
         </p:nvSpPr>
         <p:spPr>
           <a:xfrm>
-            <a:off x="4449628" y="3582721"/>
-            <a:ext cx="1325557" cy="393404"/>
+            <a:off x="3337221" y="3544291"/>
+            <a:ext cx="994168" cy="295053"/>
           </a:xfrm>
           <a:custGeom>
             <a:avLst/>
@@ -16092,7 +15657,7 @@
           <a:lstStyle/>
           <a:p>
             <a:pPr algn="ctr"/>
-            <a:endParaRPr/>
+            <a:endParaRPr sz="1350"/>
           </a:p>
         </p:txBody>
       </p:sp>
@@ -16104,8 +15669,8 @@
         </p:nvSpPr>
         <p:spPr>
           <a:xfrm>
-            <a:off x="4449628" y="3582721"/>
-            <a:ext cx="1325557" cy="393402"/>
+            <a:off x="3337221" y="3544291"/>
+            <a:ext cx="994168" cy="295052"/>
           </a:xfrm>
           <a:custGeom>
             <a:avLst/>
@@ -16210,7 +15775,7 @@
           <a:lstStyle/>
           <a:p>
             <a:pPr algn="ctr"/>
-            <a:endParaRPr/>
+            <a:endParaRPr sz="1350"/>
           </a:p>
         </p:txBody>
       </p:sp>
@@ -16222,8 +15787,8 @@
         </p:nvSpPr>
         <p:spPr>
           <a:xfrm>
-            <a:off x="6380474" y="5548106"/>
-            <a:ext cx="1129485" cy="393404"/>
+            <a:off x="4785356" y="5018330"/>
+            <a:ext cx="847114" cy="295053"/>
           </a:xfrm>
           <a:custGeom>
             <a:avLst/>
@@ -16286,7 +15851,7 @@
           <a:lstStyle/>
           <a:p>
             <a:pPr algn="ctr"/>
-            <a:endParaRPr/>
+            <a:endParaRPr sz="1350"/>
           </a:p>
         </p:txBody>
       </p:sp>
@@ -16298,8 +15863,8 @@
         </p:nvSpPr>
         <p:spPr>
           <a:xfrm>
-            <a:off x="6380474" y="5548107"/>
-            <a:ext cx="1129487" cy="393401"/>
+            <a:off x="4785356" y="5018331"/>
+            <a:ext cx="847115" cy="295051"/>
           </a:xfrm>
           <a:custGeom>
             <a:avLst/>
@@ -16404,7 +15969,7 @@
           <a:lstStyle/>
           <a:p>
             <a:pPr algn="ctr"/>
-            <a:endParaRPr/>
+            <a:endParaRPr sz="1350"/>
           </a:p>
         </p:txBody>
       </p:sp>
@@ -16416,8 +15981,8 @@
         </p:nvSpPr>
         <p:spPr>
           <a:xfrm>
-            <a:off x="6380474" y="1617336"/>
-            <a:ext cx="1093849" cy="393404"/>
+            <a:off x="4785356" y="2070252"/>
+            <a:ext cx="820387" cy="295053"/>
           </a:xfrm>
           <a:custGeom>
             <a:avLst/>
@@ -16480,7 +16045,7 @@
           <a:lstStyle/>
           <a:p>
             <a:pPr algn="ctr"/>
-            <a:endParaRPr/>
+            <a:endParaRPr sz="1350"/>
           </a:p>
         </p:txBody>
       </p:sp>
@@ -16492,8 +16057,8 @@
         </p:nvSpPr>
         <p:spPr>
           <a:xfrm>
-            <a:off x="6380474" y="1617336"/>
-            <a:ext cx="1093845" cy="393402"/>
+            <a:off x="4785356" y="2070252"/>
+            <a:ext cx="820384" cy="295052"/>
           </a:xfrm>
           <a:custGeom>
             <a:avLst/>
@@ -16598,7 +16163,7 @@
           <a:lstStyle/>
           <a:p>
             <a:pPr algn="ctr"/>
-            <a:endParaRPr/>
+            <a:endParaRPr sz="1350"/>
           </a:p>
         </p:txBody>
       </p:sp>
@@ -16610,8 +16175,8 @@
         </p:nvSpPr>
         <p:spPr>
           <a:xfrm>
-            <a:off x="6380474" y="2178875"/>
-            <a:ext cx="1354367" cy="393404"/>
+            <a:off x="4785356" y="2491406"/>
+            <a:ext cx="1015775" cy="295053"/>
           </a:xfrm>
           <a:custGeom>
             <a:avLst/>
@@ -16674,7 +16239,7 @@
           <a:lstStyle/>
           <a:p>
             <a:pPr algn="ctr"/>
-            <a:endParaRPr/>
+            <a:endParaRPr sz="1350"/>
           </a:p>
         </p:txBody>
       </p:sp>
@@ -16686,8 +16251,8 @@
         </p:nvSpPr>
         <p:spPr>
           <a:xfrm>
-            <a:off x="6380473" y="2178875"/>
-            <a:ext cx="1354368" cy="393402"/>
+            <a:off x="4785355" y="2491406"/>
+            <a:ext cx="1015776" cy="295052"/>
           </a:xfrm>
           <a:custGeom>
             <a:avLst/>
@@ -16792,7 +16357,7 @@
           <a:lstStyle/>
           <a:p>
             <a:pPr algn="ctr"/>
-            <a:endParaRPr/>
+            <a:endParaRPr sz="1350"/>
           </a:p>
         </p:txBody>
       </p:sp>
@@ -16804,8 +16369,8 @@
         </p:nvSpPr>
         <p:spPr>
           <a:xfrm>
-            <a:off x="6380473" y="2740412"/>
-            <a:ext cx="1312686" cy="393404"/>
+            <a:off x="4785355" y="2912559"/>
+            <a:ext cx="984515" cy="295053"/>
           </a:xfrm>
           <a:custGeom>
             <a:avLst/>
@@ -16868,7 +16433,7 @@
           <a:lstStyle/>
           <a:p>
             <a:pPr algn="ctr"/>
-            <a:endParaRPr/>
+            <a:endParaRPr sz="1350"/>
           </a:p>
         </p:txBody>
       </p:sp>
@@ -16880,8 +16445,8 @@
         </p:nvSpPr>
         <p:spPr>
           <a:xfrm>
-            <a:off x="6380473" y="2740412"/>
-            <a:ext cx="1312684" cy="393402"/>
+            <a:off x="4785355" y="2912559"/>
+            <a:ext cx="984513" cy="295052"/>
           </a:xfrm>
           <a:custGeom>
             <a:avLst/>
@@ -16986,7 +16551,7 @@
           <a:lstStyle/>
           <a:p>
             <a:pPr algn="ctr"/>
-            <a:endParaRPr/>
+            <a:endParaRPr sz="1350"/>
           </a:p>
         </p:txBody>
       </p:sp>
@@ -16998,8 +16563,8 @@
         </p:nvSpPr>
         <p:spPr>
           <a:xfrm>
-            <a:off x="6380473" y="3301951"/>
-            <a:ext cx="1010126" cy="393404"/>
+            <a:off x="4785355" y="3333713"/>
+            <a:ext cx="757595" cy="295053"/>
           </a:xfrm>
           <a:custGeom>
             <a:avLst/>
@@ -17062,7 +16627,7 @@
           <a:lstStyle/>
           <a:p>
             <a:pPr algn="ctr"/>
-            <a:endParaRPr/>
+            <a:endParaRPr sz="1350"/>
           </a:p>
         </p:txBody>
       </p:sp>
@@ -17074,8 +16639,8 @@
         </p:nvSpPr>
         <p:spPr>
           <a:xfrm>
-            <a:off x="6380473" y="3301951"/>
-            <a:ext cx="1010128" cy="393402"/>
+            <a:off x="4785355" y="3333713"/>
+            <a:ext cx="757596" cy="295052"/>
           </a:xfrm>
           <a:custGeom>
             <a:avLst/>
@@ -17180,7 +16745,7 @@
           <a:lstStyle/>
           <a:p>
             <a:pPr algn="ctr"/>
-            <a:endParaRPr/>
+            <a:endParaRPr sz="1350"/>
           </a:p>
         </p:txBody>
       </p:sp>
@@ -17192,8 +16757,8 @@
         </p:nvSpPr>
         <p:spPr>
           <a:xfrm>
-            <a:off x="6380473" y="3863491"/>
-            <a:ext cx="1035262" cy="393404"/>
+            <a:off x="4785355" y="3754868"/>
+            <a:ext cx="776447" cy="295053"/>
           </a:xfrm>
           <a:custGeom>
             <a:avLst/>
@@ -17256,7 +16821,7 @@
           <a:lstStyle/>
           <a:p>
             <a:pPr algn="ctr"/>
-            <a:endParaRPr/>
+            <a:endParaRPr sz="1350"/>
           </a:p>
         </p:txBody>
       </p:sp>
@@ -17268,8 +16833,8 @@
         </p:nvSpPr>
         <p:spPr>
           <a:xfrm>
-            <a:off x="6380473" y="3863492"/>
-            <a:ext cx="1035260" cy="393403"/>
+            <a:off x="4785355" y="3754870"/>
+            <a:ext cx="776445" cy="295052"/>
           </a:xfrm>
           <a:custGeom>
             <a:avLst/>
@@ -17374,7 +16939,7 @@
           <a:lstStyle/>
           <a:p>
             <a:pPr algn="ctr"/>
-            <a:endParaRPr/>
+            <a:endParaRPr sz="1350"/>
           </a:p>
         </p:txBody>
       </p:sp>
@@ -17386,8 +16951,8 @@
         </p:nvSpPr>
         <p:spPr>
           <a:xfrm>
-            <a:off x="6380473" y="4425030"/>
-            <a:ext cx="1116614" cy="393404"/>
+            <a:off x="4785355" y="4176023"/>
+            <a:ext cx="837461" cy="295053"/>
           </a:xfrm>
           <a:custGeom>
             <a:avLst/>
@@ -17450,7 +17015,7 @@
           <a:lstStyle/>
           <a:p>
             <a:pPr algn="ctr"/>
-            <a:endParaRPr/>
+            <a:endParaRPr sz="1350"/>
           </a:p>
         </p:txBody>
       </p:sp>
@@ -17462,8 +17027,8 @@
         </p:nvSpPr>
         <p:spPr>
           <a:xfrm>
-            <a:off x="6380473" y="4425030"/>
-            <a:ext cx="1116614" cy="393402"/>
+            <a:off x="4785355" y="4176022"/>
+            <a:ext cx="837461" cy="295052"/>
           </a:xfrm>
           <a:custGeom>
             <a:avLst/>
@@ -17568,7 +17133,7 @@
           <a:lstStyle/>
           <a:p>
             <a:pPr algn="ctr"/>
-            <a:endParaRPr/>
+            <a:endParaRPr sz="1350"/>
           </a:p>
         </p:txBody>
       </p:sp>
@@ -17580,8 +17145,8 @@
         </p:nvSpPr>
         <p:spPr>
           <a:xfrm>
-            <a:off x="6380474" y="4986569"/>
-            <a:ext cx="1086493" cy="393404"/>
+            <a:off x="4785356" y="4597177"/>
+            <a:ext cx="814870" cy="295053"/>
           </a:xfrm>
           <a:custGeom>
             <a:avLst/>
@@ -17644,7 +17209,7 @@
           <a:lstStyle/>
           <a:p>
             <a:pPr algn="ctr"/>
-            <a:endParaRPr/>
+            <a:endParaRPr sz="1350"/>
           </a:p>
         </p:txBody>
       </p:sp>
@@ -17656,8 +17221,8 @@
         </p:nvSpPr>
         <p:spPr>
           <a:xfrm>
-            <a:off x="6380474" y="4986569"/>
-            <a:ext cx="1086489" cy="393402"/>
+            <a:off x="4785356" y="4597177"/>
+            <a:ext cx="814867" cy="295052"/>
           </a:xfrm>
           <a:custGeom>
             <a:avLst/>
@@ -17762,7 +17327,7 @@
           <a:lstStyle/>
           <a:p>
             <a:pPr algn="ctr"/>
-            <a:endParaRPr/>
+            <a:endParaRPr sz="1350"/>
           </a:p>
         </p:txBody>
       </p:sp>
@@ -17774,8 +17339,8 @@
         </p:nvGrpSpPr>
         <p:grpSpPr>
           <a:xfrm>
-            <a:off x="5775185" y="1736697"/>
-            <a:ext cx="587634" cy="2042765"/>
+            <a:off x="4331389" y="2159773"/>
+            <a:ext cx="440726" cy="1532074"/>
             <a:chOff x="1814509" y="1279496"/>
             <a:chExt cx="587634" cy="2042765"/>
           </a:xfrm>
@@ -17836,7 +17401,7 @@
             <a:lstStyle/>
             <a:p>
               <a:pPr algn="ctr"/>
-              <a:endParaRPr/>
+              <a:endParaRPr sz="1350"/>
             </a:p>
           </p:txBody>
         </p:sp>
@@ -17883,7 +17448,7 @@
             <a:lstStyle/>
             <a:p>
               <a:pPr algn="ctr"/>
-              <a:endParaRPr/>
+              <a:endParaRPr sz="1350"/>
             </a:p>
           </p:txBody>
         </p:sp>
@@ -17896,8 +17461,8 @@
         </p:nvGrpSpPr>
         <p:grpSpPr>
           <a:xfrm>
-            <a:off x="5775185" y="2298236"/>
-            <a:ext cx="587634" cy="1481191"/>
+            <a:off x="4331389" y="2580928"/>
+            <a:ext cx="440726" cy="1110893"/>
             <a:chOff x="1814509" y="1841035"/>
             <a:chExt cx="587634" cy="1481191"/>
           </a:xfrm>
@@ -17958,7 +17523,7 @@
             <a:lstStyle/>
             <a:p>
               <a:pPr algn="ctr"/>
-              <a:endParaRPr/>
+              <a:endParaRPr sz="1350"/>
             </a:p>
           </p:txBody>
         </p:sp>
@@ -18005,7 +17570,7 @@
             <a:lstStyle/>
             <a:p>
               <a:pPr algn="ctr"/>
-              <a:endParaRPr/>
+              <a:endParaRPr sz="1350"/>
             </a:p>
           </p:txBody>
         </p:sp>
@@ -18018,8 +17583,8 @@
         </p:nvGrpSpPr>
         <p:grpSpPr>
           <a:xfrm>
-            <a:off x="5775185" y="2859772"/>
-            <a:ext cx="587634" cy="919618"/>
+            <a:off x="4331389" y="3002079"/>
+            <a:ext cx="440726" cy="689714"/>
             <a:chOff x="1814509" y="2402572"/>
             <a:chExt cx="587634" cy="919618"/>
           </a:xfrm>
@@ -18080,7 +17645,7 @@
             <a:lstStyle/>
             <a:p>
               <a:pPr algn="ctr"/>
-              <a:endParaRPr/>
+              <a:endParaRPr sz="1350"/>
             </a:p>
           </p:txBody>
         </p:sp>
@@ -18127,7 +17692,7 @@
             <a:lstStyle/>
             <a:p>
               <a:pPr algn="ctr"/>
-              <a:endParaRPr/>
+              <a:endParaRPr sz="1350"/>
             </a:p>
           </p:txBody>
         </p:sp>
@@ -18140,8 +17705,8 @@
         </p:nvGrpSpPr>
         <p:grpSpPr>
           <a:xfrm>
-            <a:off x="5775185" y="3421311"/>
-            <a:ext cx="587634" cy="358128"/>
+            <a:off x="4331389" y="3423233"/>
+            <a:ext cx="440726" cy="268596"/>
             <a:chOff x="1814509" y="2964111"/>
             <a:chExt cx="587634" cy="358128"/>
           </a:xfrm>
@@ -18202,7 +17767,7 @@
             <a:lstStyle/>
             <a:p>
               <a:pPr algn="ctr"/>
-              <a:endParaRPr/>
+              <a:endParaRPr sz="1350"/>
             </a:p>
           </p:txBody>
         </p:sp>
@@ -18249,7 +17814,7 @@
             <a:lstStyle/>
             <a:p>
               <a:pPr algn="ctr"/>
-              <a:endParaRPr/>
+              <a:endParaRPr sz="1350"/>
             </a:p>
           </p:txBody>
         </p:sp>
@@ -18262,8 +17827,8 @@
         </p:nvGrpSpPr>
         <p:grpSpPr>
           <a:xfrm>
-            <a:off x="5775185" y="3779423"/>
-            <a:ext cx="587634" cy="358128"/>
+            <a:off x="4331389" y="3691817"/>
+            <a:ext cx="440726" cy="268596"/>
             <a:chOff x="1814509" y="3322223"/>
             <a:chExt cx="587634" cy="358128"/>
           </a:xfrm>
@@ -18324,7 +17889,7 @@
             <a:lstStyle/>
             <a:p>
               <a:pPr algn="ctr"/>
-              <a:endParaRPr/>
+              <a:endParaRPr sz="1350"/>
             </a:p>
           </p:txBody>
         </p:sp>
@@ -18371,7 +17936,7 @@
             <a:lstStyle/>
             <a:p>
               <a:pPr algn="ctr"/>
-              <a:endParaRPr/>
+              <a:endParaRPr sz="1350"/>
             </a:p>
           </p:txBody>
         </p:sp>
@@ -18384,8 +17949,8 @@
         </p:nvGrpSpPr>
         <p:grpSpPr>
           <a:xfrm>
-            <a:off x="5775185" y="3779424"/>
-            <a:ext cx="587634" cy="919701"/>
+            <a:off x="4331389" y="3691818"/>
+            <a:ext cx="440726" cy="689776"/>
             <a:chOff x="1814509" y="3322223"/>
             <a:chExt cx="587634" cy="919701"/>
           </a:xfrm>
@@ -18446,7 +18011,7 @@
             <a:lstStyle/>
             <a:p>
               <a:pPr algn="ctr"/>
-              <a:endParaRPr/>
+              <a:endParaRPr sz="1350"/>
             </a:p>
           </p:txBody>
         </p:sp>
@@ -18493,7 +18058,7 @@
             <a:lstStyle/>
             <a:p>
               <a:pPr algn="ctr"/>
-              <a:endParaRPr/>
+              <a:endParaRPr sz="1350"/>
             </a:p>
           </p:txBody>
         </p:sp>
@@ -18506,8 +18071,8 @@
         </p:nvGrpSpPr>
         <p:grpSpPr>
           <a:xfrm>
-            <a:off x="5775185" y="3779424"/>
-            <a:ext cx="587634" cy="1481275"/>
+            <a:off x="4331389" y="3691819"/>
+            <a:ext cx="440726" cy="1110956"/>
             <a:chOff x="1814509" y="3322223"/>
             <a:chExt cx="587634" cy="1481275"/>
           </a:xfrm>
@@ -18568,7 +18133,7 @@
             <a:lstStyle/>
             <a:p>
               <a:pPr algn="ctr"/>
-              <a:endParaRPr/>
+              <a:endParaRPr sz="1350"/>
             </a:p>
           </p:txBody>
         </p:sp>
@@ -18615,7 +18180,7 @@
             <a:lstStyle/>
             <a:p>
               <a:pPr algn="ctr"/>
-              <a:endParaRPr/>
+              <a:endParaRPr sz="1350"/>
             </a:p>
           </p:txBody>
         </p:sp>
@@ -18628,8 +18193,8 @@
         </p:nvGrpSpPr>
         <p:grpSpPr>
           <a:xfrm>
-            <a:off x="5775185" y="3779424"/>
-            <a:ext cx="587634" cy="2042849"/>
+            <a:off x="4331389" y="3691818"/>
+            <a:ext cx="440726" cy="1532137"/>
             <a:chOff x="1814509" y="3322223"/>
             <a:chExt cx="587634" cy="2042849"/>
           </a:xfrm>
@@ -18690,7 +18255,7 @@
             <a:lstStyle/>
             <a:p>
               <a:pPr algn="ctr"/>
-              <a:endParaRPr/>
+              <a:endParaRPr sz="1350"/>
             </a:p>
           </p:txBody>
         </p:sp>
@@ -18737,7 +18302,7 @@
             <a:lstStyle/>
             <a:p>
               <a:pPr algn="ctr"/>
-              <a:endParaRPr/>
+              <a:endParaRPr sz="1350"/>
             </a:p>
           </p:txBody>
         </p:sp>
@@ -18750,8 +18315,8 @@
         </p:nvSpPr>
         <p:spPr>
           <a:xfrm>
-            <a:off x="4542102" y="3678541"/>
-            <a:ext cx="168135" cy="201762"/>
+            <a:off x="3406577" y="3616156"/>
+            <a:ext cx="126101" cy="151322"/>
           </a:xfrm>
           <a:custGeom>
             <a:avLst/>
@@ -19057,7 +18622,7 @@
           <a:lstStyle/>
           <a:p>
             <a:pPr algn="ctr"/>
-            <a:endParaRPr/>
+            <a:endParaRPr sz="1350"/>
           </a:p>
         </p:txBody>
       </p:sp>
@@ -19069,8 +18634,8 @@
         </p:nvSpPr>
         <p:spPr>
           <a:xfrm>
-            <a:off x="6463348" y="2279236"/>
-            <a:ext cx="187336" cy="192683"/>
+            <a:off x="4847511" y="2566678"/>
+            <a:ext cx="140502" cy="144512"/>
           </a:xfrm>
           <a:custGeom>
             <a:avLst/>
@@ -19455,7 +19020,7 @@
           <a:lstStyle/>
           <a:p>
             <a:pPr algn="ctr"/>
-            <a:endParaRPr/>
+            <a:endParaRPr sz="1350"/>
           </a:p>
         </p:txBody>
       </p:sp>
@@ -19467,8 +19032,8 @@
         </p:nvSpPr>
         <p:spPr>
           <a:xfrm>
-            <a:off x="6472949" y="5643926"/>
-            <a:ext cx="168135" cy="201762"/>
+            <a:off x="4854712" y="5090194"/>
+            <a:ext cx="126101" cy="151322"/>
           </a:xfrm>
           <a:custGeom>
             <a:avLst/>
@@ -19623,7 +19188,7 @@
           <a:lstStyle/>
           <a:p>
             <a:pPr algn="ctr"/>
-            <a:endParaRPr/>
+            <a:endParaRPr sz="1350"/>
           </a:p>
         </p:txBody>
       </p:sp>
@@ -19635,8 +19200,8 @@
         </p:nvSpPr>
         <p:spPr>
           <a:xfrm>
-            <a:off x="6458237" y="3399470"/>
-            <a:ext cx="197559" cy="200064"/>
+            <a:off x="4843678" y="3406853"/>
+            <a:ext cx="148169" cy="150048"/>
           </a:xfrm>
           <a:custGeom>
             <a:avLst/>
@@ -20040,7 +19605,7 @@
           <a:lstStyle/>
           <a:p>
             <a:pPr algn="ctr"/>
-            <a:endParaRPr/>
+            <a:endParaRPr sz="1350"/>
           </a:p>
         </p:txBody>
       </p:sp>
@@ -20052,8 +19617,8 @@
         </p:nvSpPr>
         <p:spPr>
           <a:xfrm>
-            <a:off x="6456134" y="4520850"/>
-            <a:ext cx="201762" cy="201762"/>
+            <a:off x="4842100" y="4247887"/>
+            <a:ext cx="151322" cy="151322"/>
           </a:xfrm>
           <a:custGeom>
             <a:avLst/>
@@ -20290,7 +19855,7 @@
           <a:lstStyle/>
           <a:p>
             <a:pPr algn="ctr"/>
-            <a:endParaRPr/>
+            <a:endParaRPr sz="1350"/>
           </a:p>
         </p:txBody>
       </p:sp>
@@ -20302,8 +19867,8 @@
         </p:nvSpPr>
         <p:spPr>
           <a:xfrm>
-            <a:off x="6454268" y="2834628"/>
-            <a:ext cx="203730" cy="203477"/>
+            <a:off x="4840701" y="2983221"/>
+            <a:ext cx="152798" cy="152608"/>
           </a:xfrm>
           <a:custGeom>
             <a:avLst/>
@@ -20399,7 +19964,7 @@
           <a:lstStyle/>
           <a:p>
             <a:pPr algn="ctr"/>
-            <a:endParaRPr/>
+            <a:endParaRPr sz="1350"/>
           </a:p>
         </p:txBody>
       </p:sp>
@@ -20411,8 +19976,8 @@
         </p:nvSpPr>
         <p:spPr>
           <a:xfrm>
-            <a:off x="6472949" y="1713157"/>
-            <a:ext cx="168135" cy="201762"/>
+            <a:off x="4854712" y="2142118"/>
+            <a:ext cx="126101" cy="151322"/>
           </a:xfrm>
           <a:custGeom>
             <a:avLst/>
@@ -20726,7 +20291,7 @@
           <a:lstStyle/>
           <a:p>
             <a:pPr algn="ctr"/>
-            <a:endParaRPr/>
+            <a:endParaRPr sz="1350"/>
           </a:p>
         </p:txBody>
       </p:sp>
@@ -20738,8 +20303,8 @@
         </p:nvSpPr>
         <p:spPr>
           <a:xfrm>
-            <a:off x="6455706" y="3959395"/>
-            <a:ext cx="202368" cy="201678"/>
+            <a:off x="4841780" y="3826796"/>
+            <a:ext cx="151776" cy="151259"/>
           </a:xfrm>
           <a:custGeom>
             <a:avLst/>
@@ -21116,7 +20681,7 @@
           <a:lstStyle/>
           <a:p>
             <a:pPr algn="ctr"/>
-            <a:endParaRPr/>
+            <a:endParaRPr sz="1350"/>
           </a:p>
         </p:txBody>
       </p:sp>
@@ -21128,8 +20693,8 @@
         </p:nvSpPr>
         <p:spPr>
           <a:xfrm>
-            <a:off x="6456134" y="5099201"/>
-            <a:ext cx="201762" cy="168135"/>
+            <a:off x="4842100" y="4681651"/>
+            <a:ext cx="151322" cy="126101"/>
           </a:xfrm>
           <a:custGeom>
             <a:avLst/>
@@ -21460,7 +21025,7 @@
           <a:lstStyle/>
           <a:p>
             <a:pPr algn="ctr"/>
-            <a:endParaRPr/>
+            <a:endParaRPr sz="1350"/>
           </a:p>
         </p:txBody>
       </p:sp>
@@ -21472,8 +21037,8 @@
         </p:nvGrpSpPr>
         <p:grpSpPr>
           <a:xfrm>
-            <a:off x="4794305" y="3658382"/>
-            <a:ext cx="888404" cy="242080"/>
+            <a:off x="3595729" y="3601037"/>
+            <a:ext cx="666303" cy="181560"/>
             <a:chOff x="833629" y="3201182"/>
             <a:chExt cx="888404" cy="242080"/>
           </a:xfrm>
@@ -21505,7 +21070,7 @@
             <a:p>
               <a:pPr algn="l"/>
               <a:r>
-                <a:rPr sz="700" b="1">
+                <a:rPr sz="525" b="1">
                   <a:solidFill>
                     <a:srgbClr val="384F61"/>
                   </a:solidFill>
@@ -21543,7 +21108,7 @@
             <a:p>
               <a:pPr algn="l"/>
               <a:r>
-                <a:rPr sz="700" b="1">
+                <a:rPr sz="525" b="1">
                   <a:solidFill>
                     <a:srgbClr val="384F61"/>
                   </a:solidFill>
@@ -21563,8 +21128,8 @@
         </p:nvGrpSpPr>
         <p:grpSpPr>
           <a:xfrm>
-            <a:off x="6725153" y="3377612"/>
-            <a:ext cx="572973" cy="242081"/>
+            <a:off x="5043865" y="3390459"/>
+            <a:ext cx="429730" cy="181561"/>
             <a:chOff x="2764476" y="2920411"/>
             <a:chExt cx="572973" cy="242081"/>
           </a:xfrm>
@@ -21596,7 +21161,7 @@
             <a:p>
               <a:pPr algn="l"/>
               <a:r>
-                <a:rPr sz="700" b="1">
+                <a:rPr sz="525" b="1">
                   <a:solidFill>
                     <a:srgbClr val="384F61"/>
                   </a:solidFill>
@@ -21634,7 +21199,7 @@
             <a:p>
               <a:pPr algn="l"/>
               <a:r>
-                <a:rPr sz="700" b="1">
+                <a:rPr sz="525" b="1">
                   <a:solidFill>
                     <a:srgbClr val="384F61"/>
                   </a:solidFill>
@@ -21654,8 +21219,8 @@
         </p:nvGrpSpPr>
         <p:grpSpPr>
           <a:xfrm>
-            <a:off x="6725153" y="2816073"/>
-            <a:ext cx="875533" cy="242080"/>
+            <a:off x="5043865" y="2969305"/>
+            <a:ext cx="656650" cy="181560"/>
             <a:chOff x="2764476" y="2358873"/>
             <a:chExt cx="875533" cy="242080"/>
           </a:xfrm>
@@ -21687,7 +21252,7 @@
             <a:p>
               <a:pPr algn="l"/>
               <a:r>
-                <a:rPr sz="700" b="1">
+                <a:rPr sz="525" b="1">
                   <a:solidFill>
                     <a:srgbClr val="384F61"/>
                   </a:solidFill>
@@ -21725,7 +21290,7 @@
             <a:p>
               <a:pPr algn="l"/>
               <a:r>
-                <a:rPr sz="700" b="1">
+                <a:rPr sz="525" b="1">
                   <a:solidFill>
                     <a:srgbClr val="384F61"/>
                   </a:solidFill>
@@ -21745,8 +21310,8 @@
         </p:nvGrpSpPr>
         <p:grpSpPr>
           <a:xfrm>
-            <a:off x="6725152" y="2254536"/>
-            <a:ext cx="917214" cy="242080"/>
+            <a:off x="5043864" y="2548152"/>
+            <a:ext cx="687911" cy="181560"/>
             <a:chOff x="2764476" y="1797336"/>
             <a:chExt cx="917214" cy="242080"/>
           </a:xfrm>
@@ -21778,7 +21343,7 @@
             <a:p>
               <a:pPr algn="l"/>
               <a:r>
-                <a:rPr sz="700" b="1">
+                <a:rPr sz="525" b="1">
                   <a:solidFill>
                     <a:srgbClr val="384F61"/>
                   </a:solidFill>
@@ -21816,7 +21381,7 @@
             <a:p>
               <a:pPr algn="l"/>
               <a:r>
-                <a:rPr sz="700" b="1">
+                <a:rPr sz="525" b="1">
                   <a:solidFill>
                     <a:srgbClr val="384F61"/>
                   </a:solidFill>
@@ -21836,8 +21401,8 @@
         </p:nvGrpSpPr>
         <p:grpSpPr>
           <a:xfrm>
-            <a:off x="6725153" y="3939151"/>
-            <a:ext cx="598109" cy="242080"/>
+            <a:off x="5043865" y="3811613"/>
+            <a:ext cx="448582" cy="181560"/>
             <a:chOff x="2764476" y="3481951"/>
             <a:chExt cx="598109" cy="242080"/>
           </a:xfrm>
@@ -21869,7 +21434,7 @@
             <a:p>
               <a:pPr algn="l"/>
               <a:r>
-                <a:rPr sz="700" b="1">
+                <a:rPr sz="525" b="1">
                   <a:solidFill>
                     <a:srgbClr val="384F61"/>
                   </a:solidFill>
@@ -21907,7 +21472,7 @@
             <a:p>
               <a:pPr algn="l"/>
               <a:r>
-                <a:rPr sz="700" b="1">
+                <a:rPr sz="525" b="1">
                   <a:solidFill>
                     <a:srgbClr val="384F61"/>
                   </a:solidFill>
@@ -21927,8 +21492,8 @@
         </p:nvGrpSpPr>
         <p:grpSpPr>
           <a:xfrm>
-            <a:off x="6725152" y="1692997"/>
-            <a:ext cx="656696" cy="242080"/>
+            <a:off x="5043864" y="2126998"/>
+            <a:ext cx="492522" cy="181560"/>
             <a:chOff x="2764476" y="1235797"/>
             <a:chExt cx="656696" cy="242080"/>
           </a:xfrm>
@@ -21960,7 +21525,7 @@
             <a:p>
               <a:pPr algn="l"/>
               <a:r>
-                <a:rPr sz="700" b="1">
+                <a:rPr sz="525" b="1">
                   <a:solidFill>
                     <a:srgbClr val="384F61"/>
                   </a:solidFill>
@@ -21998,7 +21563,7 @@
             <a:p>
               <a:pPr algn="l"/>
               <a:r>
-                <a:rPr sz="700" b="1">
+                <a:rPr sz="525" b="1">
                   <a:solidFill>
                     <a:srgbClr val="384F61"/>
                   </a:solidFill>
@@ -22018,8 +21583,8 @@
         </p:nvGrpSpPr>
         <p:grpSpPr>
           <a:xfrm>
-            <a:off x="6725153" y="4500690"/>
-            <a:ext cx="679461" cy="242081"/>
+            <a:off x="5043865" y="4232768"/>
+            <a:ext cx="509596" cy="181561"/>
             <a:chOff x="2764476" y="4043489"/>
             <a:chExt cx="679461" cy="242081"/>
           </a:xfrm>
@@ -22051,7 +21616,7 @@
             <a:p>
               <a:pPr algn="l"/>
               <a:r>
-                <a:rPr sz="700" b="1">
+                <a:rPr sz="525" b="1">
                   <a:solidFill>
                     <a:srgbClr val="384F61"/>
                   </a:solidFill>
@@ -22089,7 +21654,7 @@
             <a:p>
               <a:pPr algn="l"/>
               <a:r>
-                <a:rPr sz="700" b="1">
+                <a:rPr sz="525" b="1">
                   <a:solidFill>
                     <a:srgbClr val="384F61"/>
                   </a:solidFill>
@@ -22109,8 +21674,8 @@
         </p:nvGrpSpPr>
         <p:grpSpPr>
           <a:xfrm>
-            <a:off x="6725152" y="5062227"/>
-            <a:ext cx="649340" cy="242080"/>
+            <a:off x="5043864" y="4653920"/>
+            <a:ext cx="487005" cy="181560"/>
             <a:chOff x="2764476" y="4605027"/>
             <a:chExt cx="649340" cy="242080"/>
           </a:xfrm>
@@ -22142,7 +21707,7 @@
             <a:p>
               <a:pPr algn="l"/>
               <a:r>
-                <a:rPr sz="700" b="1">
+                <a:rPr sz="525" b="1">
                   <a:solidFill>
                     <a:srgbClr val="384F61"/>
                   </a:solidFill>
@@ -22180,7 +21745,7 @@
             <a:p>
               <a:pPr algn="l"/>
               <a:r>
-                <a:rPr sz="700" b="1">
+                <a:rPr sz="525" b="1">
                   <a:solidFill>
                     <a:srgbClr val="384F61"/>
                   </a:solidFill>
@@ -22200,8 +21765,8 @@
         </p:nvGrpSpPr>
         <p:grpSpPr>
           <a:xfrm>
-            <a:off x="4179254" y="860725"/>
-            <a:ext cx="3825963" cy="504406"/>
+            <a:off x="3134441" y="1502794"/>
+            <a:ext cx="2869472" cy="378305"/>
             <a:chOff x="218577" y="403525"/>
             <a:chExt cx="3825963" cy="504406"/>
           </a:xfrm>
@@ -22233,7 +21798,7 @@
             <a:p>
               <a:pPr algn="ctr"/>
               <a:r>
-                <a:rPr sz="1600" b="1">
+                <a:rPr sz="1200" b="1">
                   <a:solidFill>
                     <a:srgbClr val="384F61"/>
                   </a:solidFill>
@@ -22271,7 +21836,7 @@
             <a:p>
               <a:pPr algn="ctr"/>
               <a:r>
-                <a:rPr sz="1600" b="1">
+                <a:rPr sz="1200" b="1">
                   <a:solidFill>
                     <a:srgbClr val="384F61"/>
                   </a:solidFill>
@@ -22291,8 +21856,8 @@
         </p:nvGrpSpPr>
         <p:grpSpPr>
           <a:xfrm>
-            <a:off x="6725152" y="5623766"/>
-            <a:ext cx="692332" cy="242080"/>
+            <a:off x="5043864" y="5075075"/>
+            <a:ext cx="519249" cy="181560"/>
             <a:chOff x="2764476" y="5166566"/>
             <a:chExt cx="692332" cy="242080"/>
           </a:xfrm>
@@ -22324,7 +21889,7 @@
             <a:p>
               <a:pPr algn="l"/>
               <a:r>
-                <a:rPr sz="700" b="1">
+                <a:rPr sz="525" b="1">
                   <a:solidFill>
                     <a:srgbClr val="384F61"/>
                   </a:solidFill>
@@ -22362,7 +21927,7 @@
             <a:p>
               <a:pPr algn="l"/>
               <a:r>
-                <a:rPr sz="700" b="1">
+                <a:rPr sz="525" b="1">
                   <a:solidFill>
                     <a:srgbClr val="384F61"/>
                   </a:solidFill>
@@ -22382,6 +21947,85 @@
 </p:sld>
 </file>
 
+<file path=ppt/slides/slide9.xml><?xml version="1.0" encoding="utf-8"?>
+<p:sld xmlns:a="http://schemas.openxmlformats.org/drawingml/2006/main" xmlns:r="http://schemas.openxmlformats.org/officeDocument/2006/relationships" xmlns:p="http://schemas.openxmlformats.org/presentationml/2006/main">
+  <p:cSld>
+    <p:spTree>
+      <p:nvGrpSpPr>
+        <p:cNvPr id="1" name=""/>
+        <p:cNvGrpSpPr/>
+        <p:nvPr/>
+      </p:nvGrpSpPr>
+      <p:grpSpPr>
+        <a:xfrm>
+          <a:off x="0" y="0"/>
+          <a:ext cx="0" cy="0"/>
+          <a:chOff x="0" y="0"/>
+          <a:chExt cx="0" cy="0"/>
+        </a:xfrm>
+      </p:grpSpPr>
+      <p:sp>
+        <p:nvSpPr>
+          <p:cNvPr id="2" name="Title 1"/>
+          <p:cNvSpPr>
+            <a:spLocks noGrp="1"/>
+          </p:cNvSpPr>
+          <p:nvPr>
+            <p:ph type="title"/>
+          </p:nvPr>
+        </p:nvSpPr>
+        <p:spPr/>
+        <p:txBody>
+          <a:bodyPr/>
+          <a:lstStyle/>
+          <a:p>
+            <a:r>
+              <a:rPr dirty="0"/>
+              <a:t>Containerization Strategy</a:t>
+            </a:r>
+          </a:p>
+        </p:txBody>
+      </p:sp>
+      <p:sp>
+        <p:nvSpPr>
+          <p:cNvPr id="3" name="TextBox 2"/>
+          <p:cNvSpPr txBox="1"/>
+          <p:nvPr/>
+        </p:nvSpPr>
+        <p:spPr>
+          <a:xfrm>
+            <a:off x="640080" y="1612900"/>
+            <a:ext cx="7772400" cy="4572000"/>
+          </a:xfrm>
+          <a:prstGeom prst="rect">
+            <a:avLst/>
+          </a:prstGeom>
+          <a:noFill/>
+        </p:spPr>
+        <p:txBody>
+          <a:bodyPr wrap="none">
+            <a:spAutoFit/>
+          </a:bodyPr>
+          <a:lstStyle/>
+          <a:p>
+            <a:pPr>
+              <a:defRPr sz="2200"/>
+            </a:pPr>
+            <a:r>
+              <a:rPr dirty="0"/>
+              <a:t>• Multi-stage Docker, security hardening, health probes</a:t>
+            </a:r>
+          </a:p>
+        </p:txBody>
+      </p:sp>
+    </p:spTree>
+  </p:cSld>
+  <p:clrMapOvr>
+    <a:masterClrMapping/>
+  </p:clrMapOvr>
+</p:sld>
+</file>
+
 <file path=ppt/theme/theme1.xml><?xml version="1.0" encoding="utf-8"?>
 <a:theme xmlns:a="http://schemas.openxmlformats.org/drawingml/2006/main" name="Office Theme">
   <a:themeElements>
@@ -22393,44 +22037,44 @@
         <a:sysClr val="window" lastClr="FFFFFF"/>
       </a:lt1>
       <a:dk2>
-        <a:srgbClr val="44546A"/>
+        <a:srgbClr val="1F497D"/>
       </a:dk2>
       <a:lt2>
-        <a:srgbClr val="E7E6E6"/>
+        <a:srgbClr val="EEECE1"/>
       </a:lt2>
       <a:accent1>
-        <a:srgbClr val="4472C4"/>
+        <a:srgbClr val="4F81BD"/>
       </a:accent1>
       <a:accent2>
-        <a:srgbClr val="ED7D31"/>
+        <a:srgbClr val="C0504D"/>
       </a:accent2>
       <a:accent3>
-        <a:srgbClr val="A5A5A5"/>
+        <a:srgbClr val="9BBB59"/>
       </a:accent3>
       <a:accent4>
-        <a:srgbClr val="FFC000"/>
+        <a:srgbClr val="8064A2"/>
       </a:accent4>
       <a:accent5>
-        <a:srgbClr val="5B9BD5"/>
+        <a:srgbClr val="4BACC6"/>
       </a:accent5>
       <a:accent6>
-        <a:srgbClr val="70AD47"/>
+        <a:srgbClr val="F79646"/>
       </a:accent6>
       <a:hlink>
-        <a:srgbClr val="0563C1"/>
+        <a:srgbClr val="0000FF"/>
       </a:hlink>
       <a:folHlink>
-        <a:srgbClr val="954F72"/>
+        <a:srgbClr val="800080"/>
       </a:folHlink>
     </a:clrScheme>
     <a:fontScheme name="Office">
       <a:majorFont>
-        <a:latin typeface="Calibri Light" panose="020F0302020204030204"/>
+        <a:latin typeface="Calibri"/>
         <a:ea typeface=""/>
         <a:cs typeface=""/>
-        <a:font script="Jpan" typeface="游ゴシック Light"/>
+        <a:font script="Jpan" typeface="ＭＳ Ｐゴシック"/>
         <a:font script="Hang" typeface="맑은 고딕"/>
-        <a:font script="Hans" typeface="等线 Light"/>
+        <a:font script="Hans" typeface="宋体"/>
         <a:font script="Hant" typeface="新細明體"/>
         <a:font script="Arab" typeface="Times New Roman"/>
         <a:font script="Hebr" typeface="Times New Roman"/>
@@ -22458,31 +22102,14 @@
         <a:font script="Viet" typeface="Times New Roman"/>
         <a:font script="Uigh" typeface="Microsoft Uighur"/>
         <a:font script="Geor" typeface="Sylfaen"/>
-        <a:font script="Armn" typeface="Arial"/>
-        <a:font script="Bugi" typeface="Leelawadee UI"/>
-        <a:font script="Bopo" typeface="Microsoft JhengHei"/>
-        <a:font script="Java" typeface="Javanese Text"/>
-        <a:font script="Lisu" typeface="Segoe UI"/>
-        <a:font script="Mymr" typeface="Myanmar Text"/>
-        <a:font script="Nkoo" typeface="Ebrima"/>
-        <a:font script="Olck" typeface="Nirmala UI"/>
-        <a:font script="Osma" typeface="Ebrima"/>
-        <a:font script="Phag" typeface="Phagspa"/>
-        <a:font script="Syrn" typeface="Estrangelo Edessa"/>
-        <a:font script="Syrj" typeface="Estrangelo Edessa"/>
-        <a:font script="Syre" typeface="Estrangelo Edessa"/>
-        <a:font script="Sora" typeface="Nirmala UI"/>
-        <a:font script="Tale" typeface="Microsoft Tai Le"/>
-        <a:font script="Talu" typeface="Microsoft New Tai Lue"/>
-        <a:font script="Tfng" typeface="Ebrima"/>
       </a:majorFont>
       <a:minorFont>
-        <a:latin typeface="Calibri" panose="020F0502020204030204"/>
+        <a:latin typeface="Calibri"/>
         <a:ea typeface=""/>
         <a:cs typeface=""/>
-        <a:font script="Jpan" typeface="游ゴシック"/>
+        <a:font script="Jpan" typeface="ＭＳ Ｐゴシック"/>
         <a:font script="Hang" typeface="맑은 고딕"/>
-        <a:font script="Hans" typeface="等线"/>
+        <a:font script="Hans" typeface="宋体"/>
         <a:font script="Hant" typeface="新細明體"/>
         <a:font script="Arab" typeface="Arial"/>
         <a:font script="Hebr" typeface="Arial"/>
@@ -22510,23 +22137,6 @@
         <a:font script="Viet" typeface="Arial"/>
         <a:font script="Uigh" typeface="Microsoft Uighur"/>
         <a:font script="Geor" typeface="Sylfaen"/>
-        <a:font script="Armn" typeface="Arial"/>
-        <a:font script="Bugi" typeface="Leelawadee UI"/>
-        <a:font script="Bopo" typeface="Microsoft JhengHei"/>
-        <a:font script="Java" typeface="Javanese Text"/>
-        <a:font script="Lisu" typeface="Segoe UI"/>
-        <a:font script="Mymr" typeface="Myanmar Text"/>
-        <a:font script="Nkoo" typeface="Ebrima"/>
-        <a:font script="Olck" typeface="Nirmala UI"/>
-        <a:font script="Osma" typeface="Ebrima"/>
-        <a:font script="Phag" typeface="Phagspa"/>
-        <a:font script="Syrn" typeface="Estrangelo Edessa"/>
-        <a:font script="Syrj" typeface="Estrangelo Edessa"/>
-        <a:font script="Syre" typeface="Estrangelo Edessa"/>
-        <a:font script="Sora" typeface="Nirmala UI"/>
-        <a:font script="Tale" typeface="Microsoft Tai Le"/>
-        <a:font script="Talu" typeface="Microsoft New Tai Lue"/>
-        <a:font script="Tfng" typeface="Ebrima"/>
       </a:minorFont>
     </a:fontScheme>
     <a:fmtScheme name="Office">
@@ -22538,141 +22148,200 @@
           <a:gsLst>
             <a:gs pos="0">
               <a:schemeClr val="phClr">
-                <a:lumMod val="110000"/>
-                <a:satMod val="105000"/>
-                <a:tint val="67000"/>
+                <a:tint val="50000"/>
+                <a:satMod val="300000"/>
               </a:schemeClr>
             </a:gs>
-            <a:gs pos="50000">
+            <a:gs pos="35000">
               <a:schemeClr val="phClr">
-                <a:lumMod val="105000"/>
-                <a:satMod val="103000"/>
-                <a:tint val="73000"/>
+                <a:tint val="37000"/>
+                <a:satMod val="300000"/>
               </a:schemeClr>
             </a:gs>
             <a:gs pos="100000">
               <a:schemeClr val="phClr">
-                <a:lumMod val="105000"/>
-                <a:satMod val="109000"/>
-                <a:tint val="81000"/>
+                <a:tint val="15000"/>
+                <a:satMod val="350000"/>
               </a:schemeClr>
             </a:gs>
           </a:gsLst>
-          <a:lin ang="5400000" scaled="0"/>
+          <a:lin ang="16200000" scaled="1"/>
         </a:gradFill>
         <a:gradFill rotWithShape="1">
           <a:gsLst>
             <a:gs pos="0">
               <a:schemeClr val="phClr">
-                <a:satMod val="103000"/>
-                <a:lumMod val="102000"/>
-                <a:tint val="94000"/>
-              </a:schemeClr>
-            </a:gs>
-            <a:gs pos="50000">
-              <a:schemeClr val="phClr">
-                <a:satMod val="110000"/>
-                <a:lumMod val="100000"/>
+                <a:tint val="100000"/>
                 <a:shade val="100000"/>
+                <a:satMod val="130000"/>
               </a:schemeClr>
             </a:gs>
             <a:gs pos="100000">
               <a:schemeClr val="phClr">
-                <a:lumMod val="99000"/>
-                <a:satMod val="120000"/>
-                <a:shade val="78000"/>
+                <a:tint val="50000"/>
+                <a:shade val="100000"/>
+                <a:satMod val="350000"/>
               </a:schemeClr>
             </a:gs>
           </a:gsLst>
-          <a:lin ang="5400000" scaled="0"/>
+          <a:lin ang="16200000" scaled="0"/>
         </a:gradFill>
       </a:fillStyleLst>
       <a:lnStyleLst>
-        <a:ln w="6350" cap="flat" cmpd="sng" algn="ctr">
+        <a:ln w="9525" cap="flat" cmpd="sng" algn="ctr">
+          <a:solidFill>
+            <a:schemeClr val="phClr">
+              <a:shade val="95000"/>
+              <a:satMod val="105000"/>
+            </a:schemeClr>
+          </a:solidFill>
+          <a:prstDash val="solid"/>
+        </a:ln>
+        <a:ln w="25400" cap="flat" cmpd="sng" algn="ctr">
           <a:solidFill>
             <a:schemeClr val="phClr"/>
           </a:solidFill>
           <a:prstDash val="solid"/>
-          <a:miter lim="800000"/>
         </a:ln>
-        <a:ln w="12700" cap="flat" cmpd="sng" algn="ctr">
+        <a:ln w="38100" cap="flat" cmpd="sng" algn="ctr">
           <a:solidFill>
             <a:schemeClr val="phClr"/>
           </a:solidFill>
           <a:prstDash val="solid"/>
-          <a:miter lim="800000"/>
-        </a:ln>
-        <a:ln w="19050" cap="flat" cmpd="sng" algn="ctr">
-          <a:solidFill>
-            <a:schemeClr val="phClr"/>
-          </a:solidFill>
-          <a:prstDash val="solid"/>
-          <a:miter lim="800000"/>
         </a:ln>
       </a:lnStyleLst>
       <a:effectStyleLst>
         <a:effectStyle>
-          <a:effectLst/>
-        </a:effectStyle>
-        <a:effectStyle>
-          <a:effectLst/>
+          <a:effectLst>
+            <a:outerShdw blurRad="40000" dist="20000" dir="5400000" rotWithShape="0">
+              <a:srgbClr val="000000">
+                <a:alpha val="38000"/>
+              </a:srgbClr>
+            </a:outerShdw>
+          </a:effectLst>
         </a:effectStyle>
         <a:effectStyle>
           <a:effectLst>
-            <a:outerShdw blurRad="57150" dist="19050" dir="5400000" algn="ctr" rotWithShape="0">
+            <a:outerShdw blurRad="40000" dist="23000" dir="5400000" rotWithShape="0">
               <a:srgbClr val="000000">
-                <a:alpha val="63000"/>
+                <a:alpha val="35000"/>
               </a:srgbClr>
             </a:outerShdw>
           </a:effectLst>
+        </a:effectStyle>
+        <a:effectStyle>
+          <a:effectLst>
+            <a:outerShdw blurRad="40000" dist="23000" dir="5400000" rotWithShape="0">
+              <a:srgbClr val="000000">
+                <a:alpha val="35000"/>
+              </a:srgbClr>
+            </a:outerShdw>
+          </a:effectLst>
+          <a:scene3d>
+            <a:camera prst="orthographicFront">
+              <a:rot lat="0" lon="0" rev="0"/>
+            </a:camera>
+            <a:lightRig rig="threePt" dir="t">
+              <a:rot lat="0" lon="0" rev="1200000"/>
+            </a:lightRig>
+          </a:scene3d>
+          <a:sp3d>
+            <a:bevelT w="63500" h="25400"/>
+          </a:sp3d>
         </a:effectStyle>
       </a:effectStyleLst>
       <a:bgFillStyleLst>
         <a:solidFill>
           <a:schemeClr val="phClr"/>
         </a:solidFill>
-        <a:solidFill>
-          <a:schemeClr val="phClr">
-            <a:tint val="95000"/>
-            <a:satMod val="170000"/>
-          </a:schemeClr>
-        </a:solidFill>
         <a:gradFill rotWithShape="1">
           <a:gsLst>
             <a:gs pos="0">
               <a:schemeClr val="phClr">
-                <a:tint val="93000"/>
-                <a:satMod val="150000"/>
-                <a:shade val="98000"/>
-                <a:lumMod val="102000"/>
+                <a:tint val="40000"/>
+                <a:satMod val="350000"/>
               </a:schemeClr>
             </a:gs>
-            <a:gs pos="50000">
+            <a:gs pos="40000">
               <a:schemeClr val="phClr">
-                <a:tint val="98000"/>
-                <a:satMod val="130000"/>
-                <a:shade val="90000"/>
-                <a:lumMod val="103000"/>
+                <a:tint val="45000"/>
+                <a:shade val="99000"/>
+                <a:satMod val="350000"/>
               </a:schemeClr>
             </a:gs>
             <a:gs pos="100000">
               <a:schemeClr val="phClr">
-                <a:shade val="63000"/>
-                <a:satMod val="120000"/>
+                <a:shade val="20000"/>
+                <a:satMod val="255000"/>
               </a:schemeClr>
             </a:gs>
           </a:gsLst>
-          <a:lin ang="5400000" scaled="0"/>
+          <a:path path="circle">
+            <a:fillToRect l="50000" t="-80000" r="50000" b="180000"/>
+          </a:path>
+        </a:gradFill>
+        <a:gradFill rotWithShape="1">
+          <a:gsLst>
+            <a:gs pos="0">
+              <a:schemeClr val="phClr">
+                <a:tint val="80000"/>
+                <a:satMod val="300000"/>
+              </a:schemeClr>
+            </a:gs>
+            <a:gs pos="100000">
+              <a:schemeClr val="phClr">
+                <a:shade val="30000"/>
+                <a:satMod val="200000"/>
+              </a:schemeClr>
+            </a:gs>
+          </a:gsLst>
+          <a:path path="circle">
+            <a:fillToRect l="50000" t="50000" r="50000" b="50000"/>
+          </a:path>
         </a:gradFill>
       </a:bgFillStyleLst>
     </a:fmtScheme>
   </a:themeElements>
-  <a:objectDefaults/>
+  <a:objectDefaults>
+    <a:spDef>
+      <a:spPr/>
+      <a:bodyPr/>
+      <a:lstStyle/>
+      <a:style>
+        <a:lnRef idx="1">
+          <a:schemeClr val="accent1"/>
+        </a:lnRef>
+        <a:fillRef idx="3">
+          <a:schemeClr val="accent1"/>
+        </a:fillRef>
+        <a:effectRef idx="2">
+          <a:schemeClr val="accent1"/>
+        </a:effectRef>
+        <a:fontRef idx="minor">
+          <a:schemeClr val="lt1"/>
+        </a:fontRef>
+      </a:style>
+    </a:spDef>
+    <a:lnDef>
+      <a:spPr/>
+      <a:bodyPr/>
+      <a:lstStyle/>
+      <a:style>
+        <a:lnRef idx="2">
+          <a:schemeClr val="accent1"/>
+        </a:lnRef>
+        <a:fillRef idx="0">
+          <a:schemeClr val="accent1"/>
+        </a:fillRef>
+        <a:effectRef idx="1">
+          <a:schemeClr val="accent1"/>
+        </a:effectRef>
+        <a:fontRef idx="minor">
+          <a:schemeClr val="tx1"/>
+        </a:fontRef>
+      </a:style>
+    </a:lnDef>
+  </a:objectDefaults>
   <a:extraClrSchemeLst/>
-  <a:extLst>
-    <a:ext uri="{05A4C25C-085E-4340-85A3-A5531E510DB2}">
-      <thm15:themeFamily xmlns:thm15="http://schemas.microsoft.com/office/thememl/2012/main" name="Office Theme" id="{62F939B6-93AF-4DB8-9C6B-D6C7DFDC589F}" vid="{4A3C46E8-61CC-4603-A589-7422A47A8E4A}"/>
-    </a:ext>
-  </a:extLst>
 </a:theme>
 </file>